--- a/stage_1_presentation_v2.pptx
+++ b/stage_1_presentation_v2.pptx
@@ -5,20 +5,23 @@
     <p:sldMasterId id="2147483648" r:id="rId1"/>
   </p:sldMasterIdLst>
   <p:notesMasterIdLst>
-    <p:notesMasterId r:id="rId13"/>
+    <p:notesMasterId r:id="rId16"/>
   </p:notesMasterIdLst>
   <p:sldIdLst>
     <p:sldId id="256" r:id="rId2"/>
     <p:sldId id="257" r:id="rId3"/>
     <p:sldId id="258" r:id="rId4"/>
     <p:sldId id="259" r:id="rId5"/>
-    <p:sldId id="260" r:id="rId6"/>
-    <p:sldId id="261" r:id="rId7"/>
-    <p:sldId id="262" r:id="rId8"/>
-    <p:sldId id="263" r:id="rId9"/>
-    <p:sldId id="265" r:id="rId10"/>
-    <p:sldId id="266" r:id="rId11"/>
-    <p:sldId id="264" r:id="rId12"/>
+    <p:sldId id="268" r:id="rId6"/>
+    <p:sldId id="269" r:id="rId7"/>
+    <p:sldId id="267" r:id="rId8"/>
+    <p:sldId id="260" r:id="rId9"/>
+    <p:sldId id="261" r:id="rId10"/>
+    <p:sldId id="262" r:id="rId11"/>
+    <p:sldId id="263" r:id="rId12"/>
+    <p:sldId id="265" r:id="rId13"/>
+    <p:sldId id="266" r:id="rId14"/>
+    <p:sldId id="264" r:id="rId15"/>
   </p:sldIdLst>
   <p:sldSz cx="9144000" cy="5143500" type="screen16x9"/>
   <p:notesSz cx="5143500" cy="9144000"/>
@@ -396,7 +399,7 @@
           <a:p>
             <a:fld id="{F7021451-1387-4CA6-816F-3879F97B5CBC}" type="slidenum">
               <a:rPr lang="en-US"/>
-              <a:t>10</a:t>
+              <a:t>13</a:t>
             </a:fld>
             <a:endParaRPr lang="en-US"/>
           </a:p>
@@ -732,7 +735,7 @@
           <a:p>
             <a:fld id="{F7021451-1387-4CA6-816F-3879F97B5CBC}" type="slidenum">
               <a:rPr lang="en-US"/>
-              <a:t>5</a:t>
+              <a:t>8</a:t>
             </a:fld>
             <a:endParaRPr lang="en-US"/>
           </a:p>
@@ -816,7 +819,7 @@
           <a:p>
             <a:fld id="{F7021451-1387-4CA6-816F-3879F97B5CBC}" type="slidenum">
               <a:rPr lang="en-US"/>
-              <a:t>6</a:t>
+              <a:t>9</a:t>
             </a:fld>
             <a:endParaRPr lang="en-US"/>
           </a:p>
@@ -900,7 +903,7 @@
           <a:p>
             <a:fld id="{F7021451-1387-4CA6-816F-3879F97B5CBC}" type="slidenum">
               <a:rPr lang="en-US"/>
-              <a:t>7</a:t>
+              <a:t>10</a:t>
             </a:fld>
             <a:endParaRPr lang="en-US"/>
           </a:p>
@@ -984,7 +987,7 @@
           <a:p>
             <a:fld id="{F7021451-1387-4CA6-816F-3879F97B5CBC}" type="slidenum">
               <a:rPr lang="en-US"/>
-              <a:t>8</a:t>
+              <a:t>11</a:t>
             </a:fld>
             <a:endParaRPr lang="en-US"/>
           </a:p>
@@ -1068,7 +1071,7 @@
           <a:p>
             <a:fld id="{F7021451-1387-4CA6-816F-3879F97B5CBC}" type="slidenum">
               <a:rPr lang="en-US"/>
-              <a:t>9</a:t>
+              <a:t>12</a:t>
             </a:fld>
             <a:endParaRPr lang="en-US"/>
           </a:p>
@@ -1651,7 +1654,286 @@
                 <a:ea typeface="Calibri" pitchFamily="34" charset="-122"/>
                 <a:cs typeface="Calibri" pitchFamily="34" charset="-120"/>
               </a:rPr>
-              <a:t>Бъдещи подобрения</a:t>
+              <a:t>От текст през вектори към знание</a:t>
+            </a:r>
+            <a:endParaRPr lang="en-US" sz="3000" dirty="0"/>
+          </a:p>
+        </p:txBody>
+      </p:sp>
+      <p:sp>
+        <p:nvSpPr>
+          <p:cNvPr id="3" name="Text 1"/>
+          <p:cNvSpPr/>
+          <p:nvPr/>
+        </p:nvSpPr>
+        <p:spPr>
+          <a:xfrm>
+            <a:off x="640080" y="1280160"/>
+            <a:ext cx="7863840" cy="822960"/>
+          </a:xfrm>
+          <a:prstGeom prst="rect">
+            <a:avLst/>
+          </a:prstGeom>
+          <a:noFill/>
+          <a:ln/>
+        </p:spPr>
+        <p:txBody>
+          <a:bodyPr wrap="square" lIns="0" tIns="0" rIns="0" bIns="0" rtlCol="0" anchor="t"/>
+          <a:lstStyle/>
+          <a:p>
+            <a:pPr marL="0" indent="0">
+              <a:buNone/>
+            </a:pPr>
+            <a:r>
+              <a:rPr lang="bg-BG" sz="1500" i="1" dirty="0">
+                <a:solidFill>
+                  <a:srgbClr val="000000"/>
+                </a:solidFill>
+                <a:latin typeface="Calibri" pitchFamily="34" charset="0"/>
+                <a:ea typeface="Calibri" pitchFamily="34" charset="-122"/>
+                <a:cs typeface="Calibri" pitchFamily="34" charset="-120"/>
+              </a:rPr>
+              <a:t>Целта на тази част е да превърне форматирана начална информация в система, която да може да отговаря на въпроси на нишови потребителски въпроси</a:t>
+            </a:r>
+            <a:endParaRPr lang="en-US" sz="1500" dirty="0"/>
+          </a:p>
+        </p:txBody>
+      </p:sp>
+      <p:sp>
+        <p:nvSpPr>
+          <p:cNvPr id="4" name="Text 2"/>
+          <p:cNvSpPr/>
+          <p:nvPr/>
+        </p:nvSpPr>
+        <p:spPr>
+          <a:xfrm>
+            <a:off x="640080" y="2286000"/>
+            <a:ext cx="7863840" cy="365760"/>
+          </a:xfrm>
+          <a:prstGeom prst="rect">
+            <a:avLst/>
+          </a:prstGeom>
+          <a:noFill/>
+          <a:ln/>
+        </p:spPr>
+        <p:txBody>
+          <a:bodyPr wrap="square" lIns="0" tIns="0" rIns="0" bIns="0" rtlCol="0" anchor="ctr"/>
+          <a:lstStyle/>
+          <a:p>
+            <a:pPr marL="0" indent="0">
+              <a:buNone/>
+            </a:pPr>
+            <a:r>
+              <a:rPr lang="en-US" sz="1600" b="1" dirty="0">
+                <a:solidFill>
+                  <a:srgbClr val="000000"/>
+                </a:solidFill>
+                <a:latin typeface="Calibri" pitchFamily="34" charset="0"/>
+                <a:ea typeface="Calibri" pitchFamily="34" charset="-122"/>
+                <a:cs typeface="Calibri" pitchFamily="34" charset="-120"/>
+              </a:rPr>
+              <a:t>Основни стъпки:</a:t>
+            </a:r>
+            <a:endParaRPr lang="en-US" sz="1600" dirty="0"/>
+          </a:p>
+        </p:txBody>
+      </p:sp>
+      <p:sp>
+        <p:nvSpPr>
+          <p:cNvPr id="5" name="Text 3"/>
+          <p:cNvSpPr/>
+          <p:nvPr/>
+        </p:nvSpPr>
+        <p:spPr>
+          <a:xfrm>
+            <a:off x="822960" y="2697480"/>
+            <a:ext cx="7680960" cy="2286000"/>
+          </a:xfrm>
+          <a:prstGeom prst="rect">
+            <a:avLst/>
+          </a:prstGeom>
+          <a:noFill/>
+          <a:ln/>
+        </p:spPr>
+        <p:txBody>
+          <a:bodyPr wrap="square" lIns="0" tIns="0" rIns="0" bIns="0" rtlCol="0" anchor="t"/>
+          <a:lstStyle/>
+          <a:p>
+            <a:pPr marL="342900" indent="-342900">
+              <a:spcAft>
+                <a:spcPts val="400"/>
+              </a:spcAft>
+              <a:buSzPct val="100000"/>
+              <a:buFont typeface="+mj-lt"/>
+              <a:buAutoNum type="arabicPeriod"/>
+            </a:pPr>
+            <a:r>
+              <a:rPr lang="bg-BG" sz="1400" dirty="0">
+                <a:solidFill>
+                  <a:srgbClr val="000000"/>
+                </a:solidFill>
+                <a:latin typeface="Calibri" pitchFamily="34" charset="0"/>
+                <a:ea typeface="Calibri" pitchFamily="34" charset="-122"/>
+                <a:cs typeface="Calibri" pitchFamily="34" charset="-120"/>
+              </a:rPr>
+              <a:t>Прекарване на данните през </a:t>
+            </a:r>
+            <a:r>
+              <a:rPr lang="en-GB" sz="1400" dirty="0">
+                <a:solidFill>
+                  <a:srgbClr val="000000"/>
+                </a:solidFill>
+                <a:latin typeface="Calibri" pitchFamily="34" charset="0"/>
+                <a:ea typeface="Calibri" pitchFamily="34" charset="-122"/>
+                <a:cs typeface="Calibri" pitchFamily="34" charset="-120"/>
+              </a:rPr>
+              <a:t>embedding</a:t>
+            </a:r>
+            <a:r>
+              <a:rPr lang="bg-BG" sz="1400" dirty="0">
+                <a:solidFill>
+                  <a:srgbClr val="000000"/>
+                </a:solidFill>
+                <a:latin typeface="Calibri" pitchFamily="34" charset="0"/>
+                <a:ea typeface="Calibri" pitchFamily="34" charset="-122"/>
+                <a:cs typeface="Calibri" pitchFamily="34" charset="-120"/>
+              </a:rPr>
+              <a:t> модел за семантично кодиране</a:t>
+            </a:r>
+            <a:endParaRPr lang="en-US" sz="1400" dirty="0"/>
+          </a:p>
+          <a:p>
+            <a:pPr marL="342900" indent="-342900">
+              <a:spcAft>
+                <a:spcPts val="400"/>
+              </a:spcAft>
+              <a:buSzPct val="100000"/>
+              <a:buFont typeface="+mj-lt"/>
+              <a:buAutoNum type="arabicPeriod"/>
+            </a:pPr>
+            <a:r>
+              <a:rPr lang="bg-BG" sz="1400" dirty="0">
+                <a:solidFill>
+                  <a:srgbClr val="000000"/>
+                </a:solidFill>
+                <a:latin typeface="Calibri" pitchFamily="34" charset="0"/>
+                <a:ea typeface="Calibri" pitchFamily="34" charset="-122"/>
+                <a:cs typeface="Calibri" pitchFamily="34" charset="-120"/>
+              </a:rPr>
+              <a:t>Подготвяне на база знания във формат на вектори</a:t>
+            </a:r>
+            <a:endParaRPr lang="en-US" sz="1400" dirty="0"/>
+          </a:p>
+          <a:p>
+            <a:pPr marL="342900" indent="-342900">
+              <a:spcAft>
+                <a:spcPts val="400"/>
+              </a:spcAft>
+              <a:buSzPct val="100000"/>
+              <a:buFont typeface="+mj-lt"/>
+              <a:buAutoNum type="arabicPeriod"/>
+            </a:pPr>
+            <a:r>
+              <a:rPr lang="bg-BG" sz="1400" dirty="0">
+                <a:solidFill>
+                  <a:srgbClr val="000000"/>
+                </a:solidFill>
+                <a:latin typeface="Calibri" pitchFamily="34" charset="0"/>
+                <a:ea typeface="Calibri" pitchFamily="34" charset="-122"/>
+                <a:cs typeface="Calibri" pitchFamily="34" charset="-120"/>
+              </a:rPr>
+              <a:t>Задаване на поведение на агента</a:t>
+            </a:r>
+            <a:endParaRPr lang="en-US" sz="1400" dirty="0"/>
+          </a:p>
+          <a:p>
+            <a:pPr marL="342900" indent="-342900">
+              <a:spcAft>
+                <a:spcPts val="400"/>
+              </a:spcAft>
+              <a:buSzPct val="100000"/>
+              <a:buFont typeface="+mj-lt"/>
+              <a:buAutoNum type="arabicPeriod"/>
+            </a:pPr>
+            <a:r>
+              <a:rPr lang="bg-BG" sz="1400" dirty="0">
+                <a:solidFill>
+                  <a:srgbClr val="000000"/>
+                </a:solidFill>
+                <a:latin typeface="Calibri" pitchFamily="34" charset="0"/>
+                <a:ea typeface="Calibri" pitchFamily="34" charset="-122"/>
+                <a:cs typeface="Calibri" pitchFamily="34" charset="-120"/>
+              </a:rPr>
+              <a:t>Обработка на въпрос на потребителя</a:t>
+            </a:r>
+            <a:endParaRPr lang="en-US" sz="1400" dirty="0"/>
+          </a:p>
+        </p:txBody>
+      </p:sp>
+    </p:spTree>
+    <p:extLst>
+      <p:ext uri="{BB962C8B-B14F-4D97-AF65-F5344CB8AC3E}">
+        <p14:creationId xmlns:p14="http://schemas.microsoft.com/office/powerpoint/2010/main" val="1837750681"/>
+      </p:ext>
+    </p:extLst>
+  </p:cSld>
+  <p:clrMapOvr>
+    <a:masterClrMapping/>
+  </p:clrMapOvr>
+</p:sld>
+</file>
+
+<file path=ppt/slides/slide11.xml><?xml version="1.0" encoding="utf-8"?>
+<p:sld xmlns:a="http://schemas.openxmlformats.org/drawingml/2006/main" xmlns:r="http://schemas.openxmlformats.org/officeDocument/2006/relationships" xmlns:p="http://schemas.openxmlformats.org/presentationml/2006/main">
+  <p:cSld>
+    <p:spTree>
+      <p:nvGrpSpPr>
+        <p:cNvPr id="1" name=""/>
+        <p:cNvGrpSpPr/>
+        <p:nvPr/>
+      </p:nvGrpSpPr>
+      <p:grpSpPr>
+        <a:xfrm>
+          <a:off x="0" y="0"/>
+          <a:ext cx="0" cy="0"/>
+          <a:chOff x="0" y="0"/>
+          <a:chExt cx="0" cy="0"/>
+        </a:xfrm>
+      </p:grpSpPr>
+      <p:sp>
+        <p:nvSpPr>
+          <p:cNvPr id="2" name="Text 0"/>
+          <p:cNvSpPr/>
+          <p:nvPr/>
+        </p:nvSpPr>
+        <p:spPr>
+          <a:xfrm>
+            <a:off x="640080" y="457200"/>
+            <a:ext cx="7863840" cy="640080"/>
+          </a:xfrm>
+          <a:prstGeom prst="rect">
+            <a:avLst/>
+          </a:prstGeom>
+          <a:noFill/>
+          <a:ln/>
+        </p:spPr>
+        <p:txBody>
+          <a:bodyPr wrap="square" lIns="0" tIns="0" rIns="0" bIns="0" rtlCol="0" anchor="ctr"/>
+          <a:lstStyle/>
+          <a:p>
+            <a:pPr marL="0" indent="0">
+              <a:buNone/>
+            </a:pPr>
+            <a:r>
+              <a:rPr lang="bg-BG" sz="3000" b="1" dirty="0">
+                <a:solidFill>
+                  <a:srgbClr val="000000"/>
+                </a:solidFill>
+                <a:latin typeface="Calibri" pitchFamily="34" charset="0"/>
+                <a:ea typeface="Calibri" pitchFamily="34" charset="-122"/>
+                <a:cs typeface="Calibri" pitchFamily="34" charset="-120"/>
+              </a:rPr>
+              <a:t>Технологичен стек:</a:t>
             </a:r>
             <a:endParaRPr lang="en-US" sz="3000" dirty="0"/>
           </a:p>
@@ -1678,6 +1960,412 @@
           <a:bodyPr wrap="square" lIns="0" tIns="0" rIns="0" bIns="0" rtlCol="0" anchor="t"/>
           <a:lstStyle/>
           <a:p>
+            <a:pPr marL="285750" indent="-285750">
+              <a:spcAft>
+                <a:spcPts val="400"/>
+              </a:spcAft>
+              <a:buSzPct val="100000"/>
+              <a:buFont typeface="Arial" panose="020B0604020202020204" pitchFamily="34" charset="0"/>
+              <a:buChar char="•"/>
+            </a:pPr>
+            <a:r>
+              <a:rPr lang="en-GB" dirty="0"/>
+              <a:t>Multilingual-E5</a:t>
+            </a:r>
+          </a:p>
+          <a:p>
+            <a:pPr marL="742950" lvl="1" indent="-285750">
+              <a:spcAft>
+                <a:spcPts val="400"/>
+              </a:spcAft>
+              <a:buSzPct val="100000"/>
+              <a:buFont typeface="Arial" panose="020B0604020202020204" pitchFamily="34" charset="0"/>
+              <a:buChar char="•"/>
+            </a:pPr>
+            <a:r>
+              <a:rPr lang="bg-BG" dirty="0"/>
+              <a:t>Локален модел на </a:t>
+            </a:r>
+            <a:r>
+              <a:rPr lang="en-GB" dirty="0"/>
+              <a:t>Microsoft</a:t>
+            </a:r>
+            <a:r>
+              <a:rPr lang="bg-BG" dirty="0"/>
+              <a:t> за </a:t>
+            </a:r>
+            <a:r>
+              <a:rPr lang="en-GB" dirty="0"/>
+              <a:t>embeddings</a:t>
+            </a:r>
+          </a:p>
+          <a:p>
+            <a:pPr marL="285750" indent="-285750">
+              <a:spcAft>
+                <a:spcPts val="400"/>
+              </a:spcAft>
+              <a:buSzPct val="100000"/>
+              <a:buFont typeface="Arial" panose="020B0604020202020204" pitchFamily="34" charset="0"/>
+              <a:buChar char="•"/>
+            </a:pPr>
+            <a:endParaRPr lang="bg-BG" dirty="0"/>
+          </a:p>
+          <a:p>
+            <a:pPr marL="285750" indent="-285750">
+              <a:spcAft>
+                <a:spcPts val="400"/>
+              </a:spcAft>
+              <a:buSzPct val="100000"/>
+              <a:buFont typeface="Arial" panose="020B0604020202020204" pitchFamily="34" charset="0"/>
+              <a:buChar char="•"/>
+            </a:pPr>
+            <a:r>
+              <a:rPr lang="en-GB" dirty="0"/>
+              <a:t>FAISS</a:t>
+            </a:r>
+          </a:p>
+          <a:p>
+            <a:pPr marL="742950" lvl="1" indent="-285750">
+              <a:spcAft>
+                <a:spcPts val="400"/>
+              </a:spcAft>
+              <a:buSzPct val="100000"/>
+              <a:buFont typeface="Arial" panose="020B0604020202020204" pitchFamily="34" charset="0"/>
+              <a:buChar char="•"/>
+            </a:pPr>
+            <a:r>
+              <a:rPr lang="bg-BG" dirty="0"/>
+              <a:t>Библиотека на </a:t>
+            </a:r>
+            <a:r>
+              <a:rPr lang="en-GB" dirty="0"/>
+              <a:t>Facebook (Meta) </a:t>
+            </a:r>
+            <a:r>
+              <a:rPr lang="bg-BG" dirty="0"/>
+              <a:t>за векторно търсене</a:t>
+            </a:r>
+            <a:endParaRPr lang="en-GB" dirty="0"/>
+          </a:p>
+          <a:p>
+            <a:pPr marL="742950" lvl="1" indent="-285750">
+              <a:spcAft>
+                <a:spcPts val="400"/>
+              </a:spcAft>
+              <a:buSzPct val="100000"/>
+              <a:buFont typeface="Arial" panose="020B0604020202020204" pitchFamily="34" charset="0"/>
+              <a:buChar char="•"/>
+            </a:pPr>
+            <a:endParaRPr lang="en-GB" dirty="0"/>
+          </a:p>
+          <a:p>
+            <a:pPr marL="285750" indent="-285750">
+              <a:spcAft>
+                <a:spcPts val="400"/>
+              </a:spcAft>
+              <a:buSzPct val="100000"/>
+              <a:buFont typeface="Arial" panose="020B0604020202020204" pitchFamily="34" charset="0"/>
+              <a:buChar char="•"/>
+            </a:pPr>
+            <a:r>
+              <a:rPr lang="en-GB" dirty="0"/>
+              <a:t>Gemini 2.5</a:t>
+            </a:r>
+          </a:p>
+          <a:p>
+            <a:pPr marL="742950" lvl="1" indent="-285750">
+              <a:spcAft>
+                <a:spcPts val="400"/>
+              </a:spcAft>
+              <a:buSzPct val="100000"/>
+              <a:buFont typeface="Arial" panose="020B0604020202020204" pitchFamily="34" charset="0"/>
+              <a:buChar char="•"/>
+            </a:pPr>
+            <a:r>
+              <a:rPr lang="bg-BG" dirty="0"/>
+              <a:t>Безплатна версия на добър за Български </a:t>
+            </a:r>
+            <a:r>
+              <a:rPr lang="en-GB" dirty="0"/>
+              <a:t>LLM </a:t>
+            </a:r>
+            <a:r>
+              <a:rPr lang="bg-BG" dirty="0"/>
+              <a:t> за генериране на отговор</a:t>
+            </a:r>
+            <a:endParaRPr lang="en-GB" dirty="0"/>
+          </a:p>
+          <a:p>
+            <a:pPr marL="285750" indent="-285750">
+              <a:spcAft>
+                <a:spcPts val="400"/>
+              </a:spcAft>
+              <a:buSzPct val="100000"/>
+              <a:buFont typeface="Arial" panose="020B0604020202020204" pitchFamily="34" charset="0"/>
+              <a:buChar char="•"/>
+            </a:pPr>
+            <a:endParaRPr lang="bg-BG" dirty="0"/>
+          </a:p>
+        </p:txBody>
+      </p:sp>
+    </p:spTree>
+    <p:extLst>
+      <p:ext uri="{BB962C8B-B14F-4D97-AF65-F5344CB8AC3E}">
+        <p14:creationId xmlns:p14="http://schemas.microsoft.com/office/powerpoint/2010/main" val="372776953"/>
+      </p:ext>
+    </p:extLst>
+  </p:cSld>
+  <p:clrMapOvr>
+    <a:masterClrMapping/>
+  </p:clrMapOvr>
+</p:sld>
+</file>
+
+<file path=ppt/slides/slide12.xml><?xml version="1.0" encoding="utf-8"?>
+<p:sld xmlns:a="http://schemas.openxmlformats.org/drawingml/2006/main" xmlns:r="http://schemas.openxmlformats.org/officeDocument/2006/relationships" xmlns:p="http://schemas.openxmlformats.org/presentationml/2006/main">
+  <p:cSld>
+    <p:spTree>
+      <p:nvGrpSpPr>
+        <p:cNvPr id="1" name=""/>
+        <p:cNvGrpSpPr/>
+        <p:nvPr/>
+      </p:nvGrpSpPr>
+      <p:grpSpPr>
+        <a:xfrm>
+          <a:off x="0" y="0"/>
+          <a:ext cx="0" cy="0"/>
+          <a:chOff x="0" y="0"/>
+          <a:chExt cx="0" cy="0"/>
+        </a:xfrm>
+      </p:grpSpPr>
+      <p:sp>
+        <p:nvSpPr>
+          <p:cNvPr id="2" name="Text 0"/>
+          <p:cNvSpPr/>
+          <p:nvPr/>
+        </p:nvSpPr>
+        <p:spPr>
+          <a:xfrm>
+            <a:off x="640080" y="457200"/>
+            <a:ext cx="7863840" cy="640080"/>
+          </a:xfrm>
+          <a:prstGeom prst="rect">
+            <a:avLst/>
+          </a:prstGeom>
+          <a:noFill/>
+          <a:ln/>
+        </p:spPr>
+        <p:txBody>
+          <a:bodyPr wrap="square" lIns="0" tIns="0" rIns="0" bIns="0" rtlCol="0" anchor="ctr"/>
+          <a:lstStyle/>
+          <a:p>
+            <a:pPr marL="0" indent="0">
+              <a:buNone/>
+            </a:pPr>
+            <a:r>
+              <a:rPr lang="en-GB" sz="3000" b="1" dirty="0">
+                <a:solidFill>
+                  <a:srgbClr val="000000"/>
+                </a:solidFill>
+                <a:latin typeface="Calibri" pitchFamily="34" charset="0"/>
+                <a:ea typeface="Calibri" pitchFamily="34" charset="-122"/>
+                <a:cs typeface="Calibri" pitchFamily="34" charset="-120"/>
+              </a:rPr>
+              <a:t>RAG Pipeline</a:t>
+            </a:r>
+            <a:endParaRPr lang="en-US" sz="3000" dirty="0"/>
+          </a:p>
+        </p:txBody>
+      </p:sp>
+      <p:sp>
+        <p:nvSpPr>
+          <p:cNvPr id="5" name="Text 3"/>
+          <p:cNvSpPr/>
+          <p:nvPr/>
+        </p:nvSpPr>
+        <p:spPr>
+          <a:xfrm>
+            <a:off x="640080" y="1428750"/>
+            <a:ext cx="7680960" cy="2286000"/>
+          </a:xfrm>
+          <a:prstGeom prst="rect">
+            <a:avLst/>
+          </a:prstGeom>
+          <a:noFill/>
+          <a:ln/>
+        </p:spPr>
+        <p:txBody>
+          <a:bodyPr wrap="square" lIns="0" tIns="0" rIns="0" bIns="0" rtlCol="0" anchor="t"/>
+          <a:lstStyle/>
+          <a:p>
+            <a:pPr marL="342900" indent="-342900">
+              <a:spcAft>
+                <a:spcPts val="400"/>
+              </a:spcAft>
+              <a:buSzPct val="100000"/>
+              <a:buFont typeface="+mj-lt"/>
+              <a:buAutoNum type="arabicPeriod"/>
+            </a:pPr>
+            <a:r>
+              <a:rPr lang="bg-BG" dirty="0"/>
+              <a:t>Кодираме въпроса (</a:t>
+            </a:r>
+            <a:r>
+              <a:rPr lang="en-GB" dirty="0"/>
+              <a:t>Query)</a:t>
+            </a:r>
+            <a:endParaRPr lang="bg-BG" dirty="0"/>
+          </a:p>
+          <a:p>
+            <a:pPr marL="342900" indent="-342900">
+              <a:spcAft>
+                <a:spcPts val="400"/>
+              </a:spcAft>
+              <a:buSzPct val="100000"/>
+              <a:buFont typeface="+mj-lt"/>
+              <a:buAutoNum type="arabicPeriod"/>
+            </a:pPr>
+            <a:r>
+              <a:rPr lang="bg-BG" dirty="0"/>
+              <a:t>Извличаме на </a:t>
+            </a:r>
+            <a:r>
+              <a:rPr lang="en-GB" dirty="0"/>
+              <a:t>Top-K</a:t>
+            </a:r>
+            <a:r>
+              <a:rPr lang="bg-BG" dirty="0"/>
+              <a:t> съвпадения за контекст (</a:t>
+            </a:r>
+            <a:r>
+              <a:rPr lang="en-GB" dirty="0"/>
+              <a:t>Retrieval)</a:t>
+            </a:r>
+          </a:p>
+          <a:p>
+            <a:pPr marL="342900" indent="-342900">
+              <a:spcAft>
+                <a:spcPts val="400"/>
+              </a:spcAft>
+              <a:buSzPct val="100000"/>
+              <a:buFont typeface="+mj-lt"/>
+              <a:buAutoNum type="arabicPeriod"/>
+            </a:pPr>
+            <a:r>
+              <a:rPr lang="bg-BG" dirty="0"/>
+              <a:t>Подаваме цялата информация заедно със системния промпт на </a:t>
+            </a:r>
+            <a:r>
+              <a:rPr lang="en-GB" dirty="0"/>
+              <a:t>Gemini</a:t>
+            </a:r>
+          </a:p>
+          <a:p>
+            <a:pPr marL="342900" indent="-342900">
+              <a:spcAft>
+                <a:spcPts val="400"/>
+              </a:spcAft>
+              <a:buSzPct val="100000"/>
+              <a:buFont typeface="+mj-lt"/>
+              <a:buAutoNum type="arabicPeriod"/>
+            </a:pPr>
+            <a:r>
+              <a:rPr lang="bg-BG" dirty="0"/>
+              <a:t>Връщаме положителен отговор с цитиране на закон и член или отговор за липсва на подходящ контекст</a:t>
+            </a:r>
+          </a:p>
+        </p:txBody>
+      </p:sp>
+    </p:spTree>
+    <p:extLst>
+      <p:ext uri="{BB962C8B-B14F-4D97-AF65-F5344CB8AC3E}">
+        <p14:creationId xmlns:p14="http://schemas.microsoft.com/office/powerpoint/2010/main" val="322112032"/>
+      </p:ext>
+    </p:extLst>
+  </p:cSld>
+  <p:clrMapOvr>
+    <a:masterClrMapping/>
+  </p:clrMapOvr>
+</p:sld>
+</file>
+
+<file path=ppt/slides/slide13.xml><?xml version="1.0" encoding="utf-8"?>
+<p:sld xmlns:a="http://schemas.openxmlformats.org/drawingml/2006/main" xmlns:r="http://schemas.openxmlformats.org/officeDocument/2006/relationships" xmlns:p="http://schemas.openxmlformats.org/presentationml/2006/main">
+  <p:cSld>
+    <p:spTree>
+      <p:nvGrpSpPr>
+        <p:cNvPr id="1" name=""/>
+        <p:cNvGrpSpPr/>
+        <p:nvPr/>
+      </p:nvGrpSpPr>
+      <p:grpSpPr>
+        <a:xfrm>
+          <a:off x="0" y="0"/>
+          <a:ext cx="0" cy="0"/>
+          <a:chOff x="0" y="0"/>
+          <a:chExt cx="0" cy="0"/>
+        </a:xfrm>
+      </p:grpSpPr>
+      <p:sp>
+        <p:nvSpPr>
+          <p:cNvPr id="2" name="Text 0"/>
+          <p:cNvSpPr/>
+          <p:nvPr/>
+        </p:nvSpPr>
+        <p:spPr>
+          <a:xfrm>
+            <a:off x="640080" y="457200"/>
+            <a:ext cx="7863840" cy="640080"/>
+          </a:xfrm>
+          <a:prstGeom prst="rect">
+            <a:avLst/>
+          </a:prstGeom>
+          <a:noFill/>
+          <a:ln/>
+        </p:spPr>
+        <p:txBody>
+          <a:bodyPr wrap="square" lIns="0" tIns="0" rIns="0" bIns="0" rtlCol="0" anchor="ctr"/>
+          <a:lstStyle/>
+          <a:p>
+            <a:pPr marL="0" indent="0">
+              <a:buNone/>
+            </a:pPr>
+            <a:r>
+              <a:rPr lang="bg-BG" sz="3000" b="1" dirty="0">
+                <a:solidFill>
+                  <a:srgbClr val="000000"/>
+                </a:solidFill>
+                <a:latin typeface="Calibri" pitchFamily="34" charset="0"/>
+                <a:ea typeface="Calibri" pitchFamily="34" charset="-122"/>
+                <a:cs typeface="Calibri" pitchFamily="34" charset="-120"/>
+              </a:rPr>
+              <a:t>Бъдещи подобрения</a:t>
+            </a:r>
+            <a:endParaRPr lang="en-US" sz="3000" dirty="0"/>
+          </a:p>
+        </p:txBody>
+      </p:sp>
+      <p:sp>
+        <p:nvSpPr>
+          <p:cNvPr id="5" name="Text 3"/>
+          <p:cNvSpPr/>
+          <p:nvPr/>
+        </p:nvSpPr>
+        <p:spPr>
+          <a:xfrm>
+            <a:off x="640080" y="1428750"/>
+            <a:ext cx="7680960" cy="2286000"/>
+          </a:xfrm>
+          <a:prstGeom prst="rect">
+            <a:avLst/>
+          </a:prstGeom>
+          <a:noFill/>
+          <a:ln/>
+        </p:spPr>
+        <p:txBody>
+          <a:bodyPr wrap="square" lIns="0" tIns="0" rIns="0" bIns="0" rtlCol="0" anchor="t"/>
+          <a:lstStyle/>
+          <a:p>
             <a:pPr marL="342900" indent="-342900">
               <a:spcAft>
                 <a:spcPts val="400"/>
@@ -1752,7 +2440,7 @@
 </p:sld>
 </file>
 
-<file path=ppt/slides/slide11.xml><?xml version="1.0" encoding="utf-8"?>
+<file path=ppt/slides/slide14.xml><?xml version="1.0" encoding="utf-8"?>
 <p:sld xmlns:a="http://schemas.openxmlformats.org/drawingml/2006/main" xmlns:r="http://schemas.openxmlformats.org/officeDocument/2006/relationships" xmlns:p="http://schemas.openxmlformats.org/presentationml/2006/main">
   <p:cSld>
     <p:spTree>
@@ -3996,6 +4684,4421 @@
 
 <file path=ppt/slides/slide5.xml><?xml version="1.0" encoding="utf-8"?>
 <p:sld xmlns:a="http://schemas.openxmlformats.org/drawingml/2006/main" xmlns:r="http://schemas.openxmlformats.org/officeDocument/2006/relationships" xmlns:p="http://schemas.openxmlformats.org/presentationml/2006/main">
+  <p:cSld>
+    <p:spTree>
+      <p:nvGrpSpPr>
+        <p:cNvPr id="1" name=""/>
+        <p:cNvGrpSpPr/>
+        <p:nvPr/>
+      </p:nvGrpSpPr>
+      <p:grpSpPr>
+        <a:xfrm>
+          <a:off x="0" y="0"/>
+          <a:ext cx="0" cy="0"/>
+          <a:chOff x="0" y="0"/>
+          <a:chExt cx="0" cy="0"/>
+        </a:xfrm>
+      </p:grpSpPr>
+      <p:sp>
+        <p:nvSpPr>
+          <p:cNvPr id="2" name="Text 0">
+            <a:extLst>
+              <a:ext uri="{FF2B5EF4-FFF2-40B4-BE49-F238E27FC236}">
+                <a16:creationId xmlns:a16="http://schemas.microsoft.com/office/drawing/2014/main" id="{4C213357-A9A2-4E37-A147-F01E680EB2FB}"/>
+              </a:ext>
+            </a:extLst>
+          </p:cNvPr>
+          <p:cNvSpPr/>
+          <p:nvPr/>
+        </p:nvSpPr>
+        <p:spPr>
+          <a:xfrm>
+            <a:off x="457200" y="274320"/>
+            <a:ext cx="8229600" cy="502920"/>
+          </a:xfrm>
+          <a:prstGeom prst="rect">
+            <a:avLst/>
+          </a:prstGeom>
+          <a:noFill/>
+          <a:ln/>
+        </p:spPr>
+        <p:txBody>
+          <a:bodyPr wrap="square" lIns="0" tIns="0" rIns="0" bIns="0" rtlCol="0" anchor="ctr"/>
+          <a:lstStyle/>
+          <a:p>
+            <a:pPr marL="0" indent="0">
+              <a:buNone/>
+            </a:pPr>
+            <a:r>
+              <a:rPr lang="en-US" sz="2400" b="1" dirty="0">
+                <a:solidFill>
+                  <a:srgbClr val="000000"/>
+                </a:solidFill>
+                <a:latin typeface="Calibri" pitchFamily="34" charset="0"/>
+                <a:ea typeface="Calibri" pitchFamily="34" charset="-122"/>
+                <a:cs typeface="Calibri" pitchFamily="34" charset="-120"/>
+              </a:rPr>
+              <a:t>Отчет за качество </a:t>
+            </a:r>
+            <a:r>
+              <a:rPr lang="en-US" sz="2400" b="1" dirty="0" err="1">
+                <a:solidFill>
+                  <a:srgbClr val="000000"/>
+                </a:solidFill>
+                <a:latin typeface="Calibri" pitchFamily="34" charset="0"/>
+                <a:ea typeface="Calibri" pitchFamily="34" charset="-122"/>
+                <a:cs typeface="Calibri" pitchFamily="34" charset="-120"/>
+              </a:rPr>
+              <a:t>на</a:t>
+            </a:r>
+            <a:r>
+              <a:rPr lang="en-US" sz="2400" b="1" dirty="0">
+                <a:solidFill>
+                  <a:srgbClr val="000000"/>
+                </a:solidFill>
+                <a:latin typeface="Calibri" pitchFamily="34" charset="0"/>
+                <a:ea typeface="Calibri" pitchFamily="34" charset="-122"/>
+                <a:cs typeface="Calibri" pitchFamily="34" charset="-120"/>
+              </a:rPr>
+              <a:t> </a:t>
+            </a:r>
+            <a:r>
+              <a:rPr lang="en-US" sz="2400" b="1" dirty="0" err="1">
+                <a:solidFill>
+                  <a:srgbClr val="000000"/>
+                </a:solidFill>
+                <a:latin typeface="Calibri" pitchFamily="34" charset="0"/>
+                <a:ea typeface="Calibri" pitchFamily="34" charset="-122"/>
+                <a:cs typeface="Calibri" pitchFamily="34" charset="-120"/>
+              </a:rPr>
+              <a:t>даннит</a:t>
+            </a:r>
+            <a:r>
+              <a:rPr lang="bg-BG" sz="2400" b="1" dirty="0">
+                <a:solidFill>
+                  <a:srgbClr val="000000"/>
+                </a:solidFill>
+                <a:latin typeface="Calibri" pitchFamily="34" charset="0"/>
+                <a:ea typeface="Calibri" pitchFamily="34" charset="-122"/>
+                <a:cs typeface="Calibri" pitchFamily="34" charset="-120"/>
+              </a:rPr>
+              <a:t>е</a:t>
+            </a:r>
+            <a:endParaRPr lang="en-US" sz="2400" dirty="0"/>
+          </a:p>
+        </p:txBody>
+      </p:sp>
+      <p:sp>
+        <p:nvSpPr>
+          <p:cNvPr id="3" name="Text 1">
+            <a:extLst>
+              <a:ext uri="{FF2B5EF4-FFF2-40B4-BE49-F238E27FC236}">
+                <a16:creationId xmlns:a16="http://schemas.microsoft.com/office/drawing/2014/main" id="{2218B9A4-8EA9-416C-A022-5FE0C4505805}"/>
+              </a:ext>
+            </a:extLst>
+          </p:cNvPr>
+          <p:cNvSpPr/>
+          <p:nvPr/>
+        </p:nvSpPr>
+        <p:spPr>
+          <a:xfrm>
+            <a:off x="457200" y="777240"/>
+            <a:ext cx="8229600" cy="320040"/>
+          </a:xfrm>
+          <a:prstGeom prst="rect">
+            <a:avLst/>
+          </a:prstGeom>
+          <a:noFill/>
+          <a:ln/>
+        </p:spPr>
+        <p:txBody>
+          <a:bodyPr wrap="square" lIns="0" tIns="0" rIns="0" bIns="0" rtlCol="0" anchor="ctr"/>
+          <a:lstStyle/>
+          <a:p>
+            <a:pPr marL="0" indent="0">
+              <a:buNone/>
+            </a:pPr>
+            <a:r>
+              <a:rPr lang="en-US" sz="1300" i="1" dirty="0">
+                <a:solidFill>
+                  <a:srgbClr val="000000"/>
+                </a:solidFill>
+                <a:latin typeface="Calibri" pitchFamily="34" charset="0"/>
+                <a:ea typeface="Calibri" pitchFamily="34" charset="-122"/>
+                <a:cs typeface="Calibri" pitchFamily="34" charset="-120"/>
+              </a:rPr>
+              <a:t>Корпус: 5 закона  •  5 897 чънка  •  1 388 уникални члена</a:t>
+            </a:r>
+            <a:endParaRPr lang="en-US" sz="1300" dirty="0"/>
+          </a:p>
+        </p:txBody>
+      </p:sp>
+      <p:sp>
+        <p:nvSpPr>
+          <p:cNvPr id="4" name="Text 2">
+            <a:extLst>
+              <a:ext uri="{FF2B5EF4-FFF2-40B4-BE49-F238E27FC236}">
+                <a16:creationId xmlns:a16="http://schemas.microsoft.com/office/drawing/2014/main" id="{14718BB4-9408-4B3C-95E0-E54A61851F7A}"/>
+              </a:ext>
+            </a:extLst>
+          </p:cNvPr>
+          <p:cNvSpPr/>
+          <p:nvPr/>
+        </p:nvSpPr>
+        <p:spPr>
+          <a:xfrm>
+            <a:off x="457200" y="1234440"/>
+            <a:ext cx="4572000" cy="274320"/>
+          </a:xfrm>
+          <a:prstGeom prst="rect">
+            <a:avLst/>
+          </a:prstGeom>
+          <a:noFill/>
+          <a:ln/>
+        </p:spPr>
+        <p:txBody>
+          <a:bodyPr wrap="square" lIns="0" tIns="0" rIns="0" bIns="0" rtlCol="0" anchor="ctr"/>
+          <a:lstStyle/>
+          <a:p>
+            <a:pPr marL="0" indent="0">
+              <a:buNone/>
+            </a:pPr>
+            <a:r>
+              <a:rPr lang="en-US" sz="1300" b="1" dirty="0">
+                <a:solidFill>
+                  <a:srgbClr val="000000"/>
+                </a:solidFill>
+                <a:latin typeface="Calibri" pitchFamily="34" charset="0"/>
+                <a:ea typeface="Calibri" pitchFamily="34" charset="-122"/>
+                <a:cs typeface="Calibri" pitchFamily="34" charset="-120"/>
+              </a:rPr>
+              <a:t>Разбивка по закон</a:t>
+            </a:r>
+            <a:endParaRPr lang="en-US" sz="1300" dirty="0"/>
+          </a:p>
+        </p:txBody>
+      </p:sp>
+      <p:graphicFrame>
+        <p:nvGraphicFramePr>
+          <p:cNvPr id="5" name="Table 0">
+            <a:extLst>
+              <a:ext uri="{FF2B5EF4-FFF2-40B4-BE49-F238E27FC236}">
+                <a16:creationId xmlns:a16="http://schemas.microsoft.com/office/drawing/2014/main" id="{CA96E95C-F558-48D9-B559-C8A40D2AEE44}"/>
+              </a:ext>
+            </a:extLst>
+          </p:cNvPr>
+          <p:cNvGraphicFramePr>
+            <a:graphicFrameLocks noGrp="1"/>
+          </p:cNvGraphicFramePr>
+          <p:nvPr>
+            <p:extLst>
+              <p:ext uri="{D42A27DB-BD31-4B8C-83A1-F6EECF244321}">
+                <p14:modId xmlns:p14="http://schemas.microsoft.com/office/powerpoint/2010/main" val="312604839"/>
+              </p:ext>
+            </p:extLst>
+          </p:nvPr>
+        </p:nvGraphicFramePr>
+        <p:xfrm>
+          <a:off x="457200" y="1554480"/>
+          <a:ext cx="4572000" cy="1755648"/>
+        </p:xfrm>
+        <a:graphic>
+          <a:graphicData uri="http://schemas.openxmlformats.org/drawingml/2006/table">
+            <a:tbl>
+              <a:tblPr/>
+              <a:tblGrid>
+                <a:gridCol w="1463040">
+                  <a:extLst>
+                    <a:ext uri="{9D8B030D-6E8A-4147-A177-3AD203B41FA5}">
+                      <a16:colId xmlns:a16="http://schemas.microsoft.com/office/drawing/2014/main" val="20000"/>
+                    </a:ext>
+                  </a:extLst>
+                </a:gridCol>
+                <a:gridCol w="1188720">
+                  <a:extLst>
+                    <a:ext uri="{9D8B030D-6E8A-4147-A177-3AD203B41FA5}">
+                      <a16:colId xmlns:a16="http://schemas.microsoft.com/office/drawing/2014/main" val="20001"/>
+                    </a:ext>
+                  </a:extLst>
+                </a:gridCol>
+                <a:gridCol w="1005840">
+                  <a:extLst>
+                    <a:ext uri="{9D8B030D-6E8A-4147-A177-3AD203B41FA5}">
+                      <a16:colId xmlns:a16="http://schemas.microsoft.com/office/drawing/2014/main" val="20002"/>
+                    </a:ext>
+                  </a:extLst>
+                </a:gridCol>
+                <a:gridCol w="914400">
+                  <a:extLst>
+                    <a:ext uri="{9D8B030D-6E8A-4147-A177-3AD203B41FA5}">
+                      <a16:colId xmlns:a16="http://schemas.microsoft.com/office/drawing/2014/main" val="20003"/>
+                    </a:ext>
+                  </a:extLst>
+                </a:gridCol>
+              </a:tblGrid>
+              <a:tr h="292608">
+                <a:tc>
+                  <a:txBody>
+                    <a:bodyPr/>
+                    <a:lstStyle/>
+                    <a:p>
+                      <a:pPr marL="0" indent="0">
+                        <a:buNone/>
+                      </a:pPr>
+                      <a:r>
+                        <a:rPr lang="en-US" sz="1200" b="1" dirty="0">
+                          <a:solidFill>
+                            <a:srgbClr val="000000"/>
+                          </a:solidFill>
+                          <a:latin typeface="Calibri" pitchFamily="34" charset="0"/>
+                          <a:ea typeface="Calibri" pitchFamily="34" charset="-122"/>
+                          <a:cs typeface="Calibri" pitchFamily="34" charset="-120"/>
+                        </a:rPr>
+                        <a:t>Закон</a:t>
+                      </a:r>
+                      <a:endParaRPr lang="en-US" sz="1200" dirty="0">
+                        <a:latin typeface="Calibri" charset="0"/>
+                        <a:ea typeface="Calibri" charset="0"/>
+                        <a:cs typeface="Calibri" charset="0"/>
+                      </a:endParaRPr>
+                    </a:p>
+                  </a:txBody>
+                  <a:tcPr>
+                    <a:lnL w="6350" cap="flat" cmpd="sng" algn="ctr">
+                      <a:solidFill>
+                        <a:srgbClr val="AAAAAA"/>
+                      </a:solidFill>
+                      <a:prstDash val="solid"/>
+                      <a:round/>
+                      <a:headEnd type="none" w="med" len="med"/>
+                      <a:tailEnd type="none" w="med" len="med"/>
+                    </a:lnL>
+                    <a:lnR w="6350" cap="flat" cmpd="sng" algn="ctr">
+                      <a:solidFill>
+                        <a:srgbClr val="AAAAAA"/>
+                      </a:solidFill>
+                      <a:prstDash val="solid"/>
+                      <a:round/>
+                      <a:headEnd type="none" w="med" len="med"/>
+                      <a:tailEnd type="none" w="med" len="med"/>
+                    </a:lnR>
+                    <a:lnT w="6350" cap="flat" cmpd="sng" algn="ctr">
+                      <a:solidFill>
+                        <a:srgbClr val="AAAAAA"/>
+                      </a:solidFill>
+                      <a:prstDash val="solid"/>
+                      <a:round/>
+                      <a:headEnd type="none" w="med" len="med"/>
+                      <a:tailEnd type="none" w="med" len="med"/>
+                    </a:lnT>
+                    <a:lnB w="6350" cap="flat" cmpd="sng" algn="ctr">
+                      <a:solidFill>
+                        <a:srgbClr val="AAAAAA"/>
+                      </a:solidFill>
+                      <a:prstDash val="solid"/>
+                      <a:round/>
+                      <a:headEnd type="none" w="med" len="med"/>
+                      <a:tailEnd type="none" w="med" len="med"/>
+                    </a:lnB>
+                  </a:tcPr>
+                </a:tc>
+                <a:tc>
+                  <a:txBody>
+                    <a:bodyPr/>
+                    <a:lstStyle/>
+                    <a:p>
+                      <a:pPr marL="0" indent="0" algn="r">
+                        <a:buNone/>
+                      </a:pPr>
+                      <a:r>
+                        <a:rPr lang="en-US" sz="1200" b="1" dirty="0">
+                          <a:solidFill>
+                            <a:srgbClr val="000000"/>
+                          </a:solidFill>
+                          <a:latin typeface="Calibri" pitchFamily="34" charset="0"/>
+                          <a:ea typeface="Calibri" pitchFamily="34" charset="-122"/>
+                          <a:cs typeface="Calibri" pitchFamily="34" charset="-120"/>
+                        </a:rPr>
+                        <a:t>Чънкове</a:t>
+                      </a:r>
+                      <a:endParaRPr lang="en-US" sz="1200" dirty="0">
+                        <a:latin typeface="Calibri" charset="0"/>
+                        <a:ea typeface="Calibri" charset="0"/>
+                        <a:cs typeface="Calibri" charset="0"/>
+                      </a:endParaRPr>
+                    </a:p>
+                  </a:txBody>
+                  <a:tcPr>
+                    <a:lnL w="6350" cap="flat" cmpd="sng" algn="ctr">
+                      <a:solidFill>
+                        <a:srgbClr val="AAAAAA"/>
+                      </a:solidFill>
+                      <a:prstDash val="solid"/>
+                      <a:round/>
+                      <a:headEnd type="none" w="med" len="med"/>
+                      <a:tailEnd type="none" w="med" len="med"/>
+                    </a:lnL>
+                    <a:lnR w="6350" cap="flat" cmpd="sng" algn="ctr">
+                      <a:solidFill>
+                        <a:srgbClr val="AAAAAA"/>
+                      </a:solidFill>
+                      <a:prstDash val="solid"/>
+                      <a:round/>
+                      <a:headEnd type="none" w="med" len="med"/>
+                      <a:tailEnd type="none" w="med" len="med"/>
+                    </a:lnR>
+                    <a:lnT w="6350" cap="flat" cmpd="sng" algn="ctr">
+                      <a:solidFill>
+                        <a:srgbClr val="AAAAAA"/>
+                      </a:solidFill>
+                      <a:prstDash val="solid"/>
+                      <a:round/>
+                      <a:headEnd type="none" w="med" len="med"/>
+                      <a:tailEnd type="none" w="med" len="med"/>
+                    </a:lnT>
+                    <a:lnB w="6350" cap="flat" cmpd="sng" algn="ctr">
+                      <a:solidFill>
+                        <a:srgbClr val="AAAAAA"/>
+                      </a:solidFill>
+                      <a:prstDash val="solid"/>
+                      <a:round/>
+                      <a:headEnd type="none" w="med" len="med"/>
+                      <a:tailEnd type="none" w="med" len="med"/>
+                    </a:lnB>
+                  </a:tcPr>
+                </a:tc>
+                <a:tc>
+                  <a:txBody>
+                    <a:bodyPr/>
+                    <a:lstStyle/>
+                    <a:p>
+                      <a:pPr marL="0" indent="0" algn="r">
+                        <a:buNone/>
+                      </a:pPr>
+                      <a:r>
+                        <a:rPr lang="en-US" sz="1200" b="1" dirty="0">
+                          <a:solidFill>
+                            <a:srgbClr val="000000"/>
+                          </a:solidFill>
+                          <a:latin typeface="Calibri" pitchFamily="34" charset="0"/>
+                          <a:ea typeface="Calibri" pitchFamily="34" charset="-122"/>
+                          <a:cs typeface="Calibri" pitchFamily="34" charset="-120"/>
+                        </a:rPr>
+                        <a:t>Членове</a:t>
+                      </a:r>
+                      <a:endParaRPr lang="en-US" sz="1200" dirty="0">
+                        <a:latin typeface="Calibri" charset="0"/>
+                        <a:ea typeface="Calibri" charset="0"/>
+                        <a:cs typeface="Calibri" charset="0"/>
+                      </a:endParaRPr>
+                    </a:p>
+                  </a:txBody>
+                  <a:tcPr>
+                    <a:lnL w="6350" cap="flat" cmpd="sng" algn="ctr">
+                      <a:solidFill>
+                        <a:srgbClr val="AAAAAA"/>
+                      </a:solidFill>
+                      <a:prstDash val="solid"/>
+                      <a:round/>
+                      <a:headEnd type="none" w="med" len="med"/>
+                      <a:tailEnd type="none" w="med" len="med"/>
+                    </a:lnL>
+                    <a:lnR w="6350" cap="flat" cmpd="sng" algn="ctr">
+                      <a:solidFill>
+                        <a:srgbClr val="AAAAAA"/>
+                      </a:solidFill>
+                      <a:prstDash val="solid"/>
+                      <a:round/>
+                      <a:headEnd type="none" w="med" len="med"/>
+                      <a:tailEnd type="none" w="med" len="med"/>
+                    </a:lnR>
+                    <a:lnT w="6350" cap="flat" cmpd="sng" algn="ctr">
+                      <a:solidFill>
+                        <a:srgbClr val="AAAAAA"/>
+                      </a:solidFill>
+                      <a:prstDash val="solid"/>
+                      <a:round/>
+                      <a:headEnd type="none" w="med" len="med"/>
+                      <a:tailEnd type="none" w="med" len="med"/>
+                    </a:lnT>
+                    <a:lnB w="6350" cap="flat" cmpd="sng" algn="ctr">
+                      <a:solidFill>
+                        <a:srgbClr val="AAAAAA"/>
+                      </a:solidFill>
+                      <a:prstDash val="solid"/>
+                      <a:round/>
+                      <a:headEnd type="none" w="med" len="med"/>
+                      <a:tailEnd type="none" w="med" len="med"/>
+                    </a:lnB>
+                  </a:tcPr>
+                </a:tc>
+                <a:tc>
+                  <a:txBody>
+                    <a:bodyPr/>
+                    <a:lstStyle/>
+                    <a:p>
+                      <a:pPr marL="0" indent="0" algn="r">
+                        <a:buNone/>
+                      </a:pPr>
+                      <a:r>
+                        <a:rPr lang="en-US" sz="1200" b="1" dirty="0">
+                          <a:solidFill>
+                            <a:srgbClr val="000000"/>
+                          </a:solidFill>
+                          <a:latin typeface="Calibri" pitchFamily="34" charset="0"/>
+                          <a:ea typeface="Calibri" pitchFamily="34" charset="-122"/>
+                          <a:cs typeface="Calibri" pitchFamily="34" charset="-120"/>
+                        </a:rPr>
+                        <a:t>Отм.</a:t>
+                      </a:r>
+                      <a:endParaRPr lang="en-US" sz="1200" dirty="0">
+                        <a:latin typeface="Calibri" charset="0"/>
+                        <a:ea typeface="Calibri" charset="0"/>
+                        <a:cs typeface="Calibri" charset="0"/>
+                      </a:endParaRPr>
+                    </a:p>
+                  </a:txBody>
+                  <a:tcPr>
+                    <a:lnL w="6350" cap="flat" cmpd="sng" algn="ctr">
+                      <a:solidFill>
+                        <a:srgbClr val="AAAAAA"/>
+                      </a:solidFill>
+                      <a:prstDash val="solid"/>
+                      <a:round/>
+                      <a:headEnd type="none" w="med" len="med"/>
+                      <a:tailEnd type="none" w="med" len="med"/>
+                    </a:lnL>
+                    <a:lnR w="6350" cap="flat" cmpd="sng" algn="ctr">
+                      <a:solidFill>
+                        <a:srgbClr val="AAAAAA"/>
+                      </a:solidFill>
+                      <a:prstDash val="solid"/>
+                      <a:round/>
+                      <a:headEnd type="none" w="med" len="med"/>
+                      <a:tailEnd type="none" w="med" len="med"/>
+                    </a:lnR>
+                    <a:lnT w="6350" cap="flat" cmpd="sng" algn="ctr">
+                      <a:solidFill>
+                        <a:srgbClr val="AAAAAA"/>
+                      </a:solidFill>
+                      <a:prstDash val="solid"/>
+                      <a:round/>
+                      <a:headEnd type="none" w="med" len="med"/>
+                      <a:tailEnd type="none" w="med" len="med"/>
+                    </a:lnT>
+                    <a:lnB w="6350" cap="flat" cmpd="sng" algn="ctr">
+                      <a:solidFill>
+                        <a:srgbClr val="AAAAAA"/>
+                      </a:solidFill>
+                      <a:prstDash val="solid"/>
+                      <a:round/>
+                      <a:headEnd type="none" w="med" len="med"/>
+                      <a:tailEnd type="none" w="med" len="med"/>
+                    </a:lnB>
+                  </a:tcPr>
+                </a:tc>
+                <a:extLst>
+                  <a:ext uri="{0D108BD9-81ED-4DB2-BD59-A6C34878D82A}">
+                    <a16:rowId xmlns:a16="http://schemas.microsoft.com/office/drawing/2014/main" val="10000"/>
+                  </a:ext>
+                </a:extLst>
+              </a:tr>
+              <a:tr h="292608">
+                <a:tc>
+                  <a:txBody>
+                    <a:bodyPr/>
+                    <a:lstStyle/>
+                    <a:p>
+                      <a:pPr marL="0" indent="0">
+                        <a:buNone/>
+                      </a:pPr>
+                      <a:r>
+                        <a:rPr lang="en-US" sz="1200" dirty="0">
+                          <a:solidFill>
+                            <a:srgbClr val="000000"/>
+                          </a:solidFill>
+                          <a:latin typeface="Calibri" pitchFamily="34" charset="0"/>
+                          <a:ea typeface="Calibri" pitchFamily="34" charset="-122"/>
+                          <a:cs typeface="Calibri" pitchFamily="34" charset="-120"/>
+                        </a:rPr>
+                        <a:t>КСО</a:t>
+                      </a:r>
+                      <a:endParaRPr lang="en-US" sz="1200" dirty="0">
+                        <a:latin typeface="Calibri" charset="0"/>
+                        <a:ea typeface="Calibri" charset="0"/>
+                        <a:cs typeface="Calibri" charset="0"/>
+                      </a:endParaRPr>
+                    </a:p>
+                  </a:txBody>
+                  <a:tcPr>
+                    <a:lnL w="6350" cap="flat" cmpd="sng" algn="ctr">
+                      <a:solidFill>
+                        <a:srgbClr val="AAAAAA"/>
+                      </a:solidFill>
+                      <a:prstDash val="solid"/>
+                      <a:round/>
+                      <a:headEnd type="none" w="med" len="med"/>
+                      <a:tailEnd type="none" w="med" len="med"/>
+                    </a:lnL>
+                    <a:lnR w="6350" cap="flat" cmpd="sng" algn="ctr">
+                      <a:solidFill>
+                        <a:srgbClr val="AAAAAA"/>
+                      </a:solidFill>
+                      <a:prstDash val="solid"/>
+                      <a:round/>
+                      <a:headEnd type="none" w="med" len="med"/>
+                      <a:tailEnd type="none" w="med" len="med"/>
+                    </a:lnR>
+                    <a:lnT w="6350" cap="flat" cmpd="sng" algn="ctr">
+                      <a:solidFill>
+                        <a:srgbClr val="AAAAAA"/>
+                      </a:solidFill>
+                      <a:prstDash val="solid"/>
+                      <a:round/>
+                      <a:headEnd type="none" w="med" len="med"/>
+                      <a:tailEnd type="none" w="med" len="med"/>
+                    </a:lnT>
+                    <a:lnB w="6350" cap="flat" cmpd="sng" algn="ctr">
+                      <a:solidFill>
+                        <a:srgbClr val="AAAAAA"/>
+                      </a:solidFill>
+                      <a:prstDash val="solid"/>
+                      <a:round/>
+                      <a:headEnd type="none" w="med" len="med"/>
+                      <a:tailEnd type="none" w="med" len="med"/>
+                    </a:lnB>
+                  </a:tcPr>
+                </a:tc>
+                <a:tc>
+                  <a:txBody>
+                    <a:bodyPr/>
+                    <a:lstStyle/>
+                    <a:p>
+                      <a:pPr marL="0" indent="0" algn="r">
+                        <a:buNone/>
+                      </a:pPr>
+                      <a:r>
+                        <a:rPr lang="en-US" sz="1200" dirty="0">
+                          <a:solidFill>
+                            <a:srgbClr val="000000"/>
+                          </a:solidFill>
+                          <a:latin typeface="Calibri" pitchFamily="34" charset="0"/>
+                          <a:ea typeface="Calibri" pitchFamily="34" charset="-122"/>
+                          <a:cs typeface="Calibri" pitchFamily="34" charset="-120"/>
+                        </a:rPr>
+                        <a:t>2 469</a:t>
+                      </a:r>
+                      <a:endParaRPr lang="en-US" sz="1200" dirty="0">
+                        <a:latin typeface="Calibri" charset="0"/>
+                        <a:ea typeface="Calibri" charset="0"/>
+                        <a:cs typeface="Calibri" charset="0"/>
+                      </a:endParaRPr>
+                    </a:p>
+                  </a:txBody>
+                  <a:tcPr>
+                    <a:lnL w="6350" cap="flat" cmpd="sng" algn="ctr">
+                      <a:solidFill>
+                        <a:srgbClr val="AAAAAA"/>
+                      </a:solidFill>
+                      <a:prstDash val="solid"/>
+                      <a:round/>
+                      <a:headEnd type="none" w="med" len="med"/>
+                      <a:tailEnd type="none" w="med" len="med"/>
+                    </a:lnL>
+                    <a:lnR w="6350" cap="flat" cmpd="sng" algn="ctr">
+                      <a:solidFill>
+                        <a:srgbClr val="AAAAAA"/>
+                      </a:solidFill>
+                      <a:prstDash val="solid"/>
+                      <a:round/>
+                      <a:headEnd type="none" w="med" len="med"/>
+                      <a:tailEnd type="none" w="med" len="med"/>
+                    </a:lnR>
+                    <a:lnT w="6350" cap="flat" cmpd="sng" algn="ctr">
+                      <a:solidFill>
+                        <a:srgbClr val="AAAAAA"/>
+                      </a:solidFill>
+                      <a:prstDash val="solid"/>
+                      <a:round/>
+                      <a:headEnd type="none" w="med" len="med"/>
+                      <a:tailEnd type="none" w="med" len="med"/>
+                    </a:lnT>
+                    <a:lnB w="6350" cap="flat" cmpd="sng" algn="ctr">
+                      <a:solidFill>
+                        <a:srgbClr val="AAAAAA"/>
+                      </a:solidFill>
+                      <a:prstDash val="solid"/>
+                      <a:round/>
+                      <a:headEnd type="none" w="med" len="med"/>
+                      <a:tailEnd type="none" w="med" len="med"/>
+                    </a:lnB>
+                  </a:tcPr>
+                </a:tc>
+                <a:tc>
+                  <a:txBody>
+                    <a:bodyPr/>
+                    <a:lstStyle/>
+                    <a:p>
+                      <a:pPr marL="0" indent="0" algn="r">
+                        <a:buNone/>
+                      </a:pPr>
+                      <a:r>
+                        <a:rPr lang="en-US" sz="1200" dirty="0">
+                          <a:solidFill>
+                            <a:srgbClr val="000000"/>
+                          </a:solidFill>
+                          <a:latin typeface="Calibri" pitchFamily="34" charset="0"/>
+                          <a:ea typeface="Calibri" pitchFamily="34" charset="-122"/>
+                          <a:cs typeface="Calibri" pitchFamily="34" charset="-120"/>
+                        </a:rPr>
+                        <a:t>554</a:t>
+                      </a:r>
+                      <a:endParaRPr lang="en-US" sz="1200" dirty="0">
+                        <a:latin typeface="Calibri" charset="0"/>
+                        <a:ea typeface="Calibri" charset="0"/>
+                        <a:cs typeface="Calibri" charset="0"/>
+                      </a:endParaRPr>
+                    </a:p>
+                  </a:txBody>
+                  <a:tcPr>
+                    <a:lnL w="6350" cap="flat" cmpd="sng" algn="ctr">
+                      <a:solidFill>
+                        <a:srgbClr val="AAAAAA"/>
+                      </a:solidFill>
+                      <a:prstDash val="solid"/>
+                      <a:round/>
+                      <a:headEnd type="none" w="med" len="med"/>
+                      <a:tailEnd type="none" w="med" len="med"/>
+                    </a:lnL>
+                    <a:lnR w="6350" cap="flat" cmpd="sng" algn="ctr">
+                      <a:solidFill>
+                        <a:srgbClr val="AAAAAA"/>
+                      </a:solidFill>
+                      <a:prstDash val="solid"/>
+                      <a:round/>
+                      <a:headEnd type="none" w="med" len="med"/>
+                      <a:tailEnd type="none" w="med" len="med"/>
+                    </a:lnR>
+                    <a:lnT w="6350" cap="flat" cmpd="sng" algn="ctr">
+                      <a:solidFill>
+                        <a:srgbClr val="AAAAAA"/>
+                      </a:solidFill>
+                      <a:prstDash val="solid"/>
+                      <a:round/>
+                      <a:headEnd type="none" w="med" len="med"/>
+                      <a:tailEnd type="none" w="med" len="med"/>
+                    </a:lnT>
+                    <a:lnB w="6350" cap="flat" cmpd="sng" algn="ctr">
+                      <a:solidFill>
+                        <a:srgbClr val="AAAAAA"/>
+                      </a:solidFill>
+                      <a:prstDash val="solid"/>
+                      <a:round/>
+                      <a:headEnd type="none" w="med" len="med"/>
+                      <a:tailEnd type="none" w="med" len="med"/>
+                    </a:lnB>
+                  </a:tcPr>
+                </a:tc>
+                <a:tc>
+                  <a:txBody>
+                    <a:bodyPr/>
+                    <a:lstStyle/>
+                    <a:p>
+                      <a:pPr marL="0" indent="0" algn="r">
+                        <a:buNone/>
+                      </a:pPr>
+                      <a:r>
+                        <a:rPr lang="en-US" sz="1200" dirty="0">
+                          <a:solidFill>
+                            <a:srgbClr val="000000"/>
+                          </a:solidFill>
+                          <a:latin typeface="Calibri" pitchFamily="34" charset="0"/>
+                          <a:ea typeface="Calibri" pitchFamily="34" charset="-122"/>
+                          <a:cs typeface="Calibri" pitchFamily="34" charset="-120"/>
+                        </a:rPr>
+                        <a:t>40</a:t>
+                      </a:r>
+                      <a:endParaRPr lang="en-US" sz="1200" dirty="0">
+                        <a:latin typeface="Calibri" charset="0"/>
+                        <a:ea typeface="Calibri" charset="0"/>
+                        <a:cs typeface="Calibri" charset="0"/>
+                      </a:endParaRPr>
+                    </a:p>
+                  </a:txBody>
+                  <a:tcPr>
+                    <a:lnL w="6350" cap="flat" cmpd="sng" algn="ctr">
+                      <a:solidFill>
+                        <a:srgbClr val="AAAAAA"/>
+                      </a:solidFill>
+                      <a:prstDash val="solid"/>
+                      <a:round/>
+                      <a:headEnd type="none" w="med" len="med"/>
+                      <a:tailEnd type="none" w="med" len="med"/>
+                    </a:lnL>
+                    <a:lnR w="6350" cap="flat" cmpd="sng" algn="ctr">
+                      <a:solidFill>
+                        <a:srgbClr val="AAAAAA"/>
+                      </a:solidFill>
+                      <a:prstDash val="solid"/>
+                      <a:round/>
+                      <a:headEnd type="none" w="med" len="med"/>
+                      <a:tailEnd type="none" w="med" len="med"/>
+                    </a:lnR>
+                    <a:lnT w="6350" cap="flat" cmpd="sng" algn="ctr">
+                      <a:solidFill>
+                        <a:srgbClr val="AAAAAA"/>
+                      </a:solidFill>
+                      <a:prstDash val="solid"/>
+                      <a:round/>
+                      <a:headEnd type="none" w="med" len="med"/>
+                      <a:tailEnd type="none" w="med" len="med"/>
+                    </a:lnT>
+                    <a:lnB w="6350" cap="flat" cmpd="sng" algn="ctr">
+                      <a:solidFill>
+                        <a:srgbClr val="AAAAAA"/>
+                      </a:solidFill>
+                      <a:prstDash val="solid"/>
+                      <a:round/>
+                      <a:headEnd type="none" w="med" len="med"/>
+                      <a:tailEnd type="none" w="med" len="med"/>
+                    </a:lnB>
+                  </a:tcPr>
+                </a:tc>
+                <a:extLst>
+                  <a:ext uri="{0D108BD9-81ED-4DB2-BD59-A6C34878D82A}">
+                    <a16:rowId xmlns:a16="http://schemas.microsoft.com/office/drawing/2014/main" val="10001"/>
+                  </a:ext>
+                </a:extLst>
+              </a:tr>
+              <a:tr h="292608">
+                <a:tc>
+                  <a:txBody>
+                    <a:bodyPr/>
+                    <a:lstStyle/>
+                    <a:p>
+                      <a:pPr marL="0" indent="0">
+                        <a:buNone/>
+                      </a:pPr>
+                      <a:r>
+                        <a:rPr lang="en-US" sz="1200" dirty="0">
+                          <a:solidFill>
+                            <a:srgbClr val="000000"/>
+                          </a:solidFill>
+                          <a:latin typeface="Calibri" pitchFamily="34" charset="0"/>
+                          <a:ea typeface="Calibri" pitchFamily="34" charset="-122"/>
+                          <a:cs typeface="Calibri" pitchFamily="34" charset="-120"/>
+                        </a:rPr>
+                        <a:t>ЗДДС</a:t>
+                      </a:r>
+                      <a:endParaRPr lang="en-US" sz="1200" dirty="0">
+                        <a:latin typeface="Calibri" charset="0"/>
+                        <a:ea typeface="Calibri" charset="0"/>
+                        <a:cs typeface="Calibri" charset="0"/>
+                      </a:endParaRPr>
+                    </a:p>
+                  </a:txBody>
+                  <a:tcPr>
+                    <a:lnL w="6350" cap="flat" cmpd="sng" algn="ctr">
+                      <a:solidFill>
+                        <a:srgbClr val="AAAAAA"/>
+                      </a:solidFill>
+                      <a:prstDash val="solid"/>
+                      <a:round/>
+                      <a:headEnd type="none" w="med" len="med"/>
+                      <a:tailEnd type="none" w="med" len="med"/>
+                    </a:lnL>
+                    <a:lnR w="6350" cap="flat" cmpd="sng" algn="ctr">
+                      <a:solidFill>
+                        <a:srgbClr val="AAAAAA"/>
+                      </a:solidFill>
+                      <a:prstDash val="solid"/>
+                      <a:round/>
+                      <a:headEnd type="none" w="med" len="med"/>
+                      <a:tailEnd type="none" w="med" len="med"/>
+                    </a:lnR>
+                    <a:lnT w="6350" cap="flat" cmpd="sng" algn="ctr">
+                      <a:solidFill>
+                        <a:srgbClr val="AAAAAA"/>
+                      </a:solidFill>
+                      <a:prstDash val="solid"/>
+                      <a:round/>
+                      <a:headEnd type="none" w="med" len="med"/>
+                      <a:tailEnd type="none" w="med" len="med"/>
+                    </a:lnT>
+                    <a:lnB w="6350" cap="flat" cmpd="sng" algn="ctr">
+                      <a:solidFill>
+                        <a:srgbClr val="AAAAAA"/>
+                      </a:solidFill>
+                      <a:prstDash val="solid"/>
+                      <a:round/>
+                      <a:headEnd type="none" w="med" len="med"/>
+                      <a:tailEnd type="none" w="med" len="med"/>
+                    </a:lnB>
+                  </a:tcPr>
+                </a:tc>
+                <a:tc>
+                  <a:txBody>
+                    <a:bodyPr/>
+                    <a:lstStyle/>
+                    <a:p>
+                      <a:pPr marL="0" indent="0" algn="r">
+                        <a:buNone/>
+                      </a:pPr>
+                      <a:r>
+                        <a:rPr lang="en-US" sz="1200" dirty="0">
+                          <a:solidFill>
+                            <a:srgbClr val="000000"/>
+                          </a:solidFill>
+                          <a:latin typeface="Calibri" pitchFamily="34" charset="0"/>
+                          <a:ea typeface="Calibri" pitchFamily="34" charset="-122"/>
+                          <a:cs typeface="Calibri" pitchFamily="34" charset="-120"/>
+                        </a:rPr>
+                        <a:t>1 455</a:t>
+                      </a:r>
+                      <a:endParaRPr lang="en-US" sz="1200" dirty="0">
+                        <a:latin typeface="Calibri" charset="0"/>
+                        <a:ea typeface="Calibri" charset="0"/>
+                        <a:cs typeface="Calibri" charset="0"/>
+                      </a:endParaRPr>
+                    </a:p>
+                  </a:txBody>
+                  <a:tcPr>
+                    <a:lnL w="6350" cap="flat" cmpd="sng" algn="ctr">
+                      <a:solidFill>
+                        <a:srgbClr val="AAAAAA"/>
+                      </a:solidFill>
+                      <a:prstDash val="solid"/>
+                      <a:round/>
+                      <a:headEnd type="none" w="med" len="med"/>
+                      <a:tailEnd type="none" w="med" len="med"/>
+                    </a:lnL>
+                    <a:lnR w="6350" cap="flat" cmpd="sng" algn="ctr">
+                      <a:solidFill>
+                        <a:srgbClr val="AAAAAA"/>
+                      </a:solidFill>
+                      <a:prstDash val="solid"/>
+                      <a:round/>
+                      <a:headEnd type="none" w="med" len="med"/>
+                      <a:tailEnd type="none" w="med" len="med"/>
+                    </a:lnR>
+                    <a:lnT w="6350" cap="flat" cmpd="sng" algn="ctr">
+                      <a:solidFill>
+                        <a:srgbClr val="AAAAAA"/>
+                      </a:solidFill>
+                      <a:prstDash val="solid"/>
+                      <a:round/>
+                      <a:headEnd type="none" w="med" len="med"/>
+                      <a:tailEnd type="none" w="med" len="med"/>
+                    </a:lnT>
+                    <a:lnB w="6350" cap="flat" cmpd="sng" algn="ctr">
+                      <a:solidFill>
+                        <a:srgbClr val="AAAAAA"/>
+                      </a:solidFill>
+                      <a:prstDash val="solid"/>
+                      <a:round/>
+                      <a:headEnd type="none" w="med" len="med"/>
+                      <a:tailEnd type="none" w="med" len="med"/>
+                    </a:lnB>
+                  </a:tcPr>
+                </a:tc>
+                <a:tc>
+                  <a:txBody>
+                    <a:bodyPr/>
+                    <a:lstStyle/>
+                    <a:p>
+                      <a:pPr marL="0" indent="0" algn="r">
+                        <a:buNone/>
+                      </a:pPr>
+                      <a:r>
+                        <a:rPr lang="en-US" sz="1200" dirty="0">
+                          <a:solidFill>
+                            <a:srgbClr val="000000"/>
+                          </a:solidFill>
+                          <a:latin typeface="Calibri" pitchFamily="34" charset="0"/>
+                          <a:ea typeface="Calibri" pitchFamily="34" charset="-122"/>
+                          <a:cs typeface="Calibri" pitchFamily="34" charset="-120"/>
+                        </a:rPr>
+                        <a:t>293</a:t>
+                      </a:r>
+                      <a:endParaRPr lang="en-US" sz="1200" dirty="0">
+                        <a:latin typeface="Calibri" charset="0"/>
+                        <a:ea typeface="Calibri" charset="0"/>
+                        <a:cs typeface="Calibri" charset="0"/>
+                      </a:endParaRPr>
+                    </a:p>
+                  </a:txBody>
+                  <a:tcPr>
+                    <a:lnL w="6350" cap="flat" cmpd="sng" algn="ctr">
+                      <a:solidFill>
+                        <a:srgbClr val="AAAAAA"/>
+                      </a:solidFill>
+                      <a:prstDash val="solid"/>
+                      <a:round/>
+                      <a:headEnd type="none" w="med" len="med"/>
+                      <a:tailEnd type="none" w="med" len="med"/>
+                    </a:lnL>
+                    <a:lnR w="6350" cap="flat" cmpd="sng" algn="ctr">
+                      <a:solidFill>
+                        <a:srgbClr val="AAAAAA"/>
+                      </a:solidFill>
+                      <a:prstDash val="solid"/>
+                      <a:round/>
+                      <a:headEnd type="none" w="med" len="med"/>
+                      <a:tailEnd type="none" w="med" len="med"/>
+                    </a:lnR>
+                    <a:lnT w="6350" cap="flat" cmpd="sng" algn="ctr">
+                      <a:solidFill>
+                        <a:srgbClr val="AAAAAA"/>
+                      </a:solidFill>
+                      <a:prstDash val="solid"/>
+                      <a:round/>
+                      <a:headEnd type="none" w="med" len="med"/>
+                      <a:tailEnd type="none" w="med" len="med"/>
+                    </a:lnT>
+                    <a:lnB w="6350" cap="flat" cmpd="sng" algn="ctr">
+                      <a:solidFill>
+                        <a:srgbClr val="AAAAAA"/>
+                      </a:solidFill>
+                      <a:prstDash val="solid"/>
+                      <a:round/>
+                      <a:headEnd type="none" w="med" len="med"/>
+                      <a:tailEnd type="none" w="med" len="med"/>
+                    </a:lnB>
+                  </a:tcPr>
+                </a:tc>
+                <a:tc>
+                  <a:txBody>
+                    <a:bodyPr/>
+                    <a:lstStyle/>
+                    <a:p>
+                      <a:pPr marL="0" indent="0" algn="r">
+                        <a:buNone/>
+                      </a:pPr>
+                      <a:r>
+                        <a:rPr lang="en-US" sz="1200" dirty="0">
+                          <a:solidFill>
+                            <a:srgbClr val="000000"/>
+                          </a:solidFill>
+                          <a:latin typeface="Calibri" pitchFamily="34" charset="0"/>
+                          <a:ea typeface="Calibri" pitchFamily="34" charset="-122"/>
+                          <a:cs typeface="Calibri" pitchFamily="34" charset="-120"/>
+                        </a:rPr>
+                        <a:t>27</a:t>
+                      </a:r>
+                      <a:endParaRPr lang="en-US" sz="1200" dirty="0">
+                        <a:latin typeface="Calibri" charset="0"/>
+                        <a:ea typeface="Calibri" charset="0"/>
+                        <a:cs typeface="Calibri" charset="0"/>
+                      </a:endParaRPr>
+                    </a:p>
+                  </a:txBody>
+                  <a:tcPr>
+                    <a:lnL w="6350" cap="flat" cmpd="sng" algn="ctr">
+                      <a:solidFill>
+                        <a:srgbClr val="AAAAAA"/>
+                      </a:solidFill>
+                      <a:prstDash val="solid"/>
+                      <a:round/>
+                      <a:headEnd type="none" w="med" len="med"/>
+                      <a:tailEnd type="none" w="med" len="med"/>
+                    </a:lnL>
+                    <a:lnR w="6350" cap="flat" cmpd="sng" algn="ctr">
+                      <a:solidFill>
+                        <a:srgbClr val="AAAAAA"/>
+                      </a:solidFill>
+                      <a:prstDash val="solid"/>
+                      <a:round/>
+                      <a:headEnd type="none" w="med" len="med"/>
+                      <a:tailEnd type="none" w="med" len="med"/>
+                    </a:lnR>
+                    <a:lnT w="6350" cap="flat" cmpd="sng" algn="ctr">
+                      <a:solidFill>
+                        <a:srgbClr val="AAAAAA"/>
+                      </a:solidFill>
+                      <a:prstDash val="solid"/>
+                      <a:round/>
+                      <a:headEnd type="none" w="med" len="med"/>
+                      <a:tailEnd type="none" w="med" len="med"/>
+                    </a:lnT>
+                    <a:lnB w="6350" cap="flat" cmpd="sng" algn="ctr">
+                      <a:solidFill>
+                        <a:srgbClr val="AAAAAA"/>
+                      </a:solidFill>
+                      <a:prstDash val="solid"/>
+                      <a:round/>
+                      <a:headEnd type="none" w="med" len="med"/>
+                      <a:tailEnd type="none" w="med" len="med"/>
+                    </a:lnB>
+                  </a:tcPr>
+                </a:tc>
+                <a:extLst>
+                  <a:ext uri="{0D108BD9-81ED-4DB2-BD59-A6C34878D82A}">
+                    <a16:rowId xmlns:a16="http://schemas.microsoft.com/office/drawing/2014/main" val="10002"/>
+                  </a:ext>
+                </a:extLst>
+              </a:tr>
+              <a:tr h="292608">
+                <a:tc>
+                  <a:txBody>
+                    <a:bodyPr/>
+                    <a:lstStyle/>
+                    <a:p>
+                      <a:pPr marL="0" indent="0">
+                        <a:buNone/>
+                      </a:pPr>
+                      <a:r>
+                        <a:rPr lang="en-US" sz="1200" dirty="0">
+                          <a:solidFill>
+                            <a:srgbClr val="000000"/>
+                          </a:solidFill>
+                          <a:latin typeface="Calibri" pitchFamily="34" charset="0"/>
+                          <a:ea typeface="Calibri" pitchFamily="34" charset="-122"/>
+                          <a:cs typeface="Calibri" pitchFamily="34" charset="-120"/>
+                        </a:rPr>
+                        <a:t>ЗКПО</a:t>
+                      </a:r>
+                      <a:endParaRPr lang="en-US" sz="1200" dirty="0">
+                        <a:latin typeface="Calibri" charset="0"/>
+                        <a:ea typeface="Calibri" charset="0"/>
+                        <a:cs typeface="Calibri" charset="0"/>
+                      </a:endParaRPr>
+                    </a:p>
+                  </a:txBody>
+                  <a:tcPr>
+                    <a:lnL w="6350" cap="flat" cmpd="sng" algn="ctr">
+                      <a:solidFill>
+                        <a:srgbClr val="AAAAAA"/>
+                      </a:solidFill>
+                      <a:prstDash val="solid"/>
+                      <a:round/>
+                      <a:headEnd type="none" w="med" len="med"/>
+                      <a:tailEnd type="none" w="med" len="med"/>
+                    </a:lnL>
+                    <a:lnR w="6350" cap="flat" cmpd="sng" algn="ctr">
+                      <a:solidFill>
+                        <a:srgbClr val="AAAAAA"/>
+                      </a:solidFill>
+                      <a:prstDash val="solid"/>
+                      <a:round/>
+                      <a:headEnd type="none" w="med" len="med"/>
+                      <a:tailEnd type="none" w="med" len="med"/>
+                    </a:lnR>
+                    <a:lnT w="6350" cap="flat" cmpd="sng" algn="ctr">
+                      <a:solidFill>
+                        <a:srgbClr val="AAAAAA"/>
+                      </a:solidFill>
+                      <a:prstDash val="solid"/>
+                      <a:round/>
+                      <a:headEnd type="none" w="med" len="med"/>
+                      <a:tailEnd type="none" w="med" len="med"/>
+                    </a:lnT>
+                    <a:lnB w="6350" cap="flat" cmpd="sng" algn="ctr">
+                      <a:solidFill>
+                        <a:srgbClr val="AAAAAA"/>
+                      </a:solidFill>
+                      <a:prstDash val="solid"/>
+                      <a:round/>
+                      <a:headEnd type="none" w="med" len="med"/>
+                      <a:tailEnd type="none" w="med" len="med"/>
+                    </a:lnB>
+                  </a:tcPr>
+                </a:tc>
+                <a:tc>
+                  <a:txBody>
+                    <a:bodyPr/>
+                    <a:lstStyle/>
+                    <a:p>
+                      <a:pPr marL="0" indent="0" algn="r">
+                        <a:buNone/>
+                      </a:pPr>
+                      <a:r>
+                        <a:rPr lang="en-US" sz="1200" dirty="0">
+                          <a:solidFill>
+                            <a:srgbClr val="000000"/>
+                          </a:solidFill>
+                          <a:latin typeface="Calibri" pitchFamily="34" charset="0"/>
+                          <a:ea typeface="Calibri" pitchFamily="34" charset="-122"/>
+                          <a:cs typeface="Calibri" pitchFamily="34" charset="-120"/>
+                        </a:rPr>
+                        <a:t>1 282</a:t>
+                      </a:r>
+                      <a:endParaRPr lang="en-US" sz="1200" dirty="0">
+                        <a:latin typeface="Calibri" charset="0"/>
+                        <a:ea typeface="Calibri" charset="0"/>
+                        <a:cs typeface="Calibri" charset="0"/>
+                      </a:endParaRPr>
+                    </a:p>
+                  </a:txBody>
+                  <a:tcPr>
+                    <a:lnL w="6350" cap="flat" cmpd="sng" algn="ctr">
+                      <a:solidFill>
+                        <a:srgbClr val="AAAAAA"/>
+                      </a:solidFill>
+                      <a:prstDash val="solid"/>
+                      <a:round/>
+                      <a:headEnd type="none" w="med" len="med"/>
+                      <a:tailEnd type="none" w="med" len="med"/>
+                    </a:lnL>
+                    <a:lnR w="6350" cap="flat" cmpd="sng" algn="ctr">
+                      <a:solidFill>
+                        <a:srgbClr val="AAAAAA"/>
+                      </a:solidFill>
+                      <a:prstDash val="solid"/>
+                      <a:round/>
+                      <a:headEnd type="none" w="med" len="med"/>
+                      <a:tailEnd type="none" w="med" len="med"/>
+                    </a:lnR>
+                    <a:lnT w="6350" cap="flat" cmpd="sng" algn="ctr">
+                      <a:solidFill>
+                        <a:srgbClr val="AAAAAA"/>
+                      </a:solidFill>
+                      <a:prstDash val="solid"/>
+                      <a:round/>
+                      <a:headEnd type="none" w="med" len="med"/>
+                      <a:tailEnd type="none" w="med" len="med"/>
+                    </a:lnT>
+                    <a:lnB w="6350" cap="flat" cmpd="sng" algn="ctr">
+                      <a:solidFill>
+                        <a:srgbClr val="AAAAAA"/>
+                      </a:solidFill>
+                      <a:prstDash val="solid"/>
+                      <a:round/>
+                      <a:headEnd type="none" w="med" len="med"/>
+                      <a:tailEnd type="none" w="med" len="med"/>
+                    </a:lnB>
+                  </a:tcPr>
+                </a:tc>
+                <a:tc>
+                  <a:txBody>
+                    <a:bodyPr/>
+                    <a:lstStyle/>
+                    <a:p>
+                      <a:pPr marL="0" indent="0" algn="r">
+                        <a:buNone/>
+                      </a:pPr>
+                      <a:r>
+                        <a:rPr lang="en-US" sz="1200" dirty="0">
+                          <a:solidFill>
+                            <a:srgbClr val="000000"/>
+                          </a:solidFill>
+                          <a:latin typeface="Calibri" pitchFamily="34" charset="0"/>
+                          <a:ea typeface="Calibri" pitchFamily="34" charset="-122"/>
+                          <a:cs typeface="Calibri" pitchFamily="34" charset="-120"/>
+                        </a:rPr>
+                        <a:t>352</a:t>
+                      </a:r>
+                      <a:endParaRPr lang="en-US" sz="1200" dirty="0">
+                        <a:latin typeface="Calibri" charset="0"/>
+                        <a:ea typeface="Calibri" charset="0"/>
+                        <a:cs typeface="Calibri" charset="0"/>
+                      </a:endParaRPr>
+                    </a:p>
+                  </a:txBody>
+                  <a:tcPr>
+                    <a:lnL w="6350" cap="flat" cmpd="sng" algn="ctr">
+                      <a:solidFill>
+                        <a:srgbClr val="AAAAAA"/>
+                      </a:solidFill>
+                      <a:prstDash val="solid"/>
+                      <a:round/>
+                      <a:headEnd type="none" w="med" len="med"/>
+                      <a:tailEnd type="none" w="med" len="med"/>
+                    </a:lnL>
+                    <a:lnR w="6350" cap="flat" cmpd="sng" algn="ctr">
+                      <a:solidFill>
+                        <a:srgbClr val="AAAAAA"/>
+                      </a:solidFill>
+                      <a:prstDash val="solid"/>
+                      <a:round/>
+                      <a:headEnd type="none" w="med" len="med"/>
+                      <a:tailEnd type="none" w="med" len="med"/>
+                    </a:lnR>
+                    <a:lnT w="6350" cap="flat" cmpd="sng" algn="ctr">
+                      <a:solidFill>
+                        <a:srgbClr val="AAAAAA"/>
+                      </a:solidFill>
+                      <a:prstDash val="solid"/>
+                      <a:round/>
+                      <a:headEnd type="none" w="med" len="med"/>
+                      <a:tailEnd type="none" w="med" len="med"/>
+                    </a:lnT>
+                    <a:lnB w="6350" cap="flat" cmpd="sng" algn="ctr">
+                      <a:solidFill>
+                        <a:srgbClr val="AAAAAA"/>
+                      </a:solidFill>
+                      <a:prstDash val="solid"/>
+                      <a:round/>
+                      <a:headEnd type="none" w="med" len="med"/>
+                      <a:tailEnd type="none" w="med" len="med"/>
+                    </a:lnB>
+                  </a:tcPr>
+                </a:tc>
+                <a:tc>
+                  <a:txBody>
+                    <a:bodyPr/>
+                    <a:lstStyle/>
+                    <a:p>
+                      <a:pPr marL="0" indent="0" algn="r">
+                        <a:buNone/>
+                      </a:pPr>
+                      <a:r>
+                        <a:rPr lang="en-US" sz="1200" dirty="0">
+                          <a:solidFill>
+                            <a:srgbClr val="000000"/>
+                          </a:solidFill>
+                          <a:latin typeface="Calibri" pitchFamily="34" charset="0"/>
+                          <a:ea typeface="Calibri" pitchFamily="34" charset="-122"/>
+                          <a:cs typeface="Calibri" pitchFamily="34" charset="-120"/>
+                        </a:rPr>
+                        <a:t>40</a:t>
+                      </a:r>
+                      <a:endParaRPr lang="en-US" sz="1200" dirty="0">
+                        <a:latin typeface="Calibri" charset="0"/>
+                        <a:ea typeface="Calibri" charset="0"/>
+                        <a:cs typeface="Calibri" charset="0"/>
+                      </a:endParaRPr>
+                    </a:p>
+                  </a:txBody>
+                  <a:tcPr>
+                    <a:lnL w="6350" cap="flat" cmpd="sng" algn="ctr">
+                      <a:solidFill>
+                        <a:srgbClr val="AAAAAA"/>
+                      </a:solidFill>
+                      <a:prstDash val="solid"/>
+                      <a:round/>
+                      <a:headEnd type="none" w="med" len="med"/>
+                      <a:tailEnd type="none" w="med" len="med"/>
+                    </a:lnL>
+                    <a:lnR w="6350" cap="flat" cmpd="sng" algn="ctr">
+                      <a:solidFill>
+                        <a:srgbClr val="AAAAAA"/>
+                      </a:solidFill>
+                      <a:prstDash val="solid"/>
+                      <a:round/>
+                      <a:headEnd type="none" w="med" len="med"/>
+                      <a:tailEnd type="none" w="med" len="med"/>
+                    </a:lnR>
+                    <a:lnT w="6350" cap="flat" cmpd="sng" algn="ctr">
+                      <a:solidFill>
+                        <a:srgbClr val="AAAAAA"/>
+                      </a:solidFill>
+                      <a:prstDash val="solid"/>
+                      <a:round/>
+                      <a:headEnd type="none" w="med" len="med"/>
+                      <a:tailEnd type="none" w="med" len="med"/>
+                    </a:lnT>
+                    <a:lnB w="6350" cap="flat" cmpd="sng" algn="ctr">
+                      <a:solidFill>
+                        <a:srgbClr val="AAAAAA"/>
+                      </a:solidFill>
+                      <a:prstDash val="solid"/>
+                      <a:round/>
+                      <a:headEnd type="none" w="med" len="med"/>
+                      <a:tailEnd type="none" w="med" len="med"/>
+                    </a:lnB>
+                  </a:tcPr>
+                </a:tc>
+                <a:extLst>
+                  <a:ext uri="{0D108BD9-81ED-4DB2-BD59-A6C34878D82A}">
+                    <a16:rowId xmlns:a16="http://schemas.microsoft.com/office/drawing/2014/main" val="10003"/>
+                  </a:ext>
+                </a:extLst>
+              </a:tr>
+              <a:tr h="292608">
+                <a:tc>
+                  <a:txBody>
+                    <a:bodyPr/>
+                    <a:lstStyle/>
+                    <a:p>
+                      <a:pPr marL="0" indent="0">
+                        <a:buNone/>
+                      </a:pPr>
+                      <a:r>
+                        <a:rPr lang="en-US" sz="1200" dirty="0">
+                          <a:solidFill>
+                            <a:srgbClr val="000000"/>
+                          </a:solidFill>
+                          <a:latin typeface="Calibri" pitchFamily="34" charset="0"/>
+                          <a:ea typeface="Calibri" pitchFamily="34" charset="-122"/>
+                          <a:cs typeface="Calibri" pitchFamily="34" charset="-120"/>
+                        </a:rPr>
+                        <a:t>ЗДДФЛ</a:t>
+                      </a:r>
+                      <a:endParaRPr lang="en-US" sz="1200" dirty="0">
+                        <a:latin typeface="Calibri" charset="0"/>
+                        <a:ea typeface="Calibri" charset="0"/>
+                        <a:cs typeface="Calibri" charset="0"/>
+                      </a:endParaRPr>
+                    </a:p>
+                  </a:txBody>
+                  <a:tcPr>
+                    <a:lnL w="6350" cap="flat" cmpd="sng" algn="ctr">
+                      <a:solidFill>
+                        <a:srgbClr val="AAAAAA"/>
+                      </a:solidFill>
+                      <a:prstDash val="solid"/>
+                      <a:round/>
+                      <a:headEnd type="none" w="med" len="med"/>
+                      <a:tailEnd type="none" w="med" len="med"/>
+                    </a:lnL>
+                    <a:lnR w="6350" cap="flat" cmpd="sng" algn="ctr">
+                      <a:solidFill>
+                        <a:srgbClr val="AAAAAA"/>
+                      </a:solidFill>
+                      <a:prstDash val="solid"/>
+                      <a:round/>
+                      <a:headEnd type="none" w="med" len="med"/>
+                      <a:tailEnd type="none" w="med" len="med"/>
+                    </a:lnR>
+                    <a:lnT w="6350" cap="flat" cmpd="sng" algn="ctr">
+                      <a:solidFill>
+                        <a:srgbClr val="AAAAAA"/>
+                      </a:solidFill>
+                      <a:prstDash val="solid"/>
+                      <a:round/>
+                      <a:headEnd type="none" w="med" len="med"/>
+                      <a:tailEnd type="none" w="med" len="med"/>
+                    </a:lnT>
+                    <a:lnB w="6350" cap="flat" cmpd="sng" algn="ctr">
+                      <a:solidFill>
+                        <a:srgbClr val="AAAAAA"/>
+                      </a:solidFill>
+                      <a:prstDash val="solid"/>
+                      <a:round/>
+                      <a:headEnd type="none" w="med" len="med"/>
+                      <a:tailEnd type="none" w="med" len="med"/>
+                    </a:lnB>
+                  </a:tcPr>
+                </a:tc>
+                <a:tc>
+                  <a:txBody>
+                    <a:bodyPr/>
+                    <a:lstStyle/>
+                    <a:p>
+                      <a:pPr marL="0" indent="0" algn="r">
+                        <a:buNone/>
+                      </a:pPr>
+                      <a:r>
+                        <a:rPr lang="en-US" sz="1200" dirty="0">
+                          <a:solidFill>
+                            <a:srgbClr val="000000"/>
+                          </a:solidFill>
+                          <a:latin typeface="Calibri" pitchFamily="34" charset="0"/>
+                          <a:ea typeface="Calibri" pitchFamily="34" charset="-122"/>
+                          <a:cs typeface="Calibri" pitchFamily="34" charset="-120"/>
+                        </a:rPr>
+                        <a:t>412</a:t>
+                      </a:r>
+                      <a:endParaRPr lang="en-US" sz="1200" dirty="0">
+                        <a:latin typeface="Calibri" charset="0"/>
+                        <a:ea typeface="Calibri" charset="0"/>
+                        <a:cs typeface="Calibri" charset="0"/>
+                      </a:endParaRPr>
+                    </a:p>
+                  </a:txBody>
+                  <a:tcPr>
+                    <a:lnL w="6350" cap="flat" cmpd="sng" algn="ctr">
+                      <a:solidFill>
+                        <a:srgbClr val="AAAAAA"/>
+                      </a:solidFill>
+                      <a:prstDash val="solid"/>
+                      <a:round/>
+                      <a:headEnd type="none" w="med" len="med"/>
+                      <a:tailEnd type="none" w="med" len="med"/>
+                    </a:lnL>
+                    <a:lnR w="6350" cap="flat" cmpd="sng" algn="ctr">
+                      <a:solidFill>
+                        <a:srgbClr val="AAAAAA"/>
+                      </a:solidFill>
+                      <a:prstDash val="solid"/>
+                      <a:round/>
+                      <a:headEnd type="none" w="med" len="med"/>
+                      <a:tailEnd type="none" w="med" len="med"/>
+                    </a:lnR>
+                    <a:lnT w="6350" cap="flat" cmpd="sng" algn="ctr">
+                      <a:solidFill>
+                        <a:srgbClr val="AAAAAA"/>
+                      </a:solidFill>
+                      <a:prstDash val="solid"/>
+                      <a:round/>
+                      <a:headEnd type="none" w="med" len="med"/>
+                      <a:tailEnd type="none" w="med" len="med"/>
+                    </a:lnT>
+                    <a:lnB w="6350" cap="flat" cmpd="sng" algn="ctr">
+                      <a:solidFill>
+                        <a:srgbClr val="AAAAAA"/>
+                      </a:solidFill>
+                      <a:prstDash val="solid"/>
+                      <a:round/>
+                      <a:headEnd type="none" w="med" len="med"/>
+                      <a:tailEnd type="none" w="med" len="med"/>
+                    </a:lnB>
+                  </a:tcPr>
+                </a:tc>
+                <a:tc>
+                  <a:txBody>
+                    <a:bodyPr/>
+                    <a:lstStyle/>
+                    <a:p>
+                      <a:pPr marL="0" indent="0" algn="r">
+                        <a:buNone/>
+                      </a:pPr>
+                      <a:r>
+                        <a:rPr lang="en-US" sz="1200" dirty="0">
+                          <a:solidFill>
+                            <a:srgbClr val="000000"/>
+                          </a:solidFill>
+                          <a:latin typeface="Calibri" pitchFamily="34" charset="0"/>
+                          <a:ea typeface="Calibri" pitchFamily="34" charset="-122"/>
+                          <a:cs typeface="Calibri" pitchFamily="34" charset="-120"/>
+                        </a:rPr>
+                        <a:t>102</a:t>
+                      </a:r>
+                      <a:endParaRPr lang="en-US" sz="1200" dirty="0">
+                        <a:latin typeface="Calibri" charset="0"/>
+                        <a:ea typeface="Calibri" charset="0"/>
+                        <a:cs typeface="Calibri" charset="0"/>
+                      </a:endParaRPr>
+                    </a:p>
+                  </a:txBody>
+                  <a:tcPr>
+                    <a:lnL w="6350" cap="flat" cmpd="sng" algn="ctr">
+                      <a:solidFill>
+                        <a:srgbClr val="AAAAAA"/>
+                      </a:solidFill>
+                      <a:prstDash val="solid"/>
+                      <a:round/>
+                      <a:headEnd type="none" w="med" len="med"/>
+                      <a:tailEnd type="none" w="med" len="med"/>
+                    </a:lnL>
+                    <a:lnR w="6350" cap="flat" cmpd="sng" algn="ctr">
+                      <a:solidFill>
+                        <a:srgbClr val="AAAAAA"/>
+                      </a:solidFill>
+                      <a:prstDash val="solid"/>
+                      <a:round/>
+                      <a:headEnd type="none" w="med" len="med"/>
+                      <a:tailEnd type="none" w="med" len="med"/>
+                    </a:lnR>
+                    <a:lnT w="6350" cap="flat" cmpd="sng" algn="ctr">
+                      <a:solidFill>
+                        <a:srgbClr val="AAAAAA"/>
+                      </a:solidFill>
+                      <a:prstDash val="solid"/>
+                      <a:round/>
+                      <a:headEnd type="none" w="med" len="med"/>
+                      <a:tailEnd type="none" w="med" len="med"/>
+                    </a:lnT>
+                    <a:lnB w="6350" cap="flat" cmpd="sng" algn="ctr">
+                      <a:solidFill>
+                        <a:srgbClr val="AAAAAA"/>
+                      </a:solidFill>
+                      <a:prstDash val="solid"/>
+                      <a:round/>
+                      <a:headEnd type="none" w="med" len="med"/>
+                      <a:tailEnd type="none" w="med" len="med"/>
+                    </a:lnB>
+                  </a:tcPr>
+                </a:tc>
+                <a:tc>
+                  <a:txBody>
+                    <a:bodyPr/>
+                    <a:lstStyle/>
+                    <a:p>
+                      <a:pPr marL="0" indent="0" algn="r">
+                        <a:buNone/>
+                      </a:pPr>
+                      <a:r>
+                        <a:rPr lang="en-US" sz="1200" dirty="0">
+                          <a:solidFill>
+                            <a:srgbClr val="000000"/>
+                          </a:solidFill>
+                          <a:latin typeface="Calibri" pitchFamily="34" charset="0"/>
+                          <a:ea typeface="Calibri" pitchFamily="34" charset="-122"/>
+                          <a:cs typeface="Calibri" pitchFamily="34" charset="-120"/>
+                        </a:rPr>
+                        <a:t>9</a:t>
+                      </a:r>
+                      <a:endParaRPr lang="en-US" sz="1200" dirty="0">
+                        <a:latin typeface="Calibri" charset="0"/>
+                        <a:ea typeface="Calibri" charset="0"/>
+                        <a:cs typeface="Calibri" charset="0"/>
+                      </a:endParaRPr>
+                    </a:p>
+                  </a:txBody>
+                  <a:tcPr>
+                    <a:lnL w="6350" cap="flat" cmpd="sng" algn="ctr">
+                      <a:solidFill>
+                        <a:srgbClr val="AAAAAA"/>
+                      </a:solidFill>
+                      <a:prstDash val="solid"/>
+                      <a:round/>
+                      <a:headEnd type="none" w="med" len="med"/>
+                      <a:tailEnd type="none" w="med" len="med"/>
+                    </a:lnL>
+                    <a:lnR w="6350" cap="flat" cmpd="sng" algn="ctr">
+                      <a:solidFill>
+                        <a:srgbClr val="AAAAAA"/>
+                      </a:solidFill>
+                      <a:prstDash val="solid"/>
+                      <a:round/>
+                      <a:headEnd type="none" w="med" len="med"/>
+                      <a:tailEnd type="none" w="med" len="med"/>
+                    </a:lnR>
+                    <a:lnT w="6350" cap="flat" cmpd="sng" algn="ctr">
+                      <a:solidFill>
+                        <a:srgbClr val="AAAAAA"/>
+                      </a:solidFill>
+                      <a:prstDash val="solid"/>
+                      <a:round/>
+                      <a:headEnd type="none" w="med" len="med"/>
+                      <a:tailEnd type="none" w="med" len="med"/>
+                    </a:lnT>
+                    <a:lnB w="6350" cap="flat" cmpd="sng" algn="ctr">
+                      <a:solidFill>
+                        <a:srgbClr val="AAAAAA"/>
+                      </a:solidFill>
+                      <a:prstDash val="solid"/>
+                      <a:round/>
+                      <a:headEnd type="none" w="med" len="med"/>
+                      <a:tailEnd type="none" w="med" len="med"/>
+                    </a:lnB>
+                  </a:tcPr>
+                </a:tc>
+                <a:extLst>
+                  <a:ext uri="{0D108BD9-81ED-4DB2-BD59-A6C34878D82A}">
+                    <a16:rowId xmlns:a16="http://schemas.microsoft.com/office/drawing/2014/main" val="10004"/>
+                  </a:ext>
+                </a:extLst>
+              </a:tr>
+              <a:tr h="292608">
+                <a:tc>
+                  <a:txBody>
+                    <a:bodyPr/>
+                    <a:lstStyle/>
+                    <a:p>
+                      <a:pPr marL="0" indent="0">
+                        <a:buNone/>
+                      </a:pPr>
+                      <a:r>
+                        <a:rPr lang="en-US" sz="1200" dirty="0">
+                          <a:solidFill>
+                            <a:srgbClr val="000000"/>
+                          </a:solidFill>
+                          <a:latin typeface="Calibri" pitchFamily="34" charset="0"/>
+                          <a:ea typeface="Calibri" pitchFamily="34" charset="-122"/>
+                          <a:cs typeface="Calibri" pitchFamily="34" charset="-120"/>
+                        </a:rPr>
+                        <a:t>ЗС</a:t>
+                      </a:r>
+                      <a:endParaRPr lang="en-US" sz="1200" dirty="0">
+                        <a:latin typeface="Calibri" charset="0"/>
+                        <a:ea typeface="Calibri" charset="0"/>
+                        <a:cs typeface="Calibri" charset="0"/>
+                      </a:endParaRPr>
+                    </a:p>
+                  </a:txBody>
+                  <a:tcPr>
+                    <a:lnL w="6350" cap="flat" cmpd="sng" algn="ctr">
+                      <a:solidFill>
+                        <a:srgbClr val="AAAAAA"/>
+                      </a:solidFill>
+                      <a:prstDash val="solid"/>
+                      <a:round/>
+                      <a:headEnd type="none" w="med" len="med"/>
+                      <a:tailEnd type="none" w="med" len="med"/>
+                    </a:lnL>
+                    <a:lnR w="6350" cap="flat" cmpd="sng" algn="ctr">
+                      <a:solidFill>
+                        <a:srgbClr val="AAAAAA"/>
+                      </a:solidFill>
+                      <a:prstDash val="solid"/>
+                      <a:round/>
+                      <a:headEnd type="none" w="med" len="med"/>
+                      <a:tailEnd type="none" w="med" len="med"/>
+                    </a:lnR>
+                    <a:lnT w="6350" cap="flat" cmpd="sng" algn="ctr">
+                      <a:solidFill>
+                        <a:srgbClr val="AAAAAA"/>
+                      </a:solidFill>
+                      <a:prstDash val="solid"/>
+                      <a:round/>
+                      <a:headEnd type="none" w="med" len="med"/>
+                      <a:tailEnd type="none" w="med" len="med"/>
+                    </a:lnT>
+                    <a:lnB w="6350" cap="flat" cmpd="sng" algn="ctr">
+                      <a:solidFill>
+                        <a:srgbClr val="AAAAAA"/>
+                      </a:solidFill>
+                      <a:prstDash val="solid"/>
+                      <a:round/>
+                      <a:headEnd type="none" w="med" len="med"/>
+                      <a:tailEnd type="none" w="med" len="med"/>
+                    </a:lnB>
+                  </a:tcPr>
+                </a:tc>
+                <a:tc>
+                  <a:txBody>
+                    <a:bodyPr/>
+                    <a:lstStyle/>
+                    <a:p>
+                      <a:pPr marL="0" indent="0" algn="r">
+                        <a:buNone/>
+                      </a:pPr>
+                      <a:r>
+                        <a:rPr lang="en-US" sz="1200" dirty="0">
+                          <a:solidFill>
+                            <a:srgbClr val="000000"/>
+                          </a:solidFill>
+                          <a:latin typeface="Calibri" pitchFamily="34" charset="0"/>
+                          <a:ea typeface="Calibri" pitchFamily="34" charset="-122"/>
+                          <a:cs typeface="Calibri" pitchFamily="34" charset="-120"/>
+                        </a:rPr>
+                        <a:t>279</a:t>
+                      </a:r>
+                      <a:endParaRPr lang="en-US" sz="1200" dirty="0">
+                        <a:latin typeface="Calibri" charset="0"/>
+                        <a:ea typeface="Calibri" charset="0"/>
+                        <a:cs typeface="Calibri" charset="0"/>
+                      </a:endParaRPr>
+                    </a:p>
+                  </a:txBody>
+                  <a:tcPr>
+                    <a:lnL w="6350" cap="flat" cmpd="sng" algn="ctr">
+                      <a:solidFill>
+                        <a:srgbClr val="AAAAAA"/>
+                      </a:solidFill>
+                      <a:prstDash val="solid"/>
+                      <a:round/>
+                      <a:headEnd type="none" w="med" len="med"/>
+                      <a:tailEnd type="none" w="med" len="med"/>
+                    </a:lnL>
+                    <a:lnR w="6350" cap="flat" cmpd="sng" algn="ctr">
+                      <a:solidFill>
+                        <a:srgbClr val="AAAAAA"/>
+                      </a:solidFill>
+                      <a:prstDash val="solid"/>
+                      <a:round/>
+                      <a:headEnd type="none" w="med" len="med"/>
+                      <a:tailEnd type="none" w="med" len="med"/>
+                    </a:lnR>
+                    <a:lnT w="6350" cap="flat" cmpd="sng" algn="ctr">
+                      <a:solidFill>
+                        <a:srgbClr val="AAAAAA"/>
+                      </a:solidFill>
+                      <a:prstDash val="solid"/>
+                      <a:round/>
+                      <a:headEnd type="none" w="med" len="med"/>
+                      <a:tailEnd type="none" w="med" len="med"/>
+                    </a:lnT>
+                    <a:lnB w="6350" cap="flat" cmpd="sng" algn="ctr">
+                      <a:solidFill>
+                        <a:srgbClr val="AAAAAA"/>
+                      </a:solidFill>
+                      <a:prstDash val="solid"/>
+                      <a:round/>
+                      <a:headEnd type="none" w="med" len="med"/>
+                      <a:tailEnd type="none" w="med" len="med"/>
+                    </a:lnB>
+                  </a:tcPr>
+                </a:tc>
+                <a:tc>
+                  <a:txBody>
+                    <a:bodyPr/>
+                    <a:lstStyle/>
+                    <a:p>
+                      <a:pPr marL="0" indent="0" algn="r">
+                        <a:buNone/>
+                      </a:pPr>
+                      <a:r>
+                        <a:rPr lang="en-US" sz="1200" dirty="0">
+                          <a:solidFill>
+                            <a:srgbClr val="000000"/>
+                          </a:solidFill>
+                          <a:latin typeface="Calibri" pitchFamily="34" charset="0"/>
+                          <a:ea typeface="Calibri" pitchFamily="34" charset="-122"/>
+                          <a:cs typeface="Calibri" pitchFamily="34" charset="-120"/>
+                        </a:rPr>
+                        <a:t>87</a:t>
+                      </a:r>
+                      <a:endParaRPr lang="en-US" sz="1200" dirty="0">
+                        <a:latin typeface="Calibri" charset="0"/>
+                        <a:ea typeface="Calibri" charset="0"/>
+                        <a:cs typeface="Calibri" charset="0"/>
+                      </a:endParaRPr>
+                    </a:p>
+                  </a:txBody>
+                  <a:tcPr>
+                    <a:lnL w="6350" cap="flat" cmpd="sng" algn="ctr">
+                      <a:solidFill>
+                        <a:srgbClr val="AAAAAA"/>
+                      </a:solidFill>
+                      <a:prstDash val="solid"/>
+                      <a:round/>
+                      <a:headEnd type="none" w="med" len="med"/>
+                      <a:tailEnd type="none" w="med" len="med"/>
+                    </a:lnL>
+                    <a:lnR w="6350" cap="flat" cmpd="sng" algn="ctr">
+                      <a:solidFill>
+                        <a:srgbClr val="AAAAAA"/>
+                      </a:solidFill>
+                      <a:prstDash val="solid"/>
+                      <a:round/>
+                      <a:headEnd type="none" w="med" len="med"/>
+                      <a:tailEnd type="none" w="med" len="med"/>
+                    </a:lnR>
+                    <a:lnT w="6350" cap="flat" cmpd="sng" algn="ctr">
+                      <a:solidFill>
+                        <a:srgbClr val="AAAAAA"/>
+                      </a:solidFill>
+                      <a:prstDash val="solid"/>
+                      <a:round/>
+                      <a:headEnd type="none" w="med" len="med"/>
+                      <a:tailEnd type="none" w="med" len="med"/>
+                    </a:lnT>
+                    <a:lnB w="6350" cap="flat" cmpd="sng" algn="ctr">
+                      <a:solidFill>
+                        <a:srgbClr val="AAAAAA"/>
+                      </a:solidFill>
+                      <a:prstDash val="solid"/>
+                      <a:round/>
+                      <a:headEnd type="none" w="med" len="med"/>
+                      <a:tailEnd type="none" w="med" len="med"/>
+                    </a:lnB>
+                  </a:tcPr>
+                </a:tc>
+                <a:tc>
+                  <a:txBody>
+                    <a:bodyPr/>
+                    <a:lstStyle/>
+                    <a:p>
+                      <a:pPr marL="0" indent="0" algn="r">
+                        <a:buNone/>
+                      </a:pPr>
+                      <a:r>
+                        <a:rPr lang="en-US" sz="1200" dirty="0">
+                          <a:solidFill>
+                            <a:srgbClr val="000000"/>
+                          </a:solidFill>
+                          <a:latin typeface="Calibri" pitchFamily="34" charset="0"/>
+                          <a:ea typeface="Calibri" pitchFamily="34" charset="-122"/>
+                          <a:cs typeface="Calibri" pitchFamily="34" charset="-120"/>
+                        </a:rPr>
+                        <a:t>2</a:t>
+                      </a:r>
+                      <a:endParaRPr lang="en-US" sz="1200" dirty="0">
+                        <a:latin typeface="Calibri" charset="0"/>
+                        <a:ea typeface="Calibri" charset="0"/>
+                        <a:cs typeface="Calibri" charset="0"/>
+                      </a:endParaRPr>
+                    </a:p>
+                  </a:txBody>
+                  <a:tcPr>
+                    <a:lnL w="6350" cap="flat" cmpd="sng" algn="ctr">
+                      <a:solidFill>
+                        <a:srgbClr val="AAAAAA"/>
+                      </a:solidFill>
+                      <a:prstDash val="solid"/>
+                      <a:round/>
+                      <a:headEnd type="none" w="med" len="med"/>
+                      <a:tailEnd type="none" w="med" len="med"/>
+                    </a:lnL>
+                    <a:lnR w="6350" cap="flat" cmpd="sng" algn="ctr">
+                      <a:solidFill>
+                        <a:srgbClr val="AAAAAA"/>
+                      </a:solidFill>
+                      <a:prstDash val="solid"/>
+                      <a:round/>
+                      <a:headEnd type="none" w="med" len="med"/>
+                      <a:tailEnd type="none" w="med" len="med"/>
+                    </a:lnR>
+                    <a:lnT w="6350" cap="flat" cmpd="sng" algn="ctr">
+                      <a:solidFill>
+                        <a:srgbClr val="AAAAAA"/>
+                      </a:solidFill>
+                      <a:prstDash val="solid"/>
+                      <a:round/>
+                      <a:headEnd type="none" w="med" len="med"/>
+                      <a:tailEnd type="none" w="med" len="med"/>
+                    </a:lnT>
+                    <a:lnB w="6350" cap="flat" cmpd="sng" algn="ctr">
+                      <a:solidFill>
+                        <a:srgbClr val="AAAAAA"/>
+                      </a:solidFill>
+                      <a:prstDash val="solid"/>
+                      <a:round/>
+                      <a:headEnd type="none" w="med" len="med"/>
+                      <a:tailEnd type="none" w="med" len="med"/>
+                    </a:lnB>
+                  </a:tcPr>
+                </a:tc>
+                <a:extLst>
+                  <a:ext uri="{0D108BD9-81ED-4DB2-BD59-A6C34878D82A}">
+                    <a16:rowId xmlns:a16="http://schemas.microsoft.com/office/drawing/2014/main" val="10005"/>
+                  </a:ext>
+                </a:extLst>
+              </a:tr>
+            </a:tbl>
+          </a:graphicData>
+        </a:graphic>
+      </p:graphicFrame>
+      <p:sp>
+        <p:nvSpPr>
+          <p:cNvPr id="6" name="Text 3">
+            <a:extLst>
+              <a:ext uri="{FF2B5EF4-FFF2-40B4-BE49-F238E27FC236}">
+                <a16:creationId xmlns:a16="http://schemas.microsoft.com/office/drawing/2014/main" id="{3BFBC621-2621-4107-8136-BAFFE70456E5}"/>
+              </a:ext>
+            </a:extLst>
+          </p:cNvPr>
+          <p:cNvSpPr/>
+          <p:nvPr/>
+        </p:nvSpPr>
+        <p:spPr>
+          <a:xfrm>
+            <a:off x="5303520" y="1234440"/>
+            <a:ext cx="3657600" cy="274320"/>
+          </a:xfrm>
+          <a:prstGeom prst="rect">
+            <a:avLst/>
+          </a:prstGeom>
+          <a:noFill/>
+          <a:ln/>
+        </p:spPr>
+        <p:txBody>
+          <a:bodyPr wrap="square" lIns="0" tIns="0" rIns="0" bIns="0" rtlCol="0" anchor="ctr"/>
+          <a:lstStyle/>
+          <a:p>
+            <a:pPr marL="0" indent="0">
+              <a:buNone/>
+            </a:pPr>
+            <a:r>
+              <a:rPr lang="en-US" sz="1300" b="1" dirty="0">
+                <a:solidFill>
+                  <a:srgbClr val="000000"/>
+                </a:solidFill>
+                <a:latin typeface="Calibri" pitchFamily="34" charset="0"/>
+                <a:ea typeface="Calibri" pitchFamily="34" charset="-122"/>
+                <a:cs typeface="Calibri" pitchFamily="34" charset="-120"/>
+              </a:rPr>
+              <a:t>Намерени проблеми</a:t>
+            </a:r>
+            <a:endParaRPr lang="en-US" sz="1300" dirty="0"/>
+          </a:p>
+        </p:txBody>
+      </p:sp>
+      <p:sp>
+        <p:nvSpPr>
+          <p:cNvPr id="7" name="Text 4">
+            <a:extLst>
+              <a:ext uri="{FF2B5EF4-FFF2-40B4-BE49-F238E27FC236}">
+                <a16:creationId xmlns:a16="http://schemas.microsoft.com/office/drawing/2014/main" id="{E45FAC8F-F1B9-45E6-A78E-C95A4BB8F16B}"/>
+              </a:ext>
+            </a:extLst>
+          </p:cNvPr>
+          <p:cNvSpPr/>
+          <p:nvPr/>
+        </p:nvSpPr>
+        <p:spPr>
+          <a:xfrm>
+            <a:off x="5303520" y="1554480"/>
+            <a:ext cx="3657600" cy="3017520"/>
+          </a:xfrm>
+          <a:prstGeom prst="rect">
+            <a:avLst/>
+          </a:prstGeom>
+          <a:noFill/>
+          <a:ln/>
+        </p:spPr>
+        <p:txBody>
+          <a:bodyPr wrap="square" lIns="0" tIns="0" rIns="0" bIns="0" rtlCol="0" anchor="t"/>
+          <a:lstStyle/>
+          <a:p>
+            <a:pPr marL="0" indent="0">
+              <a:buNone/>
+            </a:pPr>
+            <a:r>
+              <a:rPr lang="en-US" sz="1200" b="1" dirty="0">
+                <a:solidFill>
+                  <a:srgbClr val="000000"/>
+                </a:solidFill>
+                <a:latin typeface="Calibri" pitchFamily="34" charset="0"/>
+                <a:ea typeface="Calibri" pitchFamily="34" charset="-122"/>
+                <a:cs typeface="Calibri" pitchFamily="34" charset="-120"/>
+              </a:rPr>
+              <a:t>Празни чънкове: </a:t>
+            </a:r>
+            <a:r>
+              <a:rPr lang="en-US" sz="1200" dirty="0">
+                <a:solidFill>
+                  <a:srgbClr val="000000"/>
+                </a:solidFill>
+                <a:latin typeface="Calibri" pitchFamily="34" charset="0"/>
+                <a:ea typeface="Calibri" pitchFamily="34" charset="-122"/>
+                <a:cs typeface="Calibri" pitchFamily="34" charset="-120"/>
+              </a:rPr>
+              <a:t>129</a:t>
+            </a:r>
+            <a:endParaRPr lang="en-US" sz="1200" dirty="0"/>
+          </a:p>
+          <a:p>
+            <a:pPr marL="0" indent="0">
+              <a:buNone/>
+            </a:pPr>
+            <a:r>
+              <a:rPr lang="en-US" sz="1000" i="1" dirty="0">
+                <a:solidFill>
+                  <a:srgbClr val="000000"/>
+                </a:solidFill>
+                <a:latin typeface="Calibri" pitchFamily="34" charset="0"/>
+                <a:ea typeface="Calibri" pitchFamily="34" charset="-122"/>
+                <a:cs typeface="Calibri" pitchFamily="34" charset="-120"/>
+              </a:rPr>
+              <a:t>(само исторически бележки, всички в КСО)</a:t>
+            </a:r>
+            <a:endParaRPr lang="en-US" sz="1200" dirty="0"/>
+          </a:p>
+          <a:p>
+            <a:pPr marL="0" indent="0">
+              <a:buNone/>
+            </a:pPr>
+            <a:r>
+              <a:rPr lang="en-US" sz="600" dirty="0">
+                <a:solidFill>
+                  <a:srgbClr val="000000"/>
+                </a:solidFill>
+                <a:latin typeface="Calibri" pitchFamily="34" charset="0"/>
+                <a:ea typeface="Calibri" pitchFamily="34" charset="-122"/>
+                <a:cs typeface="Calibri" pitchFamily="34" charset="-120"/>
+              </a:rPr>
+              <a:t> </a:t>
+            </a:r>
+            <a:endParaRPr lang="en-US" sz="1200" dirty="0"/>
+          </a:p>
+          <a:p>
+            <a:pPr marL="0" indent="0">
+              <a:buNone/>
+            </a:pPr>
+            <a:r>
+              <a:rPr lang="en-US" sz="1200" b="1" dirty="0">
+                <a:solidFill>
+                  <a:srgbClr val="000000"/>
+                </a:solidFill>
+                <a:latin typeface="Calibri" pitchFamily="34" charset="0"/>
+                <a:ea typeface="Calibri" pitchFamily="34" charset="-122"/>
+                <a:cs typeface="Calibri" pitchFamily="34" charset="-120"/>
+              </a:rPr>
+              <a:t>Дубликати: </a:t>
+            </a:r>
+            <a:r>
+              <a:rPr lang="en-US" sz="1200" dirty="0">
+                <a:solidFill>
+                  <a:srgbClr val="000000"/>
+                </a:solidFill>
+                <a:latin typeface="Calibri" pitchFamily="34" charset="0"/>
+                <a:ea typeface="Calibri" pitchFamily="34" charset="-122"/>
+                <a:cs typeface="Calibri" pitchFamily="34" charset="-120"/>
+              </a:rPr>
+              <a:t>678 чънка в 145 групи</a:t>
+            </a:r>
+            <a:endParaRPr lang="en-US" sz="1200" dirty="0"/>
+          </a:p>
+          <a:p>
+            <a:pPr marL="0" indent="0">
+              <a:buNone/>
+            </a:pPr>
+            <a:r>
+              <a:rPr lang="en-US" sz="1000" i="1" dirty="0">
+                <a:solidFill>
+                  <a:srgbClr val="000000"/>
+                </a:solidFill>
+                <a:latin typeface="Calibri" pitchFamily="34" charset="0"/>
+                <a:ea typeface="Calibri" pitchFamily="34" charset="-122"/>
+                <a:cs typeface="Calibri" pitchFamily="34" charset="-120"/>
+              </a:rPr>
+              <a:t>(повтарящи се „(Отм.)" / „(Изм.)" бележки)</a:t>
+            </a:r>
+            <a:endParaRPr lang="en-US" sz="1200" dirty="0"/>
+          </a:p>
+          <a:p>
+            <a:pPr marL="0" indent="0">
+              <a:buNone/>
+            </a:pPr>
+            <a:r>
+              <a:rPr lang="en-US" sz="600" dirty="0">
+                <a:solidFill>
+                  <a:srgbClr val="000000"/>
+                </a:solidFill>
+                <a:latin typeface="Calibri" pitchFamily="34" charset="0"/>
+                <a:ea typeface="Calibri" pitchFamily="34" charset="-122"/>
+                <a:cs typeface="Calibri" pitchFamily="34" charset="-120"/>
+              </a:rPr>
+              <a:t> </a:t>
+            </a:r>
+            <a:endParaRPr lang="en-US" sz="1200" dirty="0"/>
+          </a:p>
+          <a:p>
+            <a:pPr marL="0" indent="0">
+              <a:buNone/>
+            </a:pPr>
+            <a:r>
+              <a:rPr lang="en-US" sz="1200" b="1" dirty="0">
+                <a:solidFill>
+                  <a:srgbClr val="000000"/>
+                </a:solidFill>
+                <a:latin typeface="Calibri" pitchFamily="34" charset="0"/>
+                <a:ea typeface="Calibri" pitchFamily="34" charset="-122"/>
+                <a:cs typeface="Calibri" pitchFamily="34" charset="-120"/>
+              </a:rPr>
+              <a:t>Отменени разпоредби: </a:t>
+            </a:r>
+            <a:r>
+              <a:rPr lang="en-US" sz="1200" dirty="0">
+                <a:solidFill>
+                  <a:srgbClr val="000000"/>
+                </a:solidFill>
+                <a:latin typeface="Calibri" pitchFamily="34" charset="0"/>
+                <a:ea typeface="Calibri" pitchFamily="34" charset="-122"/>
+                <a:cs typeface="Calibri" pitchFamily="34" charset="-120"/>
+              </a:rPr>
+              <a:t>118</a:t>
+            </a:r>
+            <a:endParaRPr lang="en-US" sz="1200" dirty="0"/>
+          </a:p>
+          <a:p>
+            <a:pPr marL="0" indent="0">
+              <a:buNone/>
+            </a:pPr>
+            <a:r>
+              <a:rPr lang="en-US" sz="1000" i="1" dirty="0">
+                <a:solidFill>
+                  <a:srgbClr val="000000"/>
+                </a:solidFill>
+                <a:latin typeface="Calibri" pitchFamily="34" charset="0"/>
+                <a:ea typeface="Calibri" pitchFamily="34" charset="-122"/>
+                <a:cs typeface="Calibri" pitchFamily="34" charset="-120"/>
+              </a:rPr>
+              <a:t>(маркирани с is_repealed=true)</a:t>
+            </a:r>
+            <a:endParaRPr lang="en-US" sz="1200" dirty="0"/>
+          </a:p>
+          <a:p>
+            <a:pPr marL="0" indent="0">
+              <a:buNone/>
+            </a:pPr>
+            <a:r>
+              <a:rPr lang="en-US" sz="600" dirty="0">
+                <a:solidFill>
+                  <a:srgbClr val="000000"/>
+                </a:solidFill>
+                <a:latin typeface="Calibri" pitchFamily="34" charset="0"/>
+                <a:ea typeface="Calibri" pitchFamily="34" charset="-122"/>
+                <a:cs typeface="Calibri" pitchFamily="34" charset="-120"/>
+              </a:rPr>
+              <a:t> </a:t>
+            </a:r>
+            <a:endParaRPr lang="en-US" sz="1200" dirty="0"/>
+          </a:p>
+          <a:p>
+            <a:pPr marL="0" indent="0">
+              <a:buNone/>
+            </a:pPr>
+            <a:r>
+              <a:rPr lang="en-US" sz="1200" b="1" dirty="0">
+                <a:solidFill>
+                  <a:srgbClr val="000000"/>
+                </a:solidFill>
+                <a:latin typeface="Calibri" pitchFamily="34" charset="0"/>
+                <a:ea typeface="Calibri" pitchFamily="34" charset="-122"/>
+                <a:cs typeface="Calibri" pitchFamily="34" charset="-120"/>
+              </a:rPr>
+              <a:t>Дълги чънкове (≥2000ch): </a:t>
+            </a:r>
+            <a:r>
+              <a:rPr lang="en-US" sz="1200" dirty="0">
+                <a:solidFill>
+                  <a:srgbClr val="000000"/>
+                </a:solidFill>
+                <a:latin typeface="Calibri" pitchFamily="34" charset="0"/>
+                <a:ea typeface="Calibri" pitchFamily="34" charset="-122"/>
+                <a:cs typeface="Calibri" pitchFamily="34" charset="-120"/>
+              </a:rPr>
+              <a:t>72</a:t>
+            </a:r>
+            <a:endParaRPr lang="en-US" sz="1200" dirty="0"/>
+          </a:p>
+          <a:p>
+            <a:pPr marL="0" indent="0">
+              <a:buNone/>
+            </a:pPr>
+            <a:r>
+              <a:rPr lang="en-US" sz="1000" i="1" dirty="0">
+                <a:solidFill>
+                  <a:srgbClr val="000000"/>
+                </a:solidFill>
+                <a:latin typeface="Calibri" pitchFamily="34" charset="0"/>
+                <a:ea typeface="Calibri" pitchFamily="34" charset="-122"/>
+                <a:cs typeface="Calibri" pitchFamily="34" charset="-120"/>
+              </a:rPr>
+              <a:t>(кандидати за вторично разделение)</a:t>
+            </a:r>
+            <a:endParaRPr lang="en-US" sz="1200" dirty="0"/>
+          </a:p>
+        </p:txBody>
+      </p:sp>
+      <p:sp>
+        <p:nvSpPr>
+          <p:cNvPr id="8" name="Text 5">
+            <a:extLst>
+              <a:ext uri="{FF2B5EF4-FFF2-40B4-BE49-F238E27FC236}">
+                <a16:creationId xmlns:a16="http://schemas.microsoft.com/office/drawing/2014/main" id="{336BC3AA-94AD-4A85-923B-739FBAB57AF7}"/>
+              </a:ext>
+            </a:extLst>
+          </p:cNvPr>
+          <p:cNvSpPr/>
+          <p:nvPr/>
+        </p:nvSpPr>
+        <p:spPr>
+          <a:xfrm>
+            <a:off x="457200" y="4023360"/>
+            <a:ext cx="4572000" cy="274320"/>
+          </a:xfrm>
+          <a:prstGeom prst="rect">
+            <a:avLst/>
+          </a:prstGeom>
+          <a:noFill/>
+          <a:ln/>
+        </p:spPr>
+        <p:txBody>
+          <a:bodyPr wrap="square" lIns="0" tIns="0" rIns="0" bIns="0" rtlCol="0" anchor="ctr"/>
+          <a:lstStyle/>
+          <a:p>
+            <a:pPr marL="0" indent="0">
+              <a:buNone/>
+            </a:pPr>
+            <a:r>
+              <a:rPr lang="en-US" sz="1300" b="1" dirty="0">
+                <a:solidFill>
+                  <a:srgbClr val="000000"/>
+                </a:solidFill>
+                <a:latin typeface="Calibri" pitchFamily="34" charset="0"/>
+                <a:ea typeface="Calibri" pitchFamily="34" charset="-122"/>
+                <a:cs typeface="Calibri" pitchFamily="34" charset="-120"/>
+              </a:rPr>
+              <a:t>Дължина на чънк (символи)</a:t>
+            </a:r>
+            <a:endParaRPr lang="en-US" sz="1300" dirty="0"/>
+          </a:p>
+        </p:txBody>
+      </p:sp>
+      <p:sp>
+        <p:nvSpPr>
+          <p:cNvPr id="9" name="Text 6">
+            <a:extLst>
+              <a:ext uri="{FF2B5EF4-FFF2-40B4-BE49-F238E27FC236}">
+                <a16:creationId xmlns:a16="http://schemas.microsoft.com/office/drawing/2014/main" id="{93ACAE5E-9B23-41EB-976E-D28AF420E9C9}"/>
+              </a:ext>
+            </a:extLst>
+          </p:cNvPr>
+          <p:cNvSpPr/>
+          <p:nvPr/>
+        </p:nvSpPr>
+        <p:spPr>
+          <a:xfrm>
+            <a:off x="457200" y="4297680"/>
+            <a:ext cx="4572000" cy="320040"/>
+          </a:xfrm>
+          <a:prstGeom prst="rect">
+            <a:avLst/>
+          </a:prstGeom>
+          <a:noFill/>
+          <a:ln/>
+        </p:spPr>
+        <p:txBody>
+          <a:bodyPr wrap="square" lIns="0" tIns="0" rIns="0" bIns="0" rtlCol="0" anchor="ctr"/>
+          <a:lstStyle/>
+          <a:p>
+            <a:pPr marL="0" indent="0">
+              <a:buNone/>
+            </a:pPr>
+            <a:r>
+              <a:rPr lang="en-US" sz="1100" dirty="0">
+                <a:solidFill>
+                  <a:srgbClr val="000000"/>
+                </a:solidFill>
+                <a:latin typeface="Calibri" pitchFamily="34" charset="0"/>
+                <a:ea typeface="Calibri" pitchFamily="34" charset="-122"/>
+                <a:cs typeface="Calibri" pitchFamily="34" charset="-120"/>
+              </a:rPr>
+              <a:t>min 27  •  p25 153  •  медиана 273  •  p75 452  •  p95 1 035  •  max 8 380</a:t>
+            </a:r>
+            <a:endParaRPr lang="en-US" sz="1100" dirty="0"/>
+          </a:p>
+        </p:txBody>
+      </p:sp>
+    </p:spTree>
+    <p:extLst>
+      <p:ext uri="{BB962C8B-B14F-4D97-AF65-F5344CB8AC3E}">
+        <p14:creationId xmlns:p14="http://schemas.microsoft.com/office/powerpoint/2010/main" val="78486960"/>
+      </p:ext>
+    </p:extLst>
+  </p:cSld>
+  <p:clrMapOvr>
+    <a:masterClrMapping/>
+  </p:clrMapOvr>
+</p:sld>
+</file>
+
+<file path=ppt/slides/slide6.xml><?xml version="1.0" encoding="utf-8"?>
+<p:sld xmlns:a="http://schemas.openxmlformats.org/drawingml/2006/main" xmlns:r="http://schemas.openxmlformats.org/officeDocument/2006/relationships" xmlns:p="http://schemas.openxmlformats.org/presentationml/2006/main">
+  <p:cSld>
+    <p:spTree>
+      <p:nvGrpSpPr>
+        <p:cNvPr id="1" name=""/>
+        <p:cNvGrpSpPr/>
+        <p:nvPr/>
+      </p:nvGrpSpPr>
+      <p:grpSpPr>
+        <a:xfrm>
+          <a:off x="0" y="0"/>
+          <a:ext cx="0" cy="0"/>
+          <a:chOff x="0" y="0"/>
+          <a:chExt cx="0" cy="0"/>
+        </a:xfrm>
+      </p:grpSpPr>
+      <p:sp>
+        <p:nvSpPr>
+          <p:cNvPr id="2" name="Text 0">
+            <a:extLst>
+              <a:ext uri="{FF2B5EF4-FFF2-40B4-BE49-F238E27FC236}">
+                <a16:creationId xmlns:a16="http://schemas.microsoft.com/office/drawing/2014/main" id="{3B1CBAF1-F084-49CA-863E-5AF838002F32}"/>
+              </a:ext>
+            </a:extLst>
+          </p:cNvPr>
+          <p:cNvSpPr/>
+          <p:nvPr/>
+        </p:nvSpPr>
+        <p:spPr>
+          <a:xfrm>
+            <a:off x="457200" y="274320"/>
+            <a:ext cx="8229600" cy="502920"/>
+          </a:xfrm>
+          <a:prstGeom prst="rect">
+            <a:avLst/>
+          </a:prstGeom>
+          <a:noFill/>
+          <a:ln/>
+        </p:spPr>
+        <p:txBody>
+          <a:bodyPr wrap="square" lIns="0" tIns="0" rIns="0" bIns="0" rtlCol="0" anchor="ctr"/>
+          <a:lstStyle/>
+          <a:p>
+            <a:pPr marL="0" indent="0">
+              <a:buNone/>
+            </a:pPr>
+            <a:r>
+              <a:rPr lang="en-US" sz="2400" b="1" dirty="0">
+                <a:solidFill>
+                  <a:srgbClr val="000000"/>
+                </a:solidFill>
+                <a:latin typeface="Calibri" pitchFamily="34" charset="0"/>
+                <a:ea typeface="Calibri" pitchFamily="34" charset="-122"/>
+                <a:cs typeface="Calibri" pitchFamily="34" charset="-120"/>
+              </a:rPr>
+              <a:t>Критерии за качество</a:t>
+            </a:r>
+            <a:endParaRPr lang="en-US" sz="2400" dirty="0"/>
+          </a:p>
+        </p:txBody>
+      </p:sp>
+      <p:sp>
+        <p:nvSpPr>
+          <p:cNvPr id="3" name="Text 1">
+            <a:extLst>
+              <a:ext uri="{FF2B5EF4-FFF2-40B4-BE49-F238E27FC236}">
+                <a16:creationId xmlns:a16="http://schemas.microsoft.com/office/drawing/2014/main" id="{BD3B2EFD-BD48-42E6-BD23-9195B04583A3}"/>
+              </a:ext>
+            </a:extLst>
+          </p:cNvPr>
+          <p:cNvSpPr/>
+          <p:nvPr/>
+        </p:nvSpPr>
+        <p:spPr>
+          <a:xfrm>
+            <a:off x="457200" y="777240"/>
+            <a:ext cx="8229600" cy="320040"/>
+          </a:xfrm>
+          <a:prstGeom prst="rect">
+            <a:avLst/>
+          </a:prstGeom>
+          <a:noFill/>
+          <a:ln/>
+        </p:spPr>
+        <p:txBody>
+          <a:bodyPr wrap="square" lIns="0" tIns="0" rIns="0" bIns="0" rtlCol="0" anchor="ctr"/>
+          <a:lstStyle/>
+          <a:p>
+            <a:pPr marL="0" indent="0">
+              <a:buNone/>
+            </a:pPr>
+            <a:r>
+              <a:rPr lang="en-US" sz="1200" i="1" dirty="0">
+                <a:solidFill>
+                  <a:srgbClr val="000000"/>
+                </a:solidFill>
+                <a:latin typeface="Calibri" pitchFamily="34" charset="0"/>
+                <a:ea typeface="Calibri" pitchFamily="34" charset="-122"/>
+                <a:cs typeface="Calibri" pitchFamily="34" charset="-120"/>
+              </a:rPr>
+              <a:t>Скриптът ingest.quality валидира chunks.jsonl по 6 критерия:</a:t>
+            </a:r>
+            <a:endParaRPr lang="en-US" sz="1200" dirty="0"/>
+          </a:p>
+        </p:txBody>
+      </p:sp>
+      <p:graphicFrame>
+        <p:nvGraphicFramePr>
+          <p:cNvPr id="4" name="Table 0">
+            <a:extLst>
+              <a:ext uri="{FF2B5EF4-FFF2-40B4-BE49-F238E27FC236}">
+                <a16:creationId xmlns:a16="http://schemas.microsoft.com/office/drawing/2014/main" id="{6A6E2196-E6AE-49B5-8CD6-B00C559B937A}"/>
+              </a:ext>
+            </a:extLst>
+          </p:cNvPr>
+          <p:cNvGraphicFramePr>
+            <a:graphicFrameLocks noGrp="1"/>
+          </p:cNvGraphicFramePr>
+          <p:nvPr>
+            <p:extLst>
+              <p:ext uri="{D42A27DB-BD31-4B8C-83A1-F6EECF244321}">
+                <p14:modId xmlns:p14="http://schemas.microsoft.com/office/powerpoint/2010/main" val="615222613"/>
+              </p:ext>
+            </p:extLst>
+          </p:nvPr>
+        </p:nvGraphicFramePr>
+        <p:xfrm>
+          <a:off x="457200" y="1188720"/>
+          <a:ext cx="8229600" cy="3200400"/>
+        </p:xfrm>
+        <a:graphic>
+          <a:graphicData uri="http://schemas.openxmlformats.org/drawingml/2006/table">
+            <a:tbl>
+              <a:tblPr/>
+              <a:tblGrid>
+                <a:gridCol w="2468880">
+                  <a:extLst>
+                    <a:ext uri="{9D8B030D-6E8A-4147-A177-3AD203B41FA5}">
+                      <a16:colId xmlns:a16="http://schemas.microsoft.com/office/drawing/2014/main" val="20000"/>
+                    </a:ext>
+                  </a:extLst>
+                </a:gridCol>
+                <a:gridCol w="3017520">
+                  <a:extLst>
+                    <a:ext uri="{9D8B030D-6E8A-4147-A177-3AD203B41FA5}">
+                      <a16:colId xmlns:a16="http://schemas.microsoft.com/office/drawing/2014/main" val="20001"/>
+                    </a:ext>
+                  </a:extLst>
+                </a:gridCol>
+                <a:gridCol w="2743200">
+                  <a:extLst>
+                    <a:ext uri="{9D8B030D-6E8A-4147-A177-3AD203B41FA5}">
+                      <a16:colId xmlns:a16="http://schemas.microsoft.com/office/drawing/2014/main" val="20002"/>
+                    </a:ext>
+                  </a:extLst>
+                </a:gridCol>
+              </a:tblGrid>
+              <a:tr h="457200">
+                <a:tc>
+                  <a:txBody>
+                    <a:bodyPr/>
+                    <a:lstStyle/>
+                    <a:p>
+                      <a:pPr marL="0" indent="0">
+                        <a:buNone/>
+                      </a:pPr>
+                      <a:r>
+                        <a:rPr lang="en-US" sz="1100" b="1" dirty="0">
+                          <a:solidFill>
+                            <a:srgbClr val="000000"/>
+                          </a:solidFill>
+                          <a:latin typeface="Calibri" pitchFamily="34" charset="0"/>
+                          <a:ea typeface="Calibri" pitchFamily="34" charset="-122"/>
+                          <a:cs typeface="Calibri" pitchFamily="34" charset="-120"/>
+                        </a:rPr>
+                        <a:t>Критерий</a:t>
+                      </a:r>
+                      <a:endParaRPr lang="en-US" sz="1100" dirty="0">
+                        <a:latin typeface="Calibri" charset="0"/>
+                        <a:ea typeface="Calibri" charset="0"/>
+                        <a:cs typeface="Calibri" charset="0"/>
+                      </a:endParaRPr>
+                    </a:p>
+                  </a:txBody>
+                  <a:tcPr anchor="ctr">
+                    <a:lnL w="6350" cap="flat" cmpd="sng" algn="ctr">
+                      <a:solidFill>
+                        <a:srgbClr val="AAAAAA"/>
+                      </a:solidFill>
+                      <a:prstDash val="solid"/>
+                      <a:round/>
+                      <a:headEnd type="none" w="med" len="med"/>
+                      <a:tailEnd type="none" w="med" len="med"/>
+                    </a:lnL>
+                    <a:lnR w="6350" cap="flat" cmpd="sng" algn="ctr">
+                      <a:solidFill>
+                        <a:srgbClr val="AAAAAA"/>
+                      </a:solidFill>
+                      <a:prstDash val="solid"/>
+                      <a:round/>
+                      <a:headEnd type="none" w="med" len="med"/>
+                      <a:tailEnd type="none" w="med" len="med"/>
+                    </a:lnR>
+                    <a:lnT w="6350" cap="flat" cmpd="sng" algn="ctr">
+                      <a:solidFill>
+                        <a:srgbClr val="AAAAAA"/>
+                      </a:solidFill>
+                      <a:prstDash val="solid"/>
+                      <a:round/>
+                      <a:headEnd type="none" w="med" len="med"/>
+                      <a:tailEnd type="none" w="med" len="med"/>
+                    </a:lnT>
+                    <a:lnB w="6350" cap="flat" cmpd="sng" algn="ctr">
+                      <a:solidFill>
+                        <a:srgbClr val="AAAAAA"/>
+                      </a:solidFill>
+                      <a:prstDash val="solid"/>
+                      <a:round/>
+                      <a:headEnd type="none" w="med" len="med"/>
+                      <a:tailEnd type="none" w="med" len="med"/>
+                    </a:lnB>
+                  </a:tcPr>
+                </a:tc>
+                <a:tc>
+                  <a:txBody>
+                    <a:bodyPr/>
+                    <a:lstStyle/>
+                    <a:p>
+                      <a:pPr marL="0" indent="0">
+                        <a:buNone/>
+                      </a:pPr>
+                      <a:r>
+                        <a:rPr lang="en-US" sz="1100" b="1" dirty="0">
+                          <a:solidFill>
+                            <a:srgbClr val="000000"/>
+                          </a:solidFill>
+                          <a:latin typeface="Calibri" pitchFamily="34" charset="0"/>
+                          <a:ea typeface="Calibri" pitchFamily="34" charset="-122"/>
+                          <a:cs typeface="Calibri" pitchFamily="34" charset="-120"/>
+                        </a:rPr>
+                        <a:t>Защо има значение</a:t>
+                      </a:r>
+                      <a:endParaRPr lang="en-US" sz="1100" dirty="0">
+                        <a:latin typeface="Calibri" charset="0"/>
+                        <a:ea typeface="Calibri" charset="0"/>
+                        <a:cs typeface="Calibri" charset="0"/>
+                      </a:endParaRPr>
+                    </a:p>
+                  </a:txBody>
+                  <a:tcPr anchor="ctr">
+                    <a:lnL w="6350" cap="flat" cmpd="sng" algn="ctr">
+                      <a:solidFill>
+                        <a:srgbClr val="AAAAAA"/>
+                      </a:solidFill>
+                      <a:prstDash val="solid"/>
+                      <a:round/>
+                      <a:headEnd type="none" w="med" len="med"/>
+                      <a:tailEnd type="none" w="med" len="med"/>
+                    </a:lnL>
+                    <a:lnR w="6350" cap="flat" cmpd="sng" algn="ctr">
+                      <a:solidFill>
+                        <a:srgbClr val="AAAAAA"/>
+                      </a:solidFill>
+                      <a:prstDash val="solid"/>
+                      <a:round/>
+                      <a:headEnd type="none" w="med" len="med"/>
+                      <a:tailEnd type="none" w="med" len="med"/>
+                    </a:lnR>
+                    <a:lnT w="6350" cap="flat" cmpd="sng" algn="ctr">
+                      <a:solidFill>
+                        <a:srgbClr val="AAAAAA"/>
+                      </a:solidFill>
+                      <a:prstDash val="solid"/>
+                      <a:round/>
+                      <a:headEnd type="none" w="med" len="med"/>
+                      <a:tailEnd type="none" w="med" len="med"/>
+                    </a:lnT>
+                    <a:lnB w="6350" cap="flat" cmpd="sng" algn="ctr">
+                      <a:solidFill>
+                        <a:srgbClr val="AAAAAA"/>
+                      </a:solidFill>
+                      <a:prstDash val="solid"/>
+                      <a:round/>
+                      <a:headEnd type="none" w="med" len="med"/>
+                      <a:tailEnd type="none" w="med" len="med"/>
+                    </a:lnB>
+                  </a:tcPr>
+                </a:tc>
+                <a:tc>
+                  <a:txBody>
+                    <a:bodyPr/>
+                    <a:lstStyle/>
+                    <a:p>
+                      <a:pPr marL="0" indent="0">
+                        <a:buNone/>
+                      </a:pPr>
+                      <a:r>
+                        <a:rPr lang="en-US" sz="1100" b="1" dirty="0">
+                          <a:solidFill>
+                            <a:srgbClr val="000000"/>
+                          </a:solidFill>
+                          <a:latin typeface="Calibri" pitchFamily="34" charset="0"/>
+                          <a:ea typeface="Calibri" pitchFamily="34" charset="-122"/>
+                          <a:cs typeface="Calibri" pitchFamily="34" charset="-120"/>
+                        </a:rPr>
+                        <a:t>Как се измерва</a:t>
+                      </a:r>
+                      <a:endParaRPr lang="en-US" sz="1100" dirty="0">
+                        <a:latin typeface="Calibri" charset="0"/>
+                        <a:ea typeface="Calibri" charset="0"/>
+                        <a:cs typeface="Calibri" charset="0"/>
+                      </a:endParaRPr>
+                    </a:p>
+                  </a:txBody>
+                  <a:tcPr anchor="ctr">
+                    <a:lnL w="6350" cap="flat" cmpd="sng" algn="ctr">
+                      <a:solidFill>
+                        <a:srgbClr val="AAAAAA"/>
+                      </a:solidFill>
+                      <a:prstDash val="solid"/>
+                      <a:round/>
+                      <a:headEnd type="none" w="med" len="med"/>
+                      <a:tailEnd type="none" w="med" len="med"/>
+                    </a:lnL>
+                    <a:lnR w="6350" cap="flat" cmpd="sng" algn="ctr">
+                      <a:solidFill>
+                        <a:srgbClr val="AAAAAA"/>
+                      </a:solidFill>
+                      <a:prstDash val="solid"/>
+                      <a:round/>
+                      <a:headEnd type="none" w="med" len="med"/>
+                      <a:tailEnd type="none" w="med" len="med"/>
+                    </a:lnR>
+                    <a:lnT w="6350" cap="flat" cmpd="sng" algn="ctr">
+                      <a:solidFill>
+                        <a:srgbClr val="AAAAAA"/>
+                      </a:solidFill>
+                      <a:prstDash val="solid"/>
+                      <a:round/>
+                      <a:headEnd type="none" w="med" len="med"/>
+                      <a:tailEnd type="none" w="med" len="med"/>
+                    </a:lnT>
+                    <a:lnB w="6350" cap="flat" cmpd="sng" algn="ctr">
+                      <a:solidFill>
+                        <a:srgbClr val="AAAAAA"/>
+                      </a:solidFill>
+                      <a:prstDash val="solid"/>
+                      <a:round/>
+                      <a:headEnd type="none" w="med" len="med"/>
+                      <a:tailEnd type="none" w="med" len="med"/>
+                    </a:lnB>
+                  </a:tcPr>
+                </a:tc>
+                <a:extLst>
+                  <a:ext uri="{0D108BD9-81ED-4DB2-BD59-A6C34878D82A}">
+                    <a16:rowId xmlns:a16="http://schemas.microsoft.com/office/drawing/2014/main" val="10000"/>
+                  </a:ext>
+                </a:extLst>
+              </a:tr>
+              <a:tr h="457200">
+                <a:tc>
+                  <a:txBody>
+                    <a:bodyPr/>
+                    <a:lstStyle/>
+                    <a:p>
+                      <a:pPr marL="0" indent="0">
+                        <a:buNone/>
+                      </a:pPr>
+                      <a:r>
+                        <a:rPr lang="en-US" sz="1100" b="1" dirty="0">
+                          <a:solidFill>
+                            <a:srgbClr val="000000"/>
+                          </a:solidFill>
+                          <a:latin typeface="Calibri" pitchFamily="34" charset="0"/>
+                          <a:ea typeface="Calibri" pitchFamily="34" charset="-122"/>
+                          <a:cs typeface="Calibri" pitchFamily="34" charset="-120"/>
+                        </a:rPr>
+                        <a:t>Празни / къси чънкове</a:t>
+                      </a:r>
+                      <a:endParaRPr lang="en-US" sz="1100" dirty="0">
+                        <a:latin typeface="Calibri" charset="0"/>
+                        <a:ea typeface="Calibri" charset="0"/>
+                        <a:cs typeface="Calibri" charset="0"/>
+                      </a:endParaRPr>
+                    </a:p>
+                  </a:txBody>
+                  <a:tcPr anchor="ctr">
+                    <a:lnL w="6350" cap="flat" cmpd="sng" algn="ctr">
+                      <a:solidFill>
+                        <a:srgbClr val="AAAAAA"/>
+                      </a:solidFill>
+                      <a:prstDash val="solid"/>
+                      <a:round/>
+                      <a:headEnd type="none" w="med" len="med"/>
+                      <a:tailEnd type="none" w="med" len="med"/>
+                    </a:lnL>
+                    <a:lnR w="6350" cap="flat" cmpd="sng" algn="ctr">
+                      <a:solidFill>
+                        <a:srgbClr val="AAAAAA"/>
+                      </a:solidFill>
+                      <a:prstDash val="solid"/>
+                      <a:round/>
+                      <a:headEnd type="none" w="med" len="med"/>
+                      <a:tailEnd type="none" w="med" len="med"/>
+                    </a:lnR>
+                    <a:lnT w="6350" cap="flat" cmpd="sng" algn="ctr">
+                      <a:solidFill>
+                        <a:srgbClr val="AAAAAA"/>
+                      </a:solidFill>
+                      <a:prstDash val="solid"/>
+                      <a:round/>
+                      <a:headEnd type="none" w="med" len="med"/>
+                      <a:tailEnd type="none" w="med" len="med"/>
+                    </a:lnT>
+                    <a:lnB w="6350" cap="flat" cmpd="sng" algn="ctr">
+                      <a:solidFill>
+                        <a:srgbClr val="AAAAAA"/>
+                      </a:solidFill>
+                      <a:prstDash val="solid"/>
+                      <a:round/>
+                      <a:headEnd type="none" w="med" len="med"/>
+                      <a:tailEnd type="none" w="med" len="med"/>
+                    </a:lnB>
+                  </a:tcPr>
+                </a:tc>
+                <a:tc>
+                  <a:txBody>
+                    <a:bodyPr/>
+                    <a:lstStyle/>
+                    <a:p>
+                      <a:pPr marL="0" indent="0">
+                        <a:buNone/>
+                      </a:pPr>
+                      <a:r>
+                        <a:rPr lang="en-US" sz="1100" dirty="0">
+                          <a:solidFill>
+                            <a:srgbClr val="000000"/>
+                          </a:solidFill>
+                          <a:latin typeface="Calibri" pitchFamily="34" charset="0"/>
+                          <a:ea typeface="Calibri" pitchFamily="34" charset="-122"/>
+                          <a:cs typeface="Calibri" pitchFamily="34" charset="-120"/>
+                        </a:rPr>
+                        <a:t>Шум за embedding модела</a:t>
+                      </a:r>
+                      <a:endParaRPr lang="en-US" sz="1100" dirty="0">
+                        <a:latin typeface="Calibri" charset="0"/>
+                        <a:ea typeface="Calibri" charset="0"/>
+                        <a:cs typeface="Calibri" charset="0"/>
+                      </a:endParaRPr>
+                    </a:p>
+                  </a:txBody>
+                  <a:tcPr anchor="ctr">
+                    <a:lnL w="6350" cap="flat" cmpd="sng" algn="ctr">
+                      <a:solidFill>
+                        <a:srgbClr val="AAAAAA"/>
+                      </a:solidFill>
+                      <a:prstDash val="solid"/>
+                      <a:round/>
+                      <a:headEnd type="none" w="med" len="med"/>
+                      <a:tailEnd type="none" w="med" len="med"/>
+                    </a:lnL>
+                    <a:lnR w="6350" cap="flat" cmpd="sng" algn="ctr">
+                      <a:solidFill>
+                        <a:srgbClr val="AAAAAA"/>
+                      </a:solidFill>
+                      <a:prstDash val="solid"/>
+                      <a:round/>
+                      <a:headEnd type="none" w="med" len="med"/>
+                      <a:tailEnd type="none" w="med" len="med"/>
+                    </a:lnR>
+                    <a:lnT w="6350" cap="flat" cmpd="sng" algn="ctr">
+                      <a:solidFill>
+                        <a:srgbClr val="AAAAAA"/>
+                      </a:solidFill>
+                      <a:prstDash val="solid"/>
+                      <a:round/>
+                      <a:headEnd type="none" w="med" len="med"/>
+                      <a:tailEnd type="none" w="med" len="med"/>
+                    </a:lnT>
+                    <a:lnB w="6350" cap="flat" cmpd="sng" algn="ctr">
+                      <a:solidFill>
+                        <a:srgbClr val="AAAAAA"/>
+                      </a:solidFill>
+                      <a:prstDash val="solid"/>
+                      <a:round/>
+                      <a:headEnd type="none" w="med" len="med"/>
+                      <a:tailEnd type="none" w="med" len="med"/>
+                    </a:lnB>
+                  </a:tcPr>
+                </a:tc>
+                <a:tc>
+                  <a:txBody>
+                    <a:bodyPr/>
+                    <a:lstStyle/>
+                    <a:p>
+                      <a:pPr marL="0" indent="0">
+                        <a:buNone/>
+                      </a:pPr>
+                      <a:r>
+                        <a:rPr lang="en-US" sz="1100" dirty="0">
+                          <a:solidFill>
+                            <a:srgbClr val="000000"/>
+                          </a:solidFill>
+                          <a:latin typeface="Consolas" pitchFamily="34" charset="0"/>
+                          <a:ea typeface="Consolas" pitchFamily="34" charset="-122"/>
+                          <a:cs typeface="Consolas" pitchFamily="34" charset="-120"/>
+                        </a:rPr>
+                        <a:t>char_count &lt; 30</a:t>
+                      </a:r>
+                      <a:endParaRPr lang="en-US" sz="1100" dirty="0">
+                        <a:latin typeface="Consolas" charset="0"/>
+                        <a:ea typeface="Consolas" charset="0"/>
+                        <a:cs typeface="Consolas" charset="0"/>
+                      </a:endParaRPr>
+                    </a:p>
+                  </a:txBody>
+                  <a:tcPr anchor="ctr">
+                    <a:lnL w="6350" cap="flat" cmpd="sng" algn="ctr">
+                      <a:solidFill>
+                        <a:srgbClr val="AAAAAA"/>
+                      </a:solidFill>
+                      <a:prstDash val="solid"/>
+                      <a:round/>
+                      <a:headEnd type="none" w="med" len="med"/>
+                      <a:tailEnd type="none" w="med" len="med"/>
+                    </a:lnL>
+                    <a:lnR w="6350" cap="flat" cmpd="sng" algn="ctr">
+                      <a:solidFill>
+                        <a:srgbClr val="AAAAAA"/>
+                      </a:solidFill>
+                      <a:prstDash val="solid"/>
+                      <a:round/>
+                      <a:headEnd type="none" w="med" len="med"/>
+                      <a:tailEnd type="none" w="med" len="med"/>
+                    </a:lnR>
+                    <a:lnT w="6350" cap="flat" cmpd="sng" algn="ctr">
+                      <a:solidFill>
+                        <a:srgbClr val="AAAAAA"/>
+                      </a:solidFill>
+                      <a:prstDash val="solid"/>
+                      <a:round/>
+                      <a:headEnd type="none" w="med" len="med"/>
+                      <a:tailEnd type="none" w="med" len="med"/>
+                    </a:lnT>
+                    <a:lnB w="6350" cap="flat" cmpd="sng" algn="ctr">
+                      <a:solidFill>
+                        <a:srgbClr val="AAAAAA"/>
+                      </a:solidFill>
+                      <a:prstDash val="solid"/>
+                      <a:round/>
+                      <a:headEnd type="none" w="med" len="med"/>
+                      <a:tailEnd type="none" w="med" len="med"/>
+                    </a:lnB>
+                  </a:tcPr>
+                </a:tc>
+                <a:extLst>
+                  <a:ext uri="{0D108BD9-81ED-4DB2-BD59-A6C34878D82A}">
+                    <a16:rowId xmlns:a16="http://schemas.microsoft.com/office/drawing/2014/main" val="10001"/>
+                  </a:ext>
+                </a:extLst>
+              </a:tr>
+              <a:tr h="457200">
+                <a:tc>
+                  <a:txBody>
+                    <a:bodyPr/>
+                    <a:lstStyle/>
+                    <a:p>
+                      <a:pPr marL="0" indent="0">
+                        <a:buNone/>
+                      </a:pPr>
+                      <a:r>
+                        <a:rPr lang="en-US" sz="1100" b="1" dirty="0">
+                          <a:solidFill>
+                            <a:srgbClr val="000000"/>
+                          </a:solidFill>
+                          <a:latin typeface="Calibri" pitchFamily="34" charset="0"/>
+                          <a:ea typeface="Calibri" pitchFamily="34" charset="-122"/>
+                          <a:cs typeface="Calibri" pitchFamily="34" charset="-120"/>
+                        </a:rPr>
+                        <a:t>Дубликати на текст</a:t>
+                      </a:r>
+                      <a:endParaRPr lang="en-US" sz="1100" dirty="0">
+                        <a:latin typeface="Calibri" charset="0"/>
+                        <a:ea typeface="Calibri" charset="0"/>
+                        <a:cs typeface="Calibri" charset="0"/>
+                      </a:endParaRPr>
+                    </a:p>
+                  </a:txBody>
+                  <a:tcPr anchor="ctr">
+                    <a:lnL w="6350" cap="flat" cmpd="sng" algn="ctr">
+                      <a:solidFill>
+                        <a:srgbClr val="AAAAAA"/>
+                      </a:solidFill>
+                      <a:prstDash val="solid"/>
+                      <a:round/>
+                      <a:headEnd type="none" w="med" len="med"/>
+                      <a:tailEnd type="none" w="med" len="med"/>
+                    </a:lnL>
+                    <a:lnR w="6350" cap="flat" cmpd="sng" algn="ctr">
+                      <a:solidFill>
+                        <a:srgbClr val="AAAAAA"/>
+                      </a:solidFill>
+                      <a:prstDash val="solid"/>
+                      <a:round/>
+                      <a:headEnd type="none" w="med" len="med"/>
+                      <a:tailEnd type="none" w="med" len="med"/>
+                    </a:lnR>
+                    <a:lnT w="6350" cap="flat" cmpd="sng" algn="ctr">
+                      <a:solidFill>
+                        <a:srgbClr val="AAAAAA"/>
+                      </a:solidFill>
+                      <a:prstDash val="solid"/>
+                      <a:round/>
+                      <a:headEnd type="none" w="med" len="med"/>
+                      <a:tailEnd type="none" w="med" len="med"/>
+                    </a:lnT>
+                    <a:lnB w="6350" cap="flat" cmpd="sng" algn="ctr">
+                      <a:solidFill>
+                        <a:srgbClr val="AAAAAA"/>
+                      </a:solidFill>
+                      <a:prstDash val="solid"/>
+                      <a:round/>
+                      <a:headEnd type="none" w="med" len="med"/>
+                      <a:tailEnd type="none" w="med" len="med"/>
+                    </a:lnB>
+                  </a:tcPr>
+                </a:tc>
+                <a:tc>
+                  <a:txBody>
+                    <a:bodyPr/>
+                    <a:lstStyle/>
+                    <a:p>
+                      <a:pPr marL="0" indent="0">
+                        <a:buNone/>
+                      </a:pPr>
+                      <a:r>
+                        <a:rPr lang="en-US" sz="1100" dirty="0">
+                          <a:solidFill>
+                            <a:srgbClr val="000000"/>
+                          </a:solidFill>
+                          <a:latin typeface="Calibri" pitchFamily="34" charset="0"/>
+                          <a:ea typeface="Calibri" pitchFamily="34" charset="-122"/>
+                          <a:cs typeface="Calibri" pitchFamily="34" charset="-120"/>
+                        </a:rPr>
+                        <a:t>Изкривяват ранкирането</a:t>
+                      </a:r>
+                      <a:endParaRPr lang="en-US" sz="1100" dirty="0">
+                        <a:latin typeface="Calibri" charset="0"/>
+                        <a:ea typeface="Calibri" charset="0"/>
+                        <a:cs typeface="Calibri" charset="0"/>
+                      </a:endParaRPr>
+                    </a:p>
+                  </a:txBody>
+                  <a:tcPr anchor="ctr">
+                    <a:lnL w="6350" cap="flat" cmpd="sng" algn="ctr">
+                      <a:solidFill>
+                        <a:srgbClr val="AAAAAA"/>
+                      </a:solidFill>
+                      <a:prstDash val="solid"/>
+                      <a:round/>
+                      <a:headEnd type="none" w="med" len="med"/>
+                      <a:tailEnd type="none" w="med" len="med"/>
+                    </a:lnL>
+                    <a:lnR w="6350" cap="flat" cmpd="sng" algn="ctr">
+                      <a:solidFill>
+                        <a:srgbClr val="AAAAAA"/>
+                      </a:solidFill>
+                      <a:prstDash val="solid"/>
+                      <a:round/>
+                      <a:headEnd type="none" w="med" len="med"/>
+                      <a:tailEnd type="none" w="med" len="med"/>
+                    </a:lnR>
+                    <a:lnT w="6350" cap="flat" cmpd="sng" algn="ctr">
+                      <a:solidFill>
+                        <a:srgbClr val="AAAAAA"/>
+                      </a:solidFill>
+                      <a:prstDash val="solid"/>
+                      <a:round/>
+                      <a:headEnd type="none" w="med" len="med"/>
+                      <a:tailEnd type="none" w="med" len="med"/>
+                    </a:lnT>
+                    <a:lnB w="6350" cap="flat" cmpd="sng" algn="ctr">
+                      <a:solidFill>
+                        <a:srgbClr val="AAAAAA"/>
+                      </a:solidFill>
+                      <a:prstDash val="solid"/>
+                      <a:round/>
+                      <a:headEnd type="none" w="med" len="med"/>
+                      <a:tailEnd type="none" w="med" len="med"/>
+                    </a:lnB>
+                  </a:tcPr>
+                </a:tc>
+                <a:tc>
+                  <a:txBody>
+                    <a:bodyPr/>
+                    <a:lstStyle/>
+                    <a:p>
+                      <a:pPr marL="0" indent="0">
+                        <a:buNone/>
+                      </a:pPr>
+                      <a:r>
+                        <a:rPr lang="en-US" sz="1100" dirty="0">
+                          <a:solidFill>
+                            <a:srgbClr val="000000"/>
+                          </a:solidFill>
+                          <a:latin typeface="Calibri" pitchFamily="34" charset="0"/>
+                          <a:ea typeface="Calibri" pitchFamily="34" charset="-122"/>
+                          <a:cs typeface="Calibri" pitchFamily="34" charset="-120"/>
+                        </a:rPr>
+                        <a:t>SHA1 на нормализиран текст</a:t>
+                      </a:r>
+                      <a:endParaRPr lang="en-US" sz="1100" dirty="0">
+                        <a:latin typeface="Calibri" charset="0"/>
+                        <a:ea typeface="Calibri" charset="0"/>
+                        <a:cs typeface="Calibri" charset="0"/>
+                      </a:endParaRPr>
+                    </a:p>
+                  </a:txBody>
+                  <a:tcPr anchor="ctr">
+                    <a:lnL w="6350" cap="flat" cmpd="sng" algn="ctr">
+                      <a:solidFill>
+                        <a:srgbClr val="AAAAAA"/>
+                      </a:solidFill>
+                      <a:prstDash val="solid"/>
+                      <a:round/>
+                      <a:headEnd type="none" w="med" len="med"/>
+                      <a:tailEnd type="none" w="med" len="med"/>
+                    </a:lnL>
+                    <a:lnR w="6350" cap="flat" cmpd="sng" algn="ctr">
+                      <a:solidFill>
+                        <a:srgbClr val="AAAAAA"/>
+                      </a:solidFill>
+                      <a:prstDash val="solid"/>
+                      <a:round/>
+                      <a:headEnd type="none" w="med" len="med"/>
+                      <a:tailEnd type="none" w="med" len="med"/>
+                    </a:lnR>
+                    <a:lnT w="6350" cap="flat" cmpd="sng" algn="ctr">
+                      <a:solidFill>
+                        <a:srgbClr val="AAAAAA"/>
+                      </a:solidFill>
+                      <a:prstDash val="solid"/>
+                      <a:round/>
+                      <a:headEnd type="none" w="med" len="med"/>
+                      <a:tailEnd type="none" w="med" len="med"/>
+                    </a:lnT>
+                    <a:lnB w="6350" cap="flat" cmpd="sng" algn="ctr">
+                      <a:solidFill>
+                        <a:srgbClr val="AAAAAA"/>
+                      </a:solidFill>
+                      <a:prstDash val="solid"/>
+                      <a:round/>
+                      <a:headEnd type="none" w="med" len="med"/>
+                      <a:tailEnd type="none" w="med" len="med"/>
+                    </a:lnB>
+                  </a:tcPr>
+                </a:tc>
+                <a:extLst>
+                  <a:ext uri="{0D108BD9-81ED-4DB2-BD59-A6C34878D82A}">
+                    <a16:rowId xmlns:a16="http://schemas.microsoft.com/office/drawing/2014/main" val="10002"/>
+                  </a:ext>
+                </a:extLst>
+              </a:tr>
+              <a:tr h="457200">
+                <a:tc>
+                  <a:txBody>
+                    <a:bodyPr/>
+                    <a:lstStyle/>
+                    <a:p>
+                      <a:pPr marL="0" indent="0">
+                        <a:buNone/>
+                      </a:pPr>
+                      <a:r>
+                        <a:rPr lang="en-US" sz="1100" b="1" dirty="0">
+                          <a:solidFill>
+                            <a:srgbClr val="000000"/>
+                          </a:solidFill>
+                          <a:latin typeface="Calibri" pitchFamily="34" charset="0"/>
+                          <a:ea typeface="Calibri" pitchFamily="34" charset="-122"/>
+                          <a:cs typeface="Calibri" pitchFamily="34" charset="-120"/>
+                        </a:rPr>
+                        <a:t>Отменени разпоредби</a:t>
+                      </a:r>
+                      <a:endParaRPr lang="en-US" sz="1100" dirty="0">
+                        <a:latin typeface="Calibri" charset="0"/>
+                        <a:ea typeface="Calibri" charset="0"/>
+                        <a:cs typeface="Calibri" charset="0"/>
+                      </a:endParaRPr>
+                    </a:p>
+                  </a:txBody>
+                  <a:tcPr anchor="ctr">
+                    <a:lnL w="6350" cap="flat" cmpd="sng" algn="ctr">
+                      <a:solidFill>
+                        <a:srgbClr val="AAAAAA"/>
+                      </a:solidFill>
+                      <a:prstDash val="solid"/>
+                      <a:round/>
+                      <a:headEnd type="none" w="med" len="med"/>
+                      <a:tailEnd type="none" w="med" len="med"/>
+                    </a:lnL>
+                    <a:lnR w="6350" cap="flat" cmpd="sng" algn="ctr">
+                      <a:solidFill>
+                        <a:srgbClr val="AAAAAA"/>
+                      </a:solidFill>
+                      <a:prstDash val="solid"/>
+                      <a:round/>
+                      <a:headEnd type="none" w="med" len="med"/>
+                      <a:tailEnd type="none" w="med" len="med"/>
+                    </a:lnR>
+                    <a:lnT w="6350" cap="flat" cmpd="sng" algn="ctr">
+                      <a:solidFill>
+                        <a:srgbClr val="AAAAAA"/>
+                      </a:solidFill>
+                      <a:prstDash val="solid"/>
+                      <a:round/>
+                      <a:headEnd type="none" w="med" len="med"/>
+                      <a:tailEnd type="none" w="med" len="med"/>
+                    </a:lnT>
+                    <a:lnB w="6350" cap="flat" cmpd="sng" algn="ctr">
+                      <a:solidFill>
+                        <a:srgbClr val="AAAAAA"/>
+                      </a:solidFill>
+                      <a:prstDash val="solid"/>
+                      <a:round/>
+                      <a:headEnd type="none" w="med" len="med"/>
+                      <a:tailEnd type="none" w="med" len="med"/>
+                    </a:lnB>
+                  </a:tcPr>
+                </a:tc>
+                <a:tc>
+                  <a:txBody>
+                    <a:bodyPr/>
+                    <a:lstStyle/>
+                    <a:p>
+                      <a:pPr marL="0" indent="0">
+                        <a:buNone/>
+                      </a:pPr>
+                      <a:r>
+                        <a:rPr lang="en-US" sz="1100" dirty="0">
+                          <a:solidFill>
+                            <a:srgbClr val="000000"/>
+                          </a:solidFill>
+                          <a:latin typeface="Calibri" pitchFamily="34" charset="0"/>
+                          <a:ea typeface="Calibri" pitchFamily="34" charset="-122"/>
+                          <a:cs typeface="Calibri" pitchFamily="34" charset="-120"/>
+                        </a:rPr>
+                        <a:t>Не трябва да се цитират като действащи</a:t>
+                      </a:r>
+                      <a:endParaRPr lang="en-US" sz="1100" dirty="0">
+                        <a:latin typeface="Calibri" charset="0"/>
+                        <a:ea typeface="Calibri" charset="0"/>
+                        <a:cs typeface="Calibri" charset="0"/>
+                      </a:endParaRPr>
+                    </a:p>
+                  </a:txBody>
+                  <a:tcPr anchor="ctr">
+                    <a:lnL w="6350" cap="flat" cmpd="sng" algn="ctr">
+                      <a:solidFill>
+                        <a:srgbClr val="AAAAAA"/>
+                      </a:solidFill>
+                      <a:prstDash val="solid"/>
+                      <a:round/>
+                      <a:headEnd type="none" w="med" len="med"/>
+                      <a:tailEnd type="none" w="med" len="med"/>
+                    </a:lnL>
+                    <a:lnR w="6350" cap="flat" cmpd="sng" algn="ctr">
+                      <a:solidFill>
+                        <a:srgbClr val="AAAAAA"/>
+                      </a:solidFill>
+                      <a:prstDash val="solid"/>
+                      <a:round/>
+                      <a:headEnd type="none" w="med" len="med"/>
+                      <a:tailEnd type="none" w="med" len="med"/>
+                    </a:lnR>
+                    <a:lnT w="6350" cap="flat" cmpd="sng" algn="ctr">
+                      <a:solidFill>
+                        <a:srgbClr val="AAAAAA"/>
+                      </a:solidFill>
+                      <a:prstDash val="solid"/>
+                      <a:round/>
+                      <a:headEnd type="none" w="med" len="med"/>
+                      <a:tailEnd type="none" w="med" len="med"/>
+                    </a:lnT>
+                    <a:lnB w="6350" cap="flat" cmpd="sng" algn="ctr">
+                      <a:solidFill>
+                        <a:srgbClr val="AAAAAA"/>
+                      </a:solidFill>
+                      <a:prstDash val="solid"/>
+                      <a:round/>
+                      <a:headEnd type="none" w="med" len="med"/>
+                      <a:tailEnd type="none" w="med" len="med"/>
+                    </a:lnB>
+                  </a:tcPr>
+                </a:tc>
+                <a:tc>
+                  <a:txBody>
+                    <a:bodyPr/>
+                    <a:lstStyle/>
+                    <a:p>
+                      <a:pPr marL="0" indent="0">
+                        <a:buNone/>
+                      </a:pPr>
+                      <a:r>
+                        <a:rPr lang="en-US" sz="1100" dirty="0">
+                          <a:solidFill>
+                            <a:srgbClr val="000000"/>
+                          </a:solidFill>
+                          <a:latin typeface="Calibri" pitchFamily="34" charset="0"/>
+                          <a:ea typeface="Calibri" pitchFamily="34" charset="-122"/>
+                          <a:cs typeface="Calibri" pitchFamily="34" charset="-120"/>
+                        </a:rPr>
+                        <a:t>Маркер „(Отм." / „(отм." в текста</a:t>
+                      </a:r>
+                      <a:endParaRPr lang="en-US" sz="1100" dirty="0">
+                        <a:latin typeface="Calibri" charset="0"/>
+                        <a:ea typeface="Calibri" charset="0"/>
+                        <a:cs typeface="Calibri" charset="0"/>
+                      </a:endParaRPr>
+                    </a:p>
+                  </a:txBody>
+                  <a:tcPr anchor="ctr">
+                    <a:lnL w="6350" cap="flat" cmpd="sng" algn="ctr">
+                      <a:solidFill>
+                        <a:srgbClr val="AAAAAA"/>
+                      </a:solidFill>
+                      <a:prstDash val="solid"/>
+                      <a:round/>
+                      <a:headEnd type="none" w="med" len="med"/>
+                      <a:tailEnd type="none" w="med" len="med"/>
+                    </a:lnL>
+                    <a:lnR w="6350" cap="flat" cmpd="sng" algn="ctr">
+                      <a:solidFill>
+                        <a:srgbClr val="AAAAAA"/>
+                      </a:solidFill>
+                      <a:prstDash val="solid"/>
+                      <a:round/>
+                      <a:headEnd type="none" w="med" len="med"/>
+                      <a:tailEnd type="none" w="med" len="med"/>
+                    </a:lnR>
+                    <a:lnT w="6350" cap="flat" cmpd="sng" algn="ctr">
+                      <a:solidFill>
+                        <a:srgbClr val="AAAAAA"/>
+                      </a:solidFill>
+                      <a:prstDash val="solid"/>
+                      <a:round/>
+                      <a:headEnd type="none" w="med" len="med"/>
+                      <a:tailEnd type="none" w="med" len="med"/>
+                    </a:lnT>
+                    <a:lnB w="6350" cap="flat" cmpd="sng" algn="ctr">
+                      <a:solidFill>
+                        <a:srgbClr val="AAAAAA"/>
+                      </a:solidFill>
+                      <a:prstDash val="solid"/>
+                      <a:round/>
+                      <a:headEnd type="none" w="med" len="med"/>
+                      <a:tailEnd type="none" w="med" len="med"/>
+                    </a:lnB>
+                  </a:tcPr>
+                </a:tc>
+                <a:extLst>
+                  <a:ext uri="{0D108BD9-81ED-4DB2-BD59-A6C34878D82A}">
+                    <a16:rowId xmlns:a16="http://schemas.microsoft.com/office/drawing/2014/main" val="10003"/>
+                  </a:ext>
+                </a:extLst>
+              </a:tr>
+              <a:tr h="457200">
+                <a:tc>
+                  <a:txBody>
+                    <a:bodyPr/>
+                    <a:lstStyle/>
+                    <a:p>
+                      <a:pPr marL="0" indent="0">
+                        <a:buNone/>
+                      </a:pPr>
+                      <a:r>
+                        <a:rPr lang="en-US" sz="1100" b="1" dirty="0">
+                          <a:solidFill>
+                            <a:srgbClr val="000000"/>
+                          </a:solidFill>
+                          <a:latin typeface="Calibri" pitchFamily="34" charset="0"/>
+                          <a:ea typeface="Calibri" pitchFamily="34" charset="-122"/>
+                          <a:cs typeface="Calibri" pitchFamily="34" charset="-120"/>
+                        </a:rPr>
+                        <a:t>Дълги чънкове</a:t>
+                      </a:r>
+                      <a:endParaRPr lang="en-US" sz="1100" dirty="0">
+                        <a:latin typeface="Calibri" charset="0"/>
+                        <a:ea typeface="Calibri" charset="0"/>
+                        <a:cs typeface="Calibri" charset="0"/>
+                      </a:endParaRPr>
+                    </a:p>
+                  </a:txBody>
+                  <a:tcPr anchor="ctr">
+                    <a:lnL w="6350" cap="flat" cmpd="sng" algn="ctr">
+                      <a:solidFill>
+                        <a:srgbClr val="AAAAAA"/>
+                      </a:solidFill>
+                      <a:prstDash val="solid"/>
+                      <a:round/>
+                      <a:headEnd type="none" w="med" len="med"/>
+                      <a:tailEnd type="none" w="med" len="med"/>
+                    </a:lnL>
+                    <a:lnR w="6350" cap="flat" cmpd="sng" algn="ctr">
+                      <a:solidFill>
+                        <a:srgbClr val="AAAAAA"/>
+                      </a:solidFill>
+                      <a:prstDash val="solid"/>
+                      <a:round/>
+                      <a:headEnd type="none" w="med" len="med"/>
+                      <a:tailEnd type="none" w="med" len="med"/>
+                    </a:lnR>
+                    <a:lnT w="6350" cap="flat" cmpd="sng" algn="ctr">
+                      <a:solidFill>
+                        <a:srgbClr val="AAAAAA"/>
+                      </a:solidFill>
+                      <a:prstDash val="solid"/>
+                      <a:round/>
+                      <a:headEnd type="none" w="med" len="med"/>
+                      <a:tailEnd type="none" w="med" len="med"/>
+                    </a:lnT>
+                    <a:lnB w="6350" cap="flat" cmpd="sng" algn="ctr">
+                      <a:solidFill>
+                        <a:srgbClr val="AAAAAA"/>
+                      </a:solidFill>
+                      <a:prstDash val="solid"/>
+                      <a:round/>
+                      <a:headEnd type="none" w="med" len="med"/>
+                      <a:tailEnd type="none" w="med" len="med"/>
+                    </a:lnB>
+                  </a:tcPr>
+                </a:tc>
+                <a:tc>
+                  <a:txBody>
+                    <a:bodyPr/>
+                    <a:lstStyle/>
+                    <a:p>
+                      <a:pPr marL="0" indent="0">
+                        <a:buNone/>
+                      </a:pPr>
+                      <a:r>
+                        <a:rPr lang="en-US" sz="1100" dirty="0">
+                          <a:solidFill>
+                            <a:srgbClr val="000000"/>
+                          </a:solidFill>
+                          <a:latin typeface="Calibri" pitchFamily="34" charset="0"/>
+                          <a:ea typeface="Calibri" pitchFamily="34" charset="-122"/>
+                          <a:cs typeface="Calibri" pitchFamily="34" charset="-120"/>
+                        </a:rPr>
+                        <a:t>Може да не влязат в context window-а</a:t>
+                      </a:r>
+                      <a:endParaRPr lang="en-US" sz="1100" dirty="0">
+                        <a:latin typeface="Calibri" charset="0"/>
+                        <a:ea typeface="Calibri" charset="0"/>
+                        <a:cs typeface="Calibri" charset="0"/>
+                      </a:endParaRPr>
+                    </a:p>
+                  </a:txBody>
+                  <a:tcPr anchor="ctr">
+                    <a:lnL w="6350" cap="flat" cmpd="sng" algn="ctr">
+                      <a:solidFill>
+                        <a:srgbClr val="AAAAAA"/>
+                      </a:solidFill>
+                      <a:prstDash val="solid"/>
+                      <a:round/>
+                      <a:headEnd type="none" w="med" len="med"/>
+                      <a:tailEnd type="none" w="med" len="med"/>
+                    </a:lnL>
+                    <a:lnR w="6350" cap="flat" cmpd="sng" algn="ctr">
+                      <a:solidFill>
+                        <a:srgbClr val="AAAAAA"/>
+                      </a:solidFill>
+                      <a:prstDash val="solid"/>
+                      <a:round/>
+                      <a:headEnd type="none" w="med" len="med"/>
+                      <a:tailEnd type="none" w="med" len="med"/>
+                    </a:lnR>
+                    <a:lnT w="6350" cap="flat" cmpd="sng" algn="ctr">
+                      <a:solidFill>
+                        <a:srgbClr val="AAAAAA"/>
+                      </a:solidFill>
+                      <a:prstDash val="solid"/>
+                      <a:round/>
+                      <a:headEnd type="none" w="med" len="med"/>
+                      <a:tailEnd type="none" w="med" len="med"/>
+                    </a:lnT>
+                    <a:lnB w="6350" cap="flat" cmpd="sng" algn="ctr">
+                      <a:solidFill>
+                        <a:srgbClr val="AAAAAA"/>
+                      </a:solidFill>
+                      <a:prstDash val="solid"/>
+                      <a:round/>
+                      <a:headEnd type="none" w="med" len="med"/>
+                      <a:tailEnd type="none" w="med" len="med"/>
+                    </a:lnB>
+                  </a:tcPr>
+                </a:tc>
+                <a:tc>
+                  <a:txBody>
+                    <a:bodyPr/>
+                    <a:lstStyle/>
+                    <a:p>
+                      <a:pPr marL="0" indent="0">
+                        <a:buNone/>
+                      </a:pPr>
+                      <a:r>
+                        <a:rPr lang="en-US" sz="1100" dirty="0">
+                          <a:solidFill>
+                            <a:srgbClr val="000000"/>
+                          </a:solidFill>
+                          <a:latin typeface="Consolas" pitchFamily="34" charset="0"/>
+                          <a:ea typeface="Consolas" pitchFamily="34" charset="-122"/>
+                          <a:cs typeface="Consolas" pitchFamily="34" charset="-120"/>
+                        </a:rPr>
+                        <a:t>char_count ≥ 2000</a:t>
+                      </a:r>
+                      <a:endParaRPr lang="en-US" sz="1100" dirty="0">
+                        <a:latin typeface="Consolas" charset="0"/>
+                        <a:ea typeface="Consolas" charset="0"/>
+                        <a:cs typeface="Consolas" charset="0"/>
+                      </a:endParaRPr>
+                    </a:p>
+                  </a:txBody>
+                  <a:tcPr anchor="ctr">
+                    <a:lnL w="6350" cap="flat" cmpd="sng" algn="ctr">
+                      <a:solidFill>
+                        <a:srgbClr val="AAAAAA"/>
+                      </a:solidFill>
+                      <a:prstDash val="solid"/>
+                      <a:round/>
+                      <a:headEnd type="none" w="med" len="med"/>
+                      <a:tailEnd type="none" w="med" len="med"/>
+                    </a:lnL>
+                    <a:lnR w="6350" cap="flat" cmpd="sng" algn="ctr">
+                      <a:solidFill>
+                        <a:srgbClr val="AAAAAA"/>
+                      </a:solidFill>
+                      <a:prstDash val="solid"/>
+                      <a:round/>
+                      <a:headEnd type="none" w="med" len="med"/>
+                      <a:tailEnd type="none" w="med" len="med"/>
+                    </a:lnR>
+                    <a:lnT w="6350" cap="flat" cmpd="sng" algn="ctr">
+                      <a:solidFill>
+                        <a:srgbClr val="AAAAAA"/>
+                      </a:solidFill>
+                      <a:prstDash val="solid"/>
+                      <a:round/>
+                      <a:headEnd type="none" w="med" len="med"/>
+                      <a:tailEnd type="none" w="med" len="med"/>
+                    </a:lnT>
+                    <a:lnB w="6350" cap="flat" cmpd="sng" algn="ctr">
+                      <a:solidFill>
+                        <a:srgbClr val="AAAAAA"/>
+                      </a:solidFill>
+                      <a:prstDash val="solid"/>
+                      <a:round/>
+                      <a:headEnd type="none" w="med" len="med"/>
+                      <a:tailEnd type="none" w="med" len="med"/>
+                    </a:lnB>
+                  </a:tcPr>
+                </a:tc>
+                <a:extLst>
+                  <a:ext uri="{0D108BD9-81ED-4DB2-BD59-A6C34878D82A}">
+                    <a16:rowId xmlns:a16="http://schemas.microsoft.com/office/drawing/2014/main" val="10004"/>
+                  </a:ext>
+                </a:extLst>
+              </a:tr>
+              <a:tr h="457200">
+                <a:tc>
+                  <a:txBody>
+                    <a:bodyPr/>
+                    <a:lstStyle/>
+                    <a:p>
+                      <a:pPr marL="0" indent="0">
+                        <a:buNone/>
+                      </a:pPr>
+                      <a:r>
+                        <a:rPr lang="en-US" sz="1100" b="1" dirty="0">
+                          <a:solidFill>
+                            <a:srgbClr val="000000"/>
+                          </a:solidFill>
+                          <a:latin typeface="Calibri" pitchFamily="34" charset="0"/>
+                          <a:ea typeface="Calibri" pitchFamily="34" charset="-122"/>
+                          <a:cs typeface="Calibri" pitchFamily="34" charset="-120"/>
+                        </a:rPr>
+                        <a:t>Липсваща йерархия</a:t>
+                      </a:r>
+                      <a:endParaRPr lang="en-US" sz="1100" dirty="0">
+                        <a:latin typeface="Calibri" charset="0"/>
+                        <a:ea typeface="Calibri" charset="0"/>
+                        <a:cs typeface="Calibri" charset="0"/>
+                      </a:endParaRPr>
+                    </a:p>
+                  </a:txBody>
+                  <a:tcPr anchor="ctr">
+                    <a:lnL w="6350" cap="flat" cmpd="sng" algn="ctr">
+                      <a:solidFill>
+                        <a:srgbClr val="AAAAAA"/>
+                      </a:solidFill>
+                      <a:prstDash val="solid"/>
+                      <a:round/>
+                      <a:headEnd type="none" w="med" len="med"/>
+                      <a:tailEnd type="none" w="med" len="med"/>
+                    </a:lnL>
+                    <a:lnR w="6350" cap="flat" cmpd="sng" algn="ctr">
+                      <a:solidFill>
+                        <a:srgbClr val="AAAAAA"/>
+                      </a:solidFill>
+                      <a:prstDash val="solid"/>
+                      <a:round/>
+                      <a:headEnd type="none" w="med" len="med"/>
+                      <a:tailEnd type="none" w="med" len="med"/>
+                    </a:lnR>
+                    <a:lnT w="6350" cap="flat" cmpd="sng" algn="ctr">
+                      <a:solidFill>
+                        <a:srgbClr val="AAAAAA"/>
+                      </a:solidFill>
+                      <a:prstDash val="solid"/>
+                      <a:round/>
+                      <a:headEnd type="none" w="med" len="med"/>
+                      <a:tailEnd type="none" w="med" len="med"/>
+                    </a:lnT>
+                    <a:lnB w="6350" cap="flat" cmpd="sng" algn="ctr">
+                      <a:solidFill>
+                        <a:srgbClr val="AAAAAA"/>
+                      </a:solidFill>
+                      <a:prstDash val="solid"/>
+                      <a:round/>
+                      <a:headEnd type="none" w="med" len="med"/>
+                      <a:tailEnd type="none" w="med" len="med"/>
+                    </a:lnB>
+                  </a:tcPr>
+                </a:tc>
+                <a:tc>
+                  <a:txBody>
+                    <a:bodyPr/>
+                    <a:lstStyle/>
+                    <a:p>
+                      <a:pPr marL="0" indent="0">
+                        <a:buNone/>
+                      </a:pPr>
+                      <a:r>
+                        <a:rPr lang="en-US" sz="1100" dirty="0">
+                          <a:solidFill>
+                            <a:srgbClr val="000000"/>
+                          </a:solidFill>
+                          <a:latin typeface="Calibri" pitchFamily="34" charset="0"/>
+                          <a:ea typeface="Calibri" pitchFamily="34" charset="-122"/>
+                          <a:cs typeface="Calibri" pitchFamily="34" charset="-120"/>
+                        </a:rPr>
+                        <a:t>Загубен контекст (част / глава / раздел)</a:t>
+                      </a:r>
+                      <a:endParaRPr lang="en-US" sz="1100" dirty="0">
+                        <a:latin typeface="Calibri" charset="0"/>
+                        <a:ea typeface="Calibri" charset="0"/>
+                        <a:cs typeface="Calibri" charset="0"/>
+                      </a:endParaRPr>
+                    </a:p>
+                  </a:txBody>
+                  <a:tcPr anchor="ctr">
+                    <a:lnL w="6350" cap="flat" cmpd="sng" algn="ctr">
+                      <a:solidFill>
+                        <a:srgbClr val="AAAAAA"/>
+                      </a:solidFill>
+                      <a:prstDash val="solid"/>
+                      <a:round/>
+                      <a:headEnd type="none" w="med" len="med"/>
+                      <a:tailEnd type="none" w="med" len="med"/>
+                    </a:lnL>
+                    <a:lnR w="6350" cap="flat" cmpd="sng" algn="ctr">
+                      <a:solidFill>
+                        <a:srgbClr val="AAAAAA"/>
+                      </a:solidFill>
+                      <a:prstDash val="solid"/>
+                      <a:round/>
+                      <a:headEnd type="none" w="med" len="med"/>
+                      <a:tailEnd type="none" w="med" len="med"/>
+                    </a:lnR>
+                    <a:lnT w="6350" cap="flat" cmpd="sng" algn="ctr">
+                      <a:solidFill>
+                        <a:srgbClr val="AAAAAA"/>
+                      </a:solidFill>
+                      <a:prstDash val="solid"/>
+                      <a:round/>
+                      <a:headEnd type="none" w="med" len="med"/>
+                      <a:tailEnd type="none" w="med" len="med"/>
+                    </a:lnT>
+                    <a:lnB w="6350" cap="flat" cmpd="sng" algn="ctr">
+                      <a:solidFill>
+                        <a:srgbClr val="AAAAAA"/>
+                      </a:solidFill>
+                      <a:prstDash val="solid"/>
+                      <a:round/>
+                      <a:headEnd type="none" w="med" len="med"/>
+                      <a:tailEnd type="none" w="med" len="med"/>
+                    </a:lnB>
+                  </a:tcPr>
+                </a:tc>
+                <a:tc>
+                  <a:txBody>
+                    <a:bodyPr/>
+                    <a:lstStyle/>
+                    <a:p>
+                      <a:pPr marL="0" indent="0">
+                        <a:buNone/>
+                      </a:pPr>
+                      <a:r>
+                        <a:rPr lang="en-US" sz="1100" dirty="0">
+                          <a:solidFill>
+                            <a:srgbClr val="000000"/>
+                          </a:solidFill>
+                          <a:latin typeface="Calibri" pitchFamily="34" charset="0"/>
+                          <a:ea typeface="Calibri" pitchFamily="34" charset="-122"/>
+                          <a:cs typeface="Calibri" pitchFamily="34" charset="-120"/>
+                        </a:rPr>
+                        <a:t>Празни метаданни</a:t>
+                      </a:r>
+                      <a:endParaRPr lang="en-US" sz="1100" dirty="0">
+                        <a:latin typeface="Calibri" charset="0"/>
+                        <a:ea typeface="Calibri" charset="0"/>
+                        <a:cs typeface="Calibri" charset="0"/>
+                      </a:endParaRPr>
+                    </a:p>
+                  </a:txBody>
+                  <a:tcPr anchor="ctr">
+                    <a:lnL w="6350" cap="flat" cmpd="sng" algn="ctr">
+                      <a:solidFill>
+                        <a:srgbClr val="AAAAAA"/>
+                      </a:solidFill>
+                      <a:prstDash val="solid"/>
+                      <a:round/>
+                      <a:headEnd type="none" w="med" len="med"/>
+                      <a:tailEnd type="none" w="med" len="med"/>
+                    </a:lnL>
+                    <a:lnR w="6350" cap="flat" cmpd="sng" algn="ctr">
+                      <a:solidFill>
+                        <a:srgbClr val="AAAAAA"/>
+                      </a:solidFill>
+                      <a:prstDash val="solid"/>
+                      <a:round/>
+                      <a:headEnd type="none" w="med" len="med"/>
+                      <a:tailEnd type="none" w="med" len="med"/>
+                    </a:lnR>
+                    <a:lnT w="6350" cap="flat" cmpd="sng" algn="ctr">
+                      <a:solidFill>
+                        <a:srgbClr val="AAAAAA"/>
+                      </a:solidFill>
+                      <a:prstDash val="solid"/>
+                      <a:round/>
+                      <a:headEnd type="none" w="med" len="med"/>
+                      <a:tailEnd type="none" w="med" len="med"/>
+                    </a:lnT>
+                    <a:lnB w="6350" cap="flat" cmpd="sng" algn="ctr">
+                      <a:solidFill>
+                        <a:srgbClr val="AAAAAA"/>
+                      </a:solidFill>
+                      <a:prstDash val="solid"/>
+                      <a:round/>
+                      <a:headEnd type="none" w="med" len="med"/>
+                      <a:tailEnd type="none" w="med" len="med"/>
+                    </a:lnB>
+                  </a:tcPr>
+                </a:tc>
+                <a:extLst>
+                  <a:ext uri="{0D108BD9-81ED-4DB2-BD59-A6C34878D82A}">
+                    <a16:rowId xmlns:a16="http://schemas.microsoft.com/office/drawing/2014/main" val="10005"/>
+                  </a:ext>
+                </a:extLst>
+              </a:tr>
+              <a:tr h="457200">
+                <a:tc>
+                  <a:txBody>
+                    <a:bodyPr/>
+                    <a:lstStyle/>
+                    <a:p>
+                      <a:pPr marL="0" indent="0">
+                        <a:buNone/>
+                      </a:pPr>
+                      <a:r>
+                        <a:rPr lang="en-US" sz="1100" b="1" dirty="0">
+                          <a:solidFill>
+                            <a:srgbClr val="000000"/>
+                          </a:solidFill>
+                          <a:latin typeface="Calibri" pitchFamily="34" charset="0"/>
+                          <a:ea typeface="Calibri" pitchFamily="34" charset="-122"/>
+                          <a:cs typeface="Calibri" pitchFamily="34" charset="-120"/>
+                        </a:rPr>
+                        <a:t>Дупки в номерата на членовете</a:t>
+                      </a:r>
+                      <a:endParaRPr lang="en-US" sz="1100" dirty="0">
+                        <a:latin typeface="Calibri" charset="0"/>
+                        <a:ea typeface="Calibri" charset="0"/>
+                        <a:cs typeface="Calibri" charset="0"/>
+                      </a:endParaRPr>
+                    </a:p>
+                  </a:txBody>
+                  <a:tcPr anchor="ctr">
+                    <a:lnL w="6350" cap="flat" cmpd="sng" algn="ctr">
+                      <a:solidFill>
+                        <a:srgbClr val="AAAAAA"/>
+                      </a:solidFill>
+                      <a:prstDash val="solid"/>
+                      <a:round/>
+                      <a:headEnd type="none" w="med" len="med"/>
+                      <a:tailEnd type="none" w="med" len="med"/>
+                    </a:lnL>
+                    <a:lnR w="6350" cap="flat" cmpd="sng" algn="ctr">
+                      <a:solidFill>
+                        <a:srgbClr val="AAAAAA"/>
+                      </a:solidFill>
+                      <a:prstDash val="solid"/>
+                      <a:round/>
+                      <a:headEnd type="none" w="med" len="med"/>
+                      <a:tailEnd type="none" w="med" len="med"/>
+                    </a:lnR>
+                    <a:lnT w="6350" cap="flat" cmpd="sng" algn="ctr">
+                      <a:solidFill>
+                        <a:srgbClr val="AAAAAA"/>
+                      </a:solidFill>
+                      <a:prstDash val="solid"/>
+                      <a:round/>
+                      <a:headEnd type="none" w="med" len="med"/>
+                      <a:tailEnd type="none" w="med" len="med"/>
+                    </a:lnT>
+                    <a:lnB w="6350" cap="flat" cmpd="sng" algn="ctr">
+                      <a:solidFill>
+                        <a:srgbClr val="AAAAAA"/>
+                      </a:solidFill>
+                      <a:prstDash val="solid"/>
+                      <a:round/>
+                      <a:headEnd type="none" w="med" len="med"/>
+                      <a:tailEnd type="none" w="med" len="med"/>
+                    </a:lnB>
+                  </a:tcPr>
+                </a:tc>
+                <a:tc>
+                  <a:txBody>
+                    <a:bodyPr/>
+                    <a:lstStyle/>
+                    <a:p>
+                      <a:pPr marL="0" indent="0">
+                        <a:buNone/>
+                      </a:pPr>
+                      <a:r>
+                        <a:rPr lang="en-US" sz="1100" dirty="0">
+                          <a:solidFill>
+                            <a:srgbClr val="000000"/>
+                          </a:solidFill>
+                          <a:latin typeface="Calibri" pitchFamily="34" charset="0"/>
+                          <a:ea typeface="Calibri" pitchFamily="34" charset="-122"/>
+                          <a:cs typeface="Calibri" pitchFamily="34" charset="-120"/>
+                        </a:rPr>
+                        <a:t>Парсването е пропуснало членове</a:t>
+                      </a:r>
+                      <a:endParaRPr lang="en-US" sz="1100" dirty="0">
+                        <a:latin typeface="Calibri" charset="0"/>
+                        <a:ea typeface="Calibri" charset="0"/>
+                        <a:cs typeface="Calibri" charset="0"/>
+                      </a:endParaRPr>
+                    </a:p>
+                  </a:txBody>
+                  <a:tcPr anchor="ctr">
+                    <a:lnL w="6350" cap="flat" cmpd="sng" algn="ctr">
+                      <a:solidFill>
+                        <a:srgbClr val="AAAAAA"/>
+                      </a:solidFill>
+                      <a:prstDash val="solid"/>
+                      <a:round/>
+                      <a:headEnd type="none" w="med" len="med"/>
+                      <a:tailEnd type="none" w="med" len="med"/>
+                    </a:lnL>
+                    <a:lnR w="6350" cap="flat" cmpd="sng" algn="ctr">
+                      <a:solidFill>
+                        <a:srgbClr val="AAAAAA"/>
+                      </a:solidFill>
+                      <a:prstDash val="solid"/>
+                      <a:round/>
+                      <a:headEnd type="none" w="med" len="med"/>
+                      <a:tailEnd type="none" w="med" len="med"/>
+                    </a:lnR>
+                    <a:lnT w="6350" cap="flat" cmpd="sng" algn="ctr">
+                      <a:solidFill>
+                        <a:srgbClr val="AAAAAA"/>
+                      </a:solidFill>
+                      <a:prstDash val="solid"/>
+                      <a:round/>
+                      <a:headEnd type="none" w="med" len="med"/>
+                      <a:tailEnd type="none" w="med" len="med"/>
+                    </a:lnT>
+                    <a:lnB w="6350" cap="flat" cmpd="sng" algn="ctr">
+                      <a:solidFill>
+                        <a:srgbClr val="AAAAAA"/>
+                      </a:solidFill>
+                      <a:prstDash val="solid"/>
+                      <a:round/>
+                      <a:headEnd type="none" w="med" len="med"/>
+                      <a:tailEnd type="none" w="med" len="med"/>
+                    </a:lnB>
+                  </a:tcPr>
+                </a:tc>
+                <a:tc>
+                  <a:txBody>
+                    <a:bodyPr/>
+                    <a:lstStyle/>
+                    <a:p>
+                      <a:pPr marL="0" indent="0">
+                        <a:buNone/>
+                      </a:pPr>
+                      <a:r>
+                        <a:rPr lang="en-US" sz="1100" dirty="0">
+                          <a:solidFill>
+                            <a:srgbClr val="000000"/>
+                          </a:solidFill>
+                          <a:latin typeface="Calibri" pitchFamily="34" charset="0"/>
+                          <a:ea typeface="Calibri" pitchFamily="34" charset="-122"/>
+                          <a:cs typeface="Calibri" pitchFamily="34" charset="-120"/>
+                        </a:rPr>
+                        <a:t>Множество от article номера</a:t>
+                      </a:r>
+                      <a:endParaRPr lang="en-US" sz="1100" dirty="0">
+                        <a:latin typeface="Calibri" charset="0"/>
+                        <a:ea typeface="Calibri" charset="0"/>
+                        <a:cs typeface="Calibri" charset="0"/>
+                      </a:endParaRPr>
+                    </a:p>
+                  </a:txBody>
+                  <a:tcPr anchor="ctr">
+                    <a:lnL w="6350" cap="flat" cmpd="sng" algn="ctr">
+                      <a:solidFill>
+                        <a:srgbClr val="AAAAAA"/>
+                      </a:solidFill>
+                      <a:prstDash val="solid"/>
+                      <a:round/>
+                      <a:headEnd type="none" w="med" len="med"/>
+                      <a:tailEnd type="none" w="med" len="med"/>
+                    </a:lnL>
+                    <a:lnR w="6350" cap="flat" cmpd="sng" algn="ctr">
+                      <a:solidFill>
+                        <a:srgbClr val="AAAAAA"/>
+                      </a:solidFill>
+                      <a:prstDash val="solid"/>
+                      <a:round/>
+                      <a:headEnd type="none" w="med" len="med"/>
+                      <a:tailEnd type="none" w="med" len="med"/>
+                    </a:lnR>
+                    <a:lnT w="6350" cap="flat" cmpd="sng" algn="ctr">
+                      <a:solidFill>
+                        <a:srgbClr val="AAAAAA"/>
+                      </a:solidFill>
+                      <a:prstDash val="solid"/>
+                      <a:round/>
+                      <a:headEnd type="none" w="med" len="med"/>
+                      <a:tailEnd type="none" w="med" len="med"/>
+                    </a:lnT>
+                    <a:lnB w="6350" cap="flat" cmpd="sng" algn="ctr">
+                      <a:solidFill>
+                        <a:srgbClr val="AAAAAA"/>
+                      </a:solidFill>
+                      <a:prstDash val="solid"/>
+                      <a:round/>
+                      <a:headEnd type="none" w="med" len="med"/>
+                      <a:tailEnd type="none" w="med" len="med"/>
+                    </a:lnB>
+                  </a:tcPr>
+                </a:tc>
+                <a:extLst>
+                  <a:ext uri="{0D108BD9-81ED-4DB2-BD59-A6C34878D82A}">
+                    <a16:rowId xmlns:a16="http://schemas.microsoft.com/office/drawing/2014/main" val="10006"/>
+                  </a:ext>
+                </a:extLst>
+              </a:tr>
+            </a:tbl>
+          </a:graphicData>
+        </a:graphic>
+      </p:graphicFrame>
+      <p:sp>
+        <p:nvSpPr>
+          <p:cNvPr id="5" name="Text 2">
+            <a:extLst>
+              <a:ext uri="{FF2B5EF4-FFF2-40B4-BE49-F238E27FC236}">
+                <a16:creationId xmlns:a16="http://schemas.microsoft.com/office/drawing/2014/main" id="{08FD34F3-CA3B-458F-8109-5DBFC8C44340}"/>
+              </a:ext>
+            </a:extLst>
+          </p:cNvPr>
+          <p:cNvSpPr/>
+          <p:nvPr/>
+        </p:nvSpPr>
+        <p:spPr>
+          <a:xfrm>
+            <a:off x="457200" y="4754880"/>
+            <a:ext cx="8229600" cy="274320"/>
+          </a:xfrm>
+          <a:prstGeom prst="rect">
+            <a:avLst/>
+          </a:prstGeom>
+          <a:noFill/>
+          <a:ln/>
+        </p:spPr>
+        <p:txBody>
+          <a:bodyPr wrap="square" lIns="0" tIns="0" rIns="0" bIns="0" rtlCol="0" anchor="ctr"/>
+          <a:lstStyle/>
+          <a:p>
+            <a:pPr marL="0" indent="0" algn="ctr">
+              <a:buNone/>
+            </a:pPr>
+            <a:r>
+              <a:rPr lang="en-US" sz="1000" i="1" dirty="0">
+                <a:solidFill>
+                  <a:srgbClr val="000000"/>
+                </a:solidFill>
+                <a:latin typeface="Calibri" pitchFamily="34" charset="0"/>
+                <a:ea typeface="Calibri" pitchFamily="34" charset="-122"/>
+                <a:cs typeface="Calibri" pitchFamily="34" charset="-120"/>
+              </a:rPr>
+              <a:t>Изход: reports/quality.json (машинно-четим) + reports/L6_quality.md (отчет)</a:t>
+            </a:r>
+            <a:endParaRPr lang="en-US" sz="1000" dirty="0"/>
+          </a:p>
+        </p:txBody>
+      </p:sp>
+    </p:spTree>
+    <p:extLst>
+      <p:ext uri="{BB962C8B-B14F-4D97-AF65-F5344CB8AC3E}">
+        <p14:creationId xmlns:p14="http://schemas.microsoft.com/office/powerpoint/2010/main" val="2277907846"/>
+      </p:ext>
+    </p:extLst>
+  </p:cSld>
+  <p:clrMapOvr>
+    <a:masterClrMapping/>
+  </p:clrMapOvr>
+</p:sld>
+</file>
+
+<file path=ppt/slides/slide7.xml><?xml version="1.0" encoding="utf-8"?>
+<p:sld xmlns:a="http://schemas.openxmlformats.org/drawingml/2006/main" xmlns:r="http://schemas.openxmlformats.org/officeDocument/2006/relationships" xmlns:p="http://schemas.openxmlformats.org/presentationml/2006/main">
+  <p:cSld>
+    <p:spTree>
+      <p:nvGrpSpPr>
+        <p:cNvPr id="1" name=""/>
+        <p:cNvGrpSpPr/>
+        <p:nvPr/>
+      </p:nvGrpSpPr>
+      <p:grpSpPr>
+        <a:xfrm>
+          <a:off x="0" y="0"/>
+          <a:ext cx="0" cy="0"/>
+          <a:chOff x="0" y="0"/>
+          <a:chExt cx="0" cy="0"/>
+        </a:xfrm>
+      </p:grpSpPr>
+      <p:sp>
+        <p:nvSpPr>
+          <p:cNvPr id="2" name="Text 0">
+            <a:extLst>
+              <a:ext uri="{FF2B5EF4-FFF2-40B4-BE49-F238E27FC236}">
+                <a16:creationId xmlns:a16="http://schemas.microsoft.com/office/drawing/2014/main" id="{D42B93DE-FAA2-4895-A022-89923B73D6E7}"/>
+              </a:ext>
+            </a:extLst>
+          </p:cNvPr>
+          <p:cNvSpPr/>
+          <p:nvPr/>
+        </p:nvSpPr>
+        <p:spPr>
+          <a:xfrm>
+            <a:off x="457200" y="274320"/>
+            <a:ext cx="8229600" cy="502920"/>
+          </a:xfrm>
+          <a:prstGeom prst="rect">
+            <a:avLst/>
+          </a:prstGeom>
+          <a:noFill/>
+          <a:ln/>
+        </p:spPr>
+        <p:txBody>
+          <a:bodyPr wrap="square" lIns="0" tIns="0" rIns="0" bIns="0" rtlCol="0" anchor="ctr"/>
+          <a:lstStyle/>
+          <a:p>
+            <a:pPr marL="0" indent="0">
+              <a:buNone/>
+            </a:pPr>
+            <a:r>
+              <a:rPr lang="bg-BG" sz="2400" b="1" dirty="0">
+                <a:solidFill>
+                  <a:srgbClr val="000000"/>
+                </a:solidFill>
+                <a:latin typeface="Calibri" pitchFamily="34" charset="0"/>
+                <a:ea typeface="Calibri" pitchFamily="34" charset="-122"/>
+                <a:cs typeface="Calibri" pitchFamily="34" charset="-120"/>
+              </a:rPr>
+              <a:t>Типове на намерените </a:t>
+            </a:r>
+            <a:r>
+              <a:rPr lang="en-US" sz="2400" b="1" dirty="0" err="1">
+                <a:solidFill>
+                  <a:srgbClr val="000000"/>
+                </a:solidFill>
+                <a:latin typeface="Calibri" pitchFamily="34" charset="0"/>
+                <a:ea typeface="Calibri" pitchFamily="34" charset="-122"/>
+                <a:cs typeface="Calibri" pitchFamily="34" charset="-120"/>
+              </a:rPr>
+              <a:t>проблеми</a:t>
+            </a:r>
+            <a:endParaRPr lang="en-US" sz="2400" dirty="0"/>
+          </a:p>
+        </p:txBody>
+      </p:sp>
+      <p:sp>
+        <p:nvSpPr>
+          <p:cNvPr id="3" name="Text 1">
+            <a:extLst>
+              <a:ext uri="{FF2B5EF4-FFF2-40B4-BE49-F238E27FC236}">
+                <a16:creationId xmlns:a16="http://schemas.microsoft.com/office/drawing/2014/main" id="{8192F64E-5585-4FA2-AA42-C85DF18D9CC6}"/>
+              </a:ext>
+            </a:extLst>
+          </p:cNvPr>
+          <p:cNvSpPr/>
+          <p:nvPr/>
+        </p:nvSpPr>
+        <p:spPr>
+          <a:xfrm>
+            <a:off x="457200" y="914400"/>
+            <a:ext cx="8229600" cy="274320"/>
+          </a:xfrm>
+          <a:prstGeom prst="rect">
+            <a:avLst/>
+          </a:prstGeom>
+          <a:noFill/>
+          <a:ln/>
+        </p:spPr>
+        <p:txBody>
+          <a:bodyPr wrap="square" lIns="0" tIns="0" rIns="0" bIns="0" rtlCol="0" anchor="ctr"/>
+          <a:lstStyle/>
+          <a:p>
+            <a:pPr marL="0" indent="0">
+              <a:buNone/>
+            </a:pPr>
+            <a:r>
+              <a:rPr lang="en-US" sz="1300" b="1" dirty="0">
+                <a:solidFill>
+                  <a:srgbClr val="000000"/>
+                </a:solidFill>
+                <a:latin typeface="Calibri" pitchFamily="34" charset="0"/>
+                <a:ea typeface="Calibri" pitchFamily="34" charset="-122"/>
+                <a:cs typeface="Calibri" pitchFamily="34" charset="-120"/>
+              </a:rPr>
+              <a:t>1. Празни чънкове (129 — всички в КСО)</a:t>
+            </a:r>
+            <a:endParaRPr lang="en-US" sz="1300" dirty="0"/>
+          </a:p>
+        </p:txBody>
+      </p:sp>
+      <p:sp>
+        <p:nvSpPr>
+          <p:cNvPr id="4" name="Text 2">
+            <a:extLst>
+              <a:ext uri="{FF2B5EF4-FFF2-40B4-BE49-F238E27FC236}">
+                <a16:creationId xmlns:a16="http://schemas.microsoft.com/office/drawing/2014/main" id="{4498857B-6140-4A6B-972C-2CC80FA61082}"/>
+              </a:ext>
+            </a:extLst>
+          </p:cNvPr>
+          <p:cNvSpPr/>
+          <p:nvPr/>
+        </p:nvSpPr>
+        <p:spPr>
+          <a:xfrm>
+            <a:off x="548640" y="1188720"/>
+            <a:ext cx="8138160" cy="640080"/>
+          </a:xfrm>
+          <a:prstGeom prst="rect">
+            <a:avLst/>
+          </a:prstGeom>
+          <a:noFill/>
+          <a:ln/>
+        </p:spPr>
+        <p:txBody>
+          <a:bodyPr wrap="square" lIns="0" tIns="0" rIns="0" bIns="0" rtlCol="0" anchor="t"/>
+          <a:lstStyle/>
+          <a:p>
+            <a:pPr marL="0" indent="0">
+              <a:buNone/>
+            </a:pPr>
+            <a:r>
+              <a:rPr lang="en-US" sz="1100" dirty="0">
+                <a:solidFill>
+                  <a:srgbClr val="000000"/>
+                </a:solidFill>
+                <a:latin typeface="Calibri" pitchFamily="34" charset="0"/>
+                <a:ea typeface="Calibri" pitchFamily="34" charset="-122"/>
+                <a:cs typeface="Calibri" pitchFamily="34" charset="-120"/>
+              </a:rPr>
+              <a:t>Членове само с историческа бележка, без последващ текст (напр. </a:t>
+            </a:r>
+            <a:r>
+              <a:rPr lang="en-US" sz="1000" dirty="0">
+                <a:solidFill>
+                  <a:srgbClr val="000000"/>
+                </a:solidFill>
+                <a:latin typeface="Consolas" pitchFamily="34" charset="0"/>
+                <a:ea typeface="Consolas" pitchFamily="34" charset="-122"/>
+                <a:cs typeface="Consolas" pitchFamily="34" charset="-120"/>
+              </a:rPr>
+              <a:t>KSO_117а: „(Нов - ДВ, бр. 45 от 2002 г.)"</a:t>
+            </a:r>
+            <a:r>
+              <a:rPr lang="en-US" sz="1100" dirty="0">
+                <a:solidFill>
+                  <a:srgbClr val="000000"/>
+                </a:solidFill>
+                <a:latin typeface="Calibri" pitchFamily="34" charset="0"/>
+                <a:ea typeface="Calibri" pitchFamily="34" charset="-122"/>
+                <a:cs typeface="Calibri" pitchFamily="34" charset="-120"/>
+              </a:rPr>
+              <a:t>). Не е грешка на парсера — лекс.bg ги съдържа така. Действие: маркират се и могат да се пропуснат при индексиране.</a:t>
+            </a:r>
+            <a:endParaRPr lang="en-US" sz="1100" dirty="0"/>
+          </a:p>
+        </p:txBody>
+      </p:sp>
+      <p:sp>
+        <p:nvSpPr>
+          <p:cNvPr id="5" name="Text 3">
+            <a:extLst>
+              <a:ext uri="{FF2B5EF4-FFF2-40B4-BE49-F238E27FC236}">
+                <a16:creationId xmlns:a16="http://schemas.microsoft.com/office/drawing/2014/main" id="{571C4E2D-03FF-4AAC-90DE-0C94B2DA3951}"/>
+              </a:ext>
+            </a:extLst>
+          </p:cNvPr>
+          <p:cNvSpPr/>
+          <p:nvPr/>
+        </p:nvSpPr>
+        <p:spPr>
+          <a:xfrm>
+            <a:off x="457200" y="1874520"/>
+            <a:ext cx="8229600" cy="274320"/>
+          </a:xfrm>
+          <a:prstGeom prst="rect">
+            <a:avLst/>
+          </a:prstGeom>
+          <a:noFill/>
+          <a:ln/>
+        </p:spPr>
+        <p:txBody>
+          <a:bodyPr wrap="square" lIns="0" tIns="0" rIns="0" bIns="0" rtlCol="0" anchor="ctr"/>
+          <a:lstStyle/>
+          <a:p>
+            <a:pPr marL="0" indent="0">
+              <a:buNone/>
+            </a:pPr>
+            <a:r>
+              <a:rPr lang="en-US" sz="1300" b="1" dirty="0">
+                <a:solidFill>
+                  <a:srgbClr val="000000"/>
+                </a:solidFill>
+                <a:latin typeface="Calibri" pitchFamily="34" charset="0"/>
+                <a:ea typeface="Calibri" pitchFamily="34" charset="-122"/>
+                <a:cs typeface="Calibri" pitchFamily="34" charset="-120"/>
+              </a:rPr>
+              <a:t>2. Дубликати (678 чънка в 145 групи)</a:t>
+            </a:r>
+            <a:endParaRPr lang="en-US" sz="1300" dirty="0"/>
+          </a:p>
+        </p:txBody>
+      </p:sp>
+      <p:sp>
+        <p:nvSpPr>
+          <p:cNvPr id="6" name="Text 4">
+            <a:extLst>
+              <a:ext uri="{FF2B5EF4-FFF2-40B4-BE49-F238E27FC236}">
+                <a16:creationId xmlns:a16="http://schemas.microsoft.com/office/drawing/2014/main" id="{FA5EE776-014A-4ED9-AE21-4BE598EB01C1}"/>
+              </a:ext>
+            </a:extLst>
+          </p:cNvPr>
+          <p:cNvSpPr/>
+          <p:nvPr/>
+        </p:nvSpPr>
+        <p:spPr>
+          <a:xfrm>
+            <a:off x="731520" y="2148840"/>
+            <a:ext cx="7955280" cy="914400"/>
+          </a:xfrm>
+          <a:prstGeom prst="rect">
+            <a:avLst/>
+          </a:prstGeom>
+          <a:noFill/>
+          <a:ln/>
+        </p:spPr>
+        <p:txBody>
+          <a:bodyPr wrap="square" lIns="0" tIns="0" rIns="0" bIns="0" rtlCol="0" anchor="t"/>
+          <a:lstStyle/>
+          <a:p>
+            <a:pPr marL="342900" indent="-342900">
+              <a:spcAft>
+                <a:spcPts val="200"/>
+              </a:spcAft>
+              <a:buSzPct val="100000"/>
+              <a:buChar char="•"/>
+            </a:pPr>
+            <a:r>
+              <a:rPr lang="en-US" sz="1100" dirty="0">
+                <a:solidFill>
+                  <a:srgbClr val="000000"/>
+                </a:solidFill>
+                <a:latin typeface="Calibri" pitchFamily="34" charset="0"/>
+                <a:ea typeface="Calibri" pitchFamily="34" charset="-122"/>
+                <a:cs typeface="Calibri" pitchFamily="34" charset="-120"/>
+              </a:rPr>
+              <a:t>Идентична фраза „(Отм. - ДВ...)" в различни членове</a:t>
+            </a:r>
+            <a:endParaRPr lang="en-US" sz="1100" dirty="0"/>
+          </a:p>
+          <a:p>
+            <a:pPr marL="342900" indent="-342900">
+              <a:spcAft>
+                <a:spcPts val="200"/>
+              </a:spcAft>
+              <a:buSzPct val="100000"/>
+              <a:buChar char="•"/>
+            </a:pPr>
+            <a:r>
+              <a:rPr lang="en-US" sz="1100" dirty="0">
+                <a:solidFill>
+                  <a:srgbClr val="000000"/>
+                </a:solidFill>
+                <a:latin typeface="Calibri" pitchFamily="34" charset="0"/>
+                <a:ea typeface="Calibri" pitchFamily="34" charset="-122"/>
+                <a:cs typeface="Calibri" pitchFamily="34" charset="-120"/>
+              </a:rPr>
+              <a:t>Същият „(Изм. - ДВ...)" маркер като самостоятелен ред в десетки членове</a:t>
+            </a:r>
+            <a:endParaRPr lang="en-US" sz="1100" dirty="0"/>
+          </a:p>
+          <a:p>
+            <a:pPr marL="342900" indent="-342900">
+              <a:spcAft>
+                <a:spcPts val="200"/>
+              </a:spcAft>
+              <a:buSzPct val="100000"/>
+              <a:buChar char="•"/>
+            </a:pPr>
+            <a:r>
+              <a:rPr lang="en-US" sz="1100" dirty="0">
+                <a:solidFill>
+                  <a:srgbClr val="000000"/>
+                </a:solidFill>
+                <a:latin typeface="Calibri" pitchFamily="34" charset="0"/>
+                <a:ea typeface="Calibri" pitchFamily="34" charset="-122"/>
+                <a:cs typeface="Calibri" pitchFamily="34" charset="-120"/>
+              </a:rPr>
+              <a:t>Цитирани определения между ЗДДФЛ и ЗКПО — легитимно припокриване между два закона</a:t>
+            </a:r>
+            <a:endParaRPr lang="en-US" sz="1100" dirty="0"/>
+          </a:p>
+        </p:txBody>
+      </p:sp>
+      <p:sp>
+        <p:nvSpPr>
+          <p:cNvPr id="7" name="Text 5">
+            <a:extLst>
+              <a:ext uri="{FF2B5EF4-FFF2-40B4-BE49-F238E27FC236}">
+                <a16:creationId xmlns:a16="http://schemas.microsoft.com/office/drawing/2014/main" id="{FDBBE47F-EFC3-4746-9C88-652253A2EE92}"/>
+              </a:ext>
+            </a:extLst>
+          </p:cNvPr>
+          <p:cNvSpPr/>
+          <p:nvPr/>
+        </p:nvSpPr>
+        <p:spPr>
+          <a:xfrm>
+            <a:off x="548640" y="3063240"/>
+            <a:ext cx="8138160" cy="274320"/>
+          </a:xfrm>
+          <a:prstGeom prst="rect">
+            <a:avLst/>
+          </a:prstGeom>
+          <a:noFill/>
+          <a:ln/>
+        </p:spPr>
+        <p:txBody>
+          <a:bodyPr wrap="square" lIns="0" tIns="0" rIns="0" bIns="0" rtlCol="0" anchor="ctr"/>
+          <a:lstStyle/>
+          <a:p>
+            <a:pPr marL="0" indent="0">
+              <a:buNone/>
+            </a:pPr>
+            <a:r>
+              <a:rPr lang="en-US" sz="1000" i="1" dirty="0">
+                <a:solidFill>
+                  <a:srgbClr val="000000"/>
+                </a:solidFill>
+                <a:latin typeface="Calibri" pitchFamily="34" charset="0"/>
+                <a:ea typeface="Calibri" pitchFamily="34" charset="-122"/>
+                <a:cs typeface="Calibri" pitchFamily="34" charset="-120"/>
+              </a:rPr>
+              <a:t>Действие: при индексиране — слети по сигнатура, една референция към местата, които ги ползват.</a:t>
+            </a:r>
+            <a:endParaRPr lang="en-US" sz="1000" dirty="0"/>
+          </a:p>
+        </p:txBody>
+      </p:sp>
+      <p:sp>
+        <p:nvSpPr>
+          <p:cNvPr id="8" name="Text 6">
+            <a:extLst>
+              <a:ext uri="{FF2B5EF4-FFF2-40B4-BE49-F238E27FC236}">
+                <a16:creationId xmlns:a16="http://schemas.microsoft.com/office/drawing/2014/main" id="{1868B91D-BE83-41A6-86E6-FC0BD1EA2FBD}"/>
+              </a:ext>
+            </a:extLst>
+          </p:cNvPr>
+          <p:cNvSpPr/>
+          <p:nvPr/>
+        </p:nvSpPr>
+        <p:spPr>
+          <a:xfrm>
+            <a:off x="457200" y="3429000"/>
+            <a:ext cx="8229600" cy="274320"/>
+          </a:xfrm>
+          <a:prstGeom prst="rect">
+            <a:avLst/>
+          </a:prstGeom>
+          <a:noFill/>
+          <a:ln/>
+        </p:spPr>
+        <p:txBody>
+          <a:bodyPr wrap="square" lIns="0" tIns="0" rIns="0" bIns="0" rtlCol="0" anchor="ctr"/>
+          <a:lstStyle/>
+          <a:p>
+            <a:pPr marL="0" indent="0">
+              <a:buNone/>
+            </a:pPr>
+            <a:r>
+              <a:rPr lang="en-US" sz="1300" b="1" dirty="0">
+                <a:solidFill>
+                  <a:srgbClr val="000000"/>
+                </a:solidFill>
+                <a:latin typeface="Calibri" pitchFamily="34" charset="0"/>
+                <a:ea typeface="Calibri" pitchFamily="34" charset="-122"/>
+                <a:cs typeface="Calibri" pitchFamily="34" charset="-120"/>
+              </a:rPr>
+              <a:t>3. Дълги чънкове (72 ≥ 2000 символа)</a:t>
+            </a:r>
+            <a:endParaRPr lang="en-US" sz="1300" dirty="0"/>
+          </a:p>
+        </p:txBody>
+      </p:sp>
+      <p:sp>
+        <p:nvSpPr>
+          <p:cNvPr id="9" name="Text 7">
+            <a:extLst>
+              <a:ext uri="{FF2B5EF4-FFF2-40B4-BE49-F238E27FC236}">
+                <a16:creationId xmlns:a16="http://schemas.microsoft.com/office/drawing/2014/main" id="{14468849-A930-458A-9AEA-DBB47554CAA2}"/>
+              </a:ext>
+            </a:extLst>
+          </p:cNvPr>
+          <p:cNvSpPr/>
+          <p:nvPr/>
+        </p:nvSpPr>
+        <p:spPr>
+          <a:xfrm>
+            <a:off x="548640" y="3703320"/>
+            <a:ext cx="8138160" cy="640080"/>
+          </a:xfrm>
+          <a:prstGeom prst="rect">
+            <a:avLst/>
+          </a:prstGeom>
+          <a:noFill/>
+          <a:ln/>
+        </p:spPr>
+        <p:txBody>
+          <a:bodyPr wrap="square" lIns="0" tIns="0" rIns="0" bIns="0" rtlCol="0" anchor="t"/>
+          <a:lstStyle/>
+          <a:p>
+            <a:pPr marL="0" indent="0">
+              <a:buNone/>
+            </a:pPr>
+            <a:r>
+              <a:rPr lang="en-US" sz="1100" dirty="0">
+                <a:solidFill>
+                  <a:srgbClr val="000000"/>
+                </a:solidFill>
+                <a:latin typeface="Calibri" pitchFamily="34" charset="0"/>
+                <a:ea typeface="Calibri" pitchFamily="34" charset="-122"/>
+                <a:cs typeface="Calibri" pitchFamily="34" charset="-120"/>
+              </a:rPr>
+              <a:t>Дълги алинеи в КСО и ЗКПО (определения с много точки). 2000 символа ≈ 540 токена при XLM-R — близо до 512-токенов лимит на embedding модели. Кандидати за вторично разделение по точка/буква (отговорност на Студент 2).</a:t>
+            </a:r>
+            <a:endParaRPr lang="en-US" sz="1100" dirty="0"/>
+          </a:p>
+        </p:txBody>
+      </p:sp>
+      <p:sp>
+        <p:nvSpPr>
+          <p:cNvPr id="10" name="Text 8">
+            <a:extLst>
+              <a:ext uri="{FF2B5EF4-FFF2-40B4-BE49-F238E27FC236}">
+                <a16:creationId xmlns:a16="http://schemas.microsoft.com/office/drawing/2014/main" id="{C790330D-96F5-44E4-B5D1-7EBBD2B690F7}"/>
+              </a:ext>
+            </a:extLst>
+          </p:cNvPr>
+          <p:cNvSpPr/>
+          <p:nvPr/>
+        </p:nvSpPr>
+        <p:spPr>
+          <a:xfrm>
+            <a:off x="457200" y="4389120"/>
+            <a:ext cx="8229600" cy="274320"/>
+          </a:xfrm>
+          <a:prstGeom prst="rect">
+            <a:avLst/>
+          </a:prstGeom>
+          <a:noFill/>
+          <a:ln/>
+        </p:spPr>
+        <p:txBody>
+          <a:bodyPr wrap="square" lIns="0" tIns="0" rIns="0" bIns="0" rtlCol="0" anchor="ctr"/>
+          <a:lstStyle/>
+          <a:p>
+            <a:pPr marL="0" indent="0">
+              <a:buNone/>
+            </a:pPr>
+            <a:r>
+              <a:rPr lang="en-US" sz="1300" b="1" dirty="0">
+                <a:solidFill>
+                  <a:srgbClr val="000000"/>
+                </a:solidFill>
+                <a:latin typeface="Calibri" pitchFamily="34" charset="0"/>
+                <a:ea typeface="Calibri" pitchFamily="34" charset="-122"/>
+                <a:cs typeface="Calibri" pitchFamily="34" charset="-120"/>
+              </a:rPr>
+              <a:t>4. Липсваща йерархия</a:t>
+            </a:r>
+            <a:endParaRPr lang="en-US" sz="1300" dirty="0"/>
+          </a:p>
+        </p:txBody>
+      </p:sp>
+    </p:spTree>
+    <p:extLst>
+      <p:ext uri="{BB962C8B-B14F-4D97-AF65-F5344CB8AC3E}">
+        <p14:creationId xmlns:p14="http://schemas.microsoft.com/office/powerpoint/2010/main" val="3323037335"/>
+      </p:ext>
+    </p:extLst>
+  </p:cSld>
+  <p:clrMapOvr>
+    <a:masterClrMapping/>
+  </p:clrMapOvr>
+</p:sld>
+</file>
+
+<file path=ppt/slides/slide8.xml><?xml version="1.0" encoding="utf-8"?>
+<p:sld xmlns:a="http://schemas.openxmlformats.org/drawingml/2006/main" xmlns:r="http://schemas.openxmlformats.org/officeDocument/2006/relationships" xmlns:p="http://schemas.openxmlformats.org/presentationml/2006/main">
   <p:cSld name="Slide 5">
     <p:spTree>
       <p:nvGrpSpPr>
@@ -4334,7 +9437,7 @@
 </p:sld>
 </file>
 
-<file path=ppt/slides/slide6.xml><?xml version="1.0" encoding="utf-8"?>
+<file path=ppt/slides/slide9.xml><?xml version="1.0" encoding="utf-8"?>
 <p:sld xmlns:a="http://schemas.openxmlformats.org/drawingml/2006/main" xmlns:r="http://schemas.openxmlformats.org/officeDocument/2006/relationships" xmlns:p="http://schemas.openxmlformats.org/presentationml/2006/main">
   <p:cSld>
     <p:spTree>
@@ -4566,691 +9669,6 @@
     <p:extLst>
       <p:ext uri="{BB962C8B-B14F-4D97-AF65-F5344CB8AC3E}">
         <p14:creationId xmlns:p14="http://schemas.microsoft.com/office/powerpoint/2010/main" val="1202389000"/>
-      </p:ext>
-    </p:extLst>
-  </p:cSld>
-  <p:clrMapOvr>
-    <a:masterClrMapping/>
-  </p:clrMapOvr>
-</p:sld>
-</file>
-
-<file path=ppt/slides/slide7.xml><?xml version="1.0" encoding="utf-8"?>
-<p:sld xmlns:a="http://schemas.openxmlformats.org/drawingml/2006/main" xmlns:r="http://schemas.openxmlformats.org/officeDocument/2006/relationships" xmlns:p="http://schemas.openxmlformats.org/presentationml/2006/main">
-  <p:cSld>
-    <p:spTree>
-      <p:nvGrpSpPr>
-        <p:cNvPr id="1" name=""/>
-        <p:cNvGrpSpPr/>
-        <p:nvPr/>
-      </p:nvGrpSpPr>
-      <p:grpSpPr>
-        <a:xfrm>
-          <a:off x="0" y="0"/>
-          <a:ext cx="0" cy="0"/>
-          <a:chOff x="0" y="0"/>
-          <a:chExt cx="0" cy="0"/>
-        </a:xfrm>
-      </p:grpSpPr>
-      <p:sp>
-        <p:nvSpPr>
-          <p:cNvPr id="2" name="Text 0"/>
-          <p:cNvSpPr/>
-          <p:nvPr/>
-        </p:nvSpPr>
-        <p:spPr>
-          <a:xfrm>
-            <a:off x="640080" y="457200"/>
-            <a:ext cx="7863840" cy="640080"/>
-          </a:xfrm>
-          <a:prstGeom prst="rect">
-            <a:avLst/>
-          </a:prstGeom>
-          <a:noFill/>
-          <a:ln/>
-        </p:spPr>
-        <p:txBody>
-          <a:bodyPr wrap="square" lIns="0" tIns="0" rIns="0" bIns="0" rtlCol="0" anchor="ctr"/>
-          <a:lstStyle/>
-          <a:p>
-            <a:pPr marL="0" indent="0">
-              <a:buNone/>
-            </a:pPr>
-            <a:r>
-              <a:rPr lang="bg-BG" sz="3000" b="1" dirty="0">
-                <a:solidFill>
-                  <a:srgbClr val="000000"/>
-                </a:solidFill>
-                <a:latin typeface="Calibri" pitchFamily="34" charset="0"/>
-                <a:ea typeface="Calibri" pitchFamily="34" charset="-122"/>
-                <a:cs typeface="Calibri" pitchFamily="34" charset="-120"/>
-              </a:rPr>
-              <a:t>От текст през вектори към знание</a:t>
-            </a:r>
-            <a:endParaRPr lang="en-US" sz="3000" dirty="0"/>
-          </a:p>
-        </p:txBody>
-      </p:sp>
-      <p:sp>
-        <p:nvSpPr>
-          <p:cNvPr id="3" name="Text 1"/>
-          <p:cNvSpPr/>
-          <p:nvPr/>
-        </p:nvSpPr>
-        <p:spPr>
-          <a:xfrm>
-            <a:off x="640080" y="1280160"/>
-            <a:ext cx="7863840" cy="822960"/>
-          </a:xfrm>
-          <a:prstGeom prst="rect">
-            <a:avLst/>
-          </a:prstGeom>
-          <a:noFill/>
-          <a:ln/>
-        </p:spPr>
-        <p:txBody>
-          <a:bodyPr wrap="square" lIns="0" tIns="0" rIns="0" bIns="0" rtlCol="0" anchor="t"/>
-          <a:lstStyle/>
-          <a:p>
-            <a:pPr marL="0" indent="0">
-              <a:buNone/>
-            </a:pPr>
-            <a:r>
-              <a:rPr lang="bg-BG" sz="1500" i="1" dirty="0">
-                <a:solidFill>
-                  <a:srgbClr val="000000"/>
-                </a:solidFill>
-                <a:latin typeface="Calibri" pitchFamily="34" charset="0"/>
-                <a:ea typeface="Calibri" pitchFamily="34" charset="-122"/>
-                <a:cs typeface="Calibri" pitchFamily="34" charset="-120"/>
-              </a:rPr>
-              <a:t>Целта на тази част е да превърне форматирана начална информация в система, която да може да отговаря на въпроси на нишови потребителски въпроси</a:t>
-            </a:r>
-            <a:endParaRPr lang="en-US" sz="1500" dirty="0"/>
-          </a:p>
-        </p:txBody>
-      </p:sp>
-      <p:sp>
-        <p:nvSpPr>
-          <p:cNvPr id="4" name="Text 2"/>
-          <p:cNvSpPr/>
-          <p:nvPr/>
-        </p:nvSpPr>
-        <p:spPr>
-          <a:xfrm>
-            <a:off x="640080" y="2286000"/>
-            <a:ext cx="7863840" cy="365760"/>
-          </a:xfrm>
-          <a:prstGeom prst="rect">
-            <a:avLst/>
-          </a:prstGeom>
-          <a:noFill/>
-          <a:ln/>
-        </p:spPr>
-        <p:txBody>
-          <a:bodyPr wrap="square" lIns="0" tIns="0" rIns="0" bIns="0" rtlCol="0" anchor="ctr"/>
-          <a:lstStyle/>
-          <a:p>
-            <a:pPr marL="0" indent="0">
-              <a:buNone/>
-            </a:pPr>
-            <a:r>
-              <a:rPr lang="en-US" sz="1600" b="1" dirty="0">
-                <a:solidFill>
-                  <a:srgbClr val="000000"/>
-                </a:solidFill>
-                <a:latin typeface="Calibri" pitchFamily="34" charset="0"/>
-                <a:ea typeface="Calibri" pitchFamily="34" charset="-122"/>
-                <a:cs typeface="Calibri" pitchFamily="34" charset="-120"/>
-              </a:rPr>
-              <a:t>Основни стъпки:</a:t>
-            </a:r>
-            <a:endParaRPr lang="en-US" sz="1600" dirty="0"/>
-          </a:p>
-        </p:txBody>
-      </p:sp>
-      <p:sp>
-        <p:nvSpPr>
-          <p:cNvPr id="5" name="Text 3"/>
-          <p:cNvSpPr/>
-          <p:nvPr/>
-        </p:nvSpPr>
-        <p:spPr>
-          <a:xfrm>
-            <a:off x="822960" y="2697480"/>
-            <a:ext cx="7680960" cy="2286000"/>
-          </a:xfrm>
-          <a:prstGeom prst="rect">
-            <a:avLst/>
-          </a:prstGeom>
-          <a:noFill/>
-          <a:ln/>
-        </p:spPr>
-        <p:txBody>
-          <a:bodyPr wrap="square" lIns="0" tIns="0" rIns="0" bIns="0" rtlCol="0" anchor="t"/>
-          <a:lstStyle/>
-          <a:p>
-            <a:pPr marL="342900" indent="-342900">
-              <a:spcAft>
-                <a:spcPts val="400"/>
-              </a:spcAft>
-              <a:buSzPct val="100000"/>
-              <a:buFont typeface="+mj-lt"/>
-              <a:buAutoNum type="arabicPeriod"/>
-            </a:pPr>
-            <a:r>
-              <a:rPr lang="bg-BG" sz="1400" dirty="0">
-                <a:solidFill>
-                  <a:srgbClr val="000000"/>
-                </a:solidFill>
-                <a:latin typeface="Calibri" pitchFamily="34" charset="0"/>
-                <a:ea typeface="Calibri" pitchFamily="34" charset="-122"/>
-                <a:cs typeface="Calibri" pitchFamily="34" charset="-120"/>
-              </a:rPr>
-              <a:t>Прекарване на данните през </a:t>
-            </a:r>
-            <a:r>
-              <a:rPr lang="en-GB" sz="1400" dirty="0">
-                <a:solidFill>
-                  <a:srgbClr val="000000"/>
-                </a:solidFill>
-                <a:latin typeface="Calibri" pitchFamily="34" charset="0"/>
-                <a:ea typeface="Calibri" pitchFamily="34" charset="-122"/>
-                <a:cs typeface="Calibri" pitchFamily="34" charset="-120"/>
-              </a:rPr>
-              <a:t>embedding</a:t>
-            </a:r>
-            <a:r>
-              <a:rPr lang="bg-BG" sz="1400" dirty="0">
-                <a:solidFill>
-                  <a:srgbClr val="000000"/>
-                </a:solidFill>
-                <a:latin typeface="Calibri" pitchFamily="34" charset="0"/>
-                <a:ea typeface="Calibri" pitchFamily="34" charset="-122"/>
-                <a:cs typeface="Calibri" pitchFamily="34" charset="-120"/>
-              </a:rPr>
-              <a:t> модел за семантично кодиране</a:t>
-            </a:r>
-            <a:endParaRPr lang="en-US" sz="1400" dirty="0"/>
-          </a:p>
-          <a:p>
-            <a:pPr marL="342900" indent="-342900">
-              <a:spcAft>
-                <a:spcPts val="400"/>
-              </a:spcAft>
-              <a:buSzPct val="100000"/>
-              <a:buFont typeface="+mj-lt"/>
-              <a:buAutoNum type="arabicPeriod"/>
-            </a:pPr>
-            <a:r>
-              <a:rPr lang="bg-BG" sz="1400" dirty="0">
-                <a:solidFill>
-                  <a:srgbClr val="000000"/>
-                </a:solidFill>
-                <a:latin typeface="Calibri" pitchFamily="34" charset="0"/>
-                <a:ea typeface="Calibri" pitchFamily="34" charset="-122"/>
-                <a:cs typeface="Calibri" pitchFamily="34" charset="-120"/>
-              </a:rPr>
-              <a:t>Подготвяне на база знания във формат на вектори</a:t>
-            </a:r>
-            <a:endParaRPr lang="en-US" sz="1400" dirty="0"/>
-          </a:p>
-          <a:p>
-            <a:pPr marL="342900" indent="-342900">
-              <a:spcAft>
-                <a:spcPts val="400"/>
-              </a:spcAft>
-              <a:buSzPct val="100000"/>
-              <a:buFont typeface="+mj-lt"/>
-              <a:buAutoNum type="arabicPeriod"/>
-            </a:pPr>
-            <a:r>
-              <a:rPr lang="bg-BG" sz="1400" dirty="0">
-                <a:solidFill>
-                  <a:srgbClr val="000000"/>
-                </a:solidFill>
-                <a:latin typeface="Calibri" pitchFamily="34" charset="0"/>
-                <a:ea typeface="Calibri" pitchFamily="34" charset="-122"/>
-                <a:cs typeface="Calibri" pitchFamily="34" charset="-120"/>
-              </a:rPr>
-              <a:t>Задаване на поведение на агента</a:t>
-            </a:r>
-            <a:endParaRPr lang="en-US" sz="1400" dirty="0"/>
-          </a:p>
-          <a:p>
-            <a:pPr marL="342900" indent="-342900">
-              <a:spcAft>
-                <a:spcPts val="400"/>
-              </a:spcAft>
-              <a:buSzPct val="100000"/>
-              <a:buFont typeface="+mj-lt"/>
-              <a:buAutoNum type="arabicPeriod"/>
-            </a:pPr>
-            <a:r>
-              <a:rPr lang="bg-BG" sz="1400" dirty="0">
-                <a:solidFill>
-                  <a:srgbClr val="000000"/>
-                </a:solidFill>
-                <a:latin typeface="Calibri" pitchFamily="34" charset="0"/>
-                <a:ea typeface="Calibri" pitchFamily="34" charset="-122"/>
-                <a:cs typeface="Calibri" pitchFamily="34" charset="-120"/>
-              </a:rPr>
-              <a:t>Обработка на въпрос на потребителя</a:t>
-            </a:r>
-            <a:endParaRPr lang="en-US" sz="1400" dirty="0"/>
-          </a:p>
-        </p:txBody>
-      </p:sp>
-    </p:spTree>
-    <p:extLst>
-      <p:ext uri="{BB962C8B-B14F-4D97-AF65-F5344CB8AC3E}">
-        <p14:creationId xmlns:p14="http://schemas.microsoft.com/office/powerpoint/2010/main" val="1837750681"/>
-      </p:ext>
-    </p:extLst>
-  </p:cSld>
-  <p:clrMapOvr>
-    <a:masterClrMapping/>
-  </p:clrMapOvr>
-</p:sld>
-</file>
-
-<file path=ppt/slides/slide8.xml><?xml version="1.0" encoding="utf-8"?>
-<p:sld xmlns:a="http://schemas.openxmlformats.org/drawingml/2006/main" xmlns:r="http://schemas.openxmlformats.org/officeDocument/2006/relationships" xmlns:p="http://schemas.openxmlformats.org/presentationml/2006/main">
-  <p:cSld>
-    <p:spTree>
-      <p:nvGrpSpPr>
-        <p:cNvPr id="1" name=""/>
-        <p:cNvGrpSpPr/>
-        <p:nvPr/>
-      </p:nvGrpSpPr>
-      <p:grpSpPr>
-        <a:xfrm>
-          <a:off x="0" y="0"/>
-          <a:ext cx="0" cy="0"/>
-          <a:chOff x="0" y="0"/>
-          <a:chExt cx="0" cy="0"/>
-        </a:xfrm>
-      </p:grpSpPr>
-      <p:sp>
-        <p:nvSpPr>
-          <p:cNvPr id="2" name="Text 0"/>
-          <p:cNvSpPr/>
-          <p:nvPr/>
-        </p:nvSpPr>
-        <p:spPr>
-          <a:xfrm>
-            <a:off x="640080" y="457200"/>
-            <a:ext cx="7863840" cy="640080"/>
-          </a:xfrm>
-          <a:prstGeom prst="rect">
-            <a:avLst/>
-          </a:prstGeom>
-          <a:noFill/>
-          <a:ln/>
-        </p:spPr>
-        <p:txBody>
-          <a:bodyPr wrap="square" lIns="0" tIns="0" rIns="0" bIns="0" rtlCol="0" anchor="ctr"/>
-          <a:lstStyle/>
-          <a:p>
-            <a:pPr marL="0" indent="0">
-              <a:buNone/>
-            </a:pPr>
-            <a:r>
-              <a:rPr lang="bg-BG" sz="3000" b="1" dirty="0">
-                <a:solidFill>
-                  <a:srgbClr val="000000"/>
-                </a:solidFill>
-                <a:latin typeface="Calibri" pitchFamily="34" charset="0"/>
-                <a:ea typeface="Calibri" pitchFamily="34" charset="-122"/>
-                <a:cs typeface="Calibri" pitchFamily="34" charset="-120"/>
-              </a:rPr>
-              <a:t>Технологичен стек:</a:t>
-            </a:r>
-            <a:endParaRPr lang="en-US" sz="3000" dirty="0"/>
-          </a:p>
-        </p:txBody>
-      </p:sp>
-      <p:sp>
-        <p:nvSpPr>
-          <p:cNvPr id="5" name="Text 3"/>
-          <p:cNvSpPr/>
-          <p:nvPr/>
-        </p:nvSpPr>
-        <p:spPr>
-          <a:xfrm>
-            <a:off x="640080" y="1428750"/>
-            <a:ext cx="7680960" cy="2286000"/>
-          </a:xfrm>
-          <a:prstGeom prst="rect">
-            <a:avLst/>
-          </a:prstGeom>
-          <a:noFill/>
-          <a:ln/>
-        </p:spPr>
-        <p:txBody>
-          <a:bodyPr wrap="square" lIns="0" tIns="0" rIns="0" bIns="0" rtlCol="0" anchor="t"/>
-          <a:lstStyle/>
-          <a:p>
-            <a:pPr marL="285750" indent="-285750">
-              <a:spcAft>
-                <a:spcPts val="400"/>
-              </a:spcAft>
-              <a:buSzPct val="100000"/>
-              <a:buFont typeface="Arial" panose="020B0604020202020204" pitchFamily="34" charset="0"/>
-              <a:buChar char="•"/>
-            </a:pPr>
-            <a:r>
-              <a:rPr lang="en-GB" dirty="0"/>
-              <a:t>Multilingual-E5</a:t>
-            </a:r>
-          </a:p>
-          <a:p>
-            <a:pPr marL="742950" lvl="1" indent="-285750">
-              <a:spcAft>
-                <a:spcPts val="400"/>
-              </a:spcAft>
-              <a:buSzPct val="100000"/>
-              <a:buFont typeface="Arial" panose="020B0604020202020204" pitchFamily="34" charset="0"/>
-              <a:buChar char="•"/>
-            </a:pPr>
-            <a:r>
-              <a:rPr lang="bg-BG" dirty="0"/>
-              <a:t>Локален модел на </a:t>
-            </a:r>
-            <a:r>
-              <a:rPr lang="en-GB" dirty="0"/>
-              <a:t>Microsoft</a:t>
-            </a:r>
-            <a:r>
-              <a:rPr lang="bg-BG" dirty="0"/>
-              <a:t> за </a:t>
-            </a:r>
-            <a:r>
-              <a:rPr lang="en-GB" dirty="0"/>
-              <a:t>embeddings</a:t>
-            </a:r>
-          </a:p>
-          <a:p>
-            <a:pPr marL="285750" indent="-285750">
-              <a:spcAft>
-                <a:spcPts val="400"/>
-              </a:spcAft>
-              <a:buSzPct val="100000"/>
-              <a:buFont typeface="Arial" panose="020B0604020202020204" pitchFamily="34" charset="0"/>
-              <a:buChar char="•"/>
-            </a:pPr>
-            <a:endParaRPr lang="bg-BG" dirty="0"/>
-          </a:p>
-          <a:p>
-            <a:pPr marL="285750" indent="-285750">
-              <a:spcAft>
-                <a:spcPts val="400"/>
-              </a:spcAft>
-              <a:buSzPct val="100000"/>
-              <a:buFont typeface="Arial" panose="020B0604020202020204" pitchFamily="34" charset="0"/>
-              <a:buChar char="•"/>
-            </a:pPr>
-            <a:r>
-              <a:rPr lang="en-GB" dirty="0"/>
-              <a:t>FAISS</a:t>
-            </a:r>
-          </a:p>
-          <a:p>
-            <a:pPr marL="742950" lvl="1" indent="-285750">
-              <a:spcAft>
-                <a:spcPts val="400"/>
-              </a:spcAft>
-              <a:buSzPct val="100000"/>
-              <a:buFont typeface="Arial" panose="020B0604020202020204" pitchFamily="34" charset="0"/>
-              <a:buChar char="•"/>
-            </a:pPr>
-            <a:r>
-              <a:rPr lang="bg-BG" dirty="0"/>
-              <a:t>Библиотека на </a:t>
-            </a:r>
-            <a:r>
-              <a:rPr lang="en-GB" dirty="0"/>
-              <a:t>Facebook (Meta) </a:t>
-            </a:r>
-            <a:r>
-              <a:rPr lang="bg-BG" dirty="0"/>
-              <a:t>за векторно търсене</a:t>
-            </a:r>
-            <a:endParaRPr lang="en-GB" dirty="0"/>
-          </a:p>
-          <a:p>
-            <a:pPr marL="742950" lvl="1" indent="-285750">
-              <a:spcAft>
-                <a:spcPts val="400"/>
-              </a:spcAft>
-              <a:buSzPct val="100000"/>
-              <a:buFont typeface="Arial" panose="020B0604020202020204" pitchFamily="34" charset="0"/>
-              <a:buChar char="•"/>
-            </a:pPr>
-            <a:endParaRPr lang="en-GB" dirty="0"/>
-          </a:p>
-          <a:p>
-            <a:pPr marL="285750" indent="-285750">
-              <a:spcAft>
-                <a:spcPts val="400"/>
-              </a:spcAft>
-              <a:buSzPct val="100000"/>
-              <a:buFont typeface="Arial" panose="020B0604020202020204" pitchFamily="34" charset="0"/>
-              <a:buChar char="•"/>
-            </a:pPr>
-            <a:r>
-              <a:rPr lang="en-GB" dirty="0"/>
-              <a:t>Gemini 2.5</a:t>
-            </a:r>
-          </a:p>
-          <a:p>
-            <a:pPr marL="742950" lvl="1" indent="-285750">
-              <a:spcAft>
-                <a:spcPts val="400"/>
-              </a:spcAft>
-              <a:buSzPct val="100000"/>
-              <a:buFont typeface="Arial" panose="020B0604020202020204" pitchFamily="34" charset="0"/>
-              <a:buChar char="•"/>
-            </a:pPr>
-            <a:r>
-              <a:rPr lang="bg-BG" dirty="0"/>
-              <a:t>Безплатна версия на добър за Български </a:t>
-            </a:r>
-            <a:r>
-              <a:rPr lang="en-GB" dirty="0"/>
-              <a:t>LLM </a:t>
-            </a:r>
-            <a:r>
-              <a:rPr lang="bg-BG" dirty="0"/>
-              <a:t> за генериране на отговор</a:t>
-            </a:r>
-            <a:endParaRPr lang="en-GB" dirty="0"/>
-          </a:p>
-          <a:p>
-            <a:pPr marL="285750" indent="-285750">
-              <a:spcAft>
-                <a:spcPts val="400"/>
-              </a:spcAft>
-              <a:buSzPct val="100000"/>
-              <a:buFont typeface="Arial" panose="020B0604020202020204" pitchFamily="34" charset="0"/>
-              <a:buChar char="•"/>
-            </a:pPr>
-            <a:endParaRPr lang="bg-BG" dirty="0"/>
-          </a:p>
-        </p:txBody>
-      </p:sp>
-    </p:spTree>
-    <p:extLst>
-      <p:ext uri="{BB962C8B-B14F-4D97-AF65-F5344CB8AC3E}">
-        <p14:creationId xmlns:p14="http://schemas.microsoft.com/office/powerpoint/2010/main" val="372776953"/>
-      </p:ext>
-    </p:extLst>
-  </p:cSld>
-  <p:clrMapOvr>
-    <a:masterClrMapping/>
-  </p:clrMapOvr>
-</p:sld>
-</file>
-
-<file path=ppt/slides/slide9.xml><?xml version="1.0" encoding="utf-8"?>
-<p:sld xmlns:a="http://schemas.openxmlformats.org/drawingml/2006/main" xmlns:r="http://schemas.openxmlformats.org/officeDocument/2006/relationships" xmlns:p="http://schemas.openxmlformats.org/presentationml/2006/main">
-  <p:cSld>
-    <p:spTree>
-      <p:nvGrpSpPr>
-        <p:cNvPr id="1" name=""/>
-        <p:cNvGrpSpPr/>
-        <p:nvPr/>
-      </p:nvGrpSpPr>
-      <p:grpSpPr>
-        <a:xfrm>
-          <a:off x="0" y="0"/>
-          <a:ext cx="0" cy="0"/>
-          <a:chOff x="0" y="0"/>
-          <a:chExt cx="0" cy="0"/>
-        </a:xfrm>
-      </p:grpSpPr>
-      <p:sp>
-        <p:nvSpPr>
-          <p:cNvPr id="2" name="Text 0"/>
-          <p:cNvSpPr/>
-          <p:nvPr/>
-        </p:nvSpPr>
-        <p:spPr>
-          <a:xfrm>
-            <a:off x="640080" y="457200"/>
-            <a:ext cx="7863840" cy="640080"/>
-          </a:xfrm>
-          <a:prstGeom prst="rect">
-            <a:avLst/>
-          </a:prstGeom>
-          <a:noFill/>
-          <a:ln/>
-        </p:spPr>
-        <p:txBody>
-          <a:bodyPr wrap="square" lIns="0" tIns="0" rIns="0" bIns="0" rtlCol="0" anchor="ctr"/>
-          <a:lstStyle/>
-          <a:p>
-            <a:pPr marL="0" indent="0">
-              <a:buNone/>
-            </a:pPr>
-            <a:r>
-              <a:rPr lang="en-GB" sz="3000" b="1" dirty="0">
-                <a:solidFill>
-                  <a:srgbClr val="000000"/>
-                </a:solidFill>
-                <a:latin typeface="Calibri" pitchFamily="34" charset="0"/>
-                <a:ea typeface="Calibri" pitchFamily="34" charset="-122"/>
-                <a:cs typeface="Calibri" pitchFamily="34" charset="-120"/>
-              </a:rPr>
-              <a:t>RAG Pipeline</a:t>
-            </a:r>
-            <a:endParaRPr lang="en-US" sz="3000" dirty="0"/>
-          </a:p>
-        </p:txBody>
-      </p:sp>
-      <p:sp>
-        <p:nvSpPr>
-          <p:cNvPr id="5" name="Text 3"/>
-          <p:cNvSpPr/>
-          <p:nvPr/>
-        </p:nvSpPr>
-        <p:spPr>
-          <a:xfrm>
-            <a:off x="640080" y="1428750"/>
-            <a:ext cx="7680960" cy="2286000"/>
-          </a:xfrm>
-          <a:prstGeom prst="rect">
-            <a:avLst/>
-          </a:prstGeom>
-          <a:noFill/>
-          <a:ln/>
-        </p:spPr>
-        <p:txBody>
-          <a:bodyPr wrap="square" lIns="0" tIns="0" rIns="0" bIns="0" rtlCol="0" anchor="t"/>
-          <a:lstStyle/>
-          <a:p>
-            <a:pPr marL="342900" indent="-342900">
-              <a:spcAft>
-                <a:spcPts val="400"/>
-              </a:spcAft>
-              <a:buSzPct val="100000"/>
-              <a:buFont typeface="+mj-lt"/>
-              <a:buAutoNum type="arabicPeriod"/>
-            </a:pPr>
-            <a:r>
-              <a:rPr lang="bg-BG" dirty="0"/>
-              <a:t>Кодираме въпроса (</a:t>
-            </a:r>
-            <a:r>
-              <a:rPr lang="en-GB" dirty="0"/>
-              <a:t>Query)</a:t>
-            </a:r>
-            <a:endParaRPr lang="bg-BG" dirty="0"/>
-          </a:p>
-          <a:p>
-            <a:pPr marL="342900" indent="-342900">
-              <a:spcAft>
-                <a:spcPts val="400"/>
-              </a:spcAft>
-              <a:buSzPct val="100000"/>
-              <a:buFont typeface="+mj-lt"/>
-              <a:buAutoNum type="arabicPeriod"/>
-            </a:pPr>
-            <a:r>
-              <a:rPr lang="bg-BG" dirty="0"/>
-              <a:t>Извличаме на </a:t>
-            </a:r>
-            <a:r>
-              <a:rPr lang="en-GB" dirty="0"/>
-              <a:t>Top-K</a:t>
-            </a:r>
-            <a:r>
-              <a:rPr lang="bg-BG" dirty="0"/>
-              <a:t> съвпадения за контекст (</a:t>
-            </a:r>
-            <a:r>
-              <a:rPr lang="en-GB" dirty="0"/>
-              <a:t>Retrieval)</a:t>
-            </a:r>
-          </a:p>
-          <a:p>
-            <a:pPr marL="342900" indent="-342900">
-              <a:spcAft>
-                <a:spcPts val="400"/>
-              </a:spcAft>
-              <a:buSzPct val="100000"/>
-              <a:buFont typeface="+mj-lt"/>
-              <a:buAutoNum type="arabicPeriod"/>
-            </a:pPr>
-            <a:r>
-              <a:rPr lang="bg-BG" dirty="0"/>
-              <a:t>Подаваме цялата информация заедно със системния промпт на </a:t>
-            </a:r>
-            <a:r>
-              <a:rPr lang="en-GB" dirty="0"/>
-              <a:t>Gemini</a:t>
-            </a:r>
-          </a:p>
-          <a:p>
-            <a:pPr marL="342900" indent="-342900">
-              <a:spcAft>
-                <a:spcPts val="400"/>
-              </a:spcAft>
-              <a:buSzPct val="100000"/>
-              <a:buFont typeface="+mj-lt"/>
-              <a:buAutoNum type="arabicPeriod"/>
-            </a:pPr>
-            <a:r>
-              <a:rPr lang="bg-BG" dirty="0"/>
-              <a:t>Връщаме положителен отговор с цитиране на закон и член или отговор за липсва на подходящ контекст</a:t>
-            </a:r>
-          </a:p>
-        </p:txBody>
-      </p:sp>
-    </p:spTree>
-    <p:extLst>
-      <p:ext uri="{BB962C8B-B14F-4D97-AF65-F5344CB8AC3E}">
-        <p14:creationId xmlns:p14="http://schemas.microsoft.com/office/powerpoint/2010/main" val="322112032"/>
       </p:ext>
     </p:extLst>
   </p:cSld>
